--- a/1.6 Seasonality tests.pptx
+++ b/1.6 Seasonality tests.pptx
@@ -385,7 +385,7 @@
           <a:p>
             <a:fld id="{0CBFB8CE-488C-4A7E-87F2-3AF6127C51C1}" type="datetimeFigureOut">
               <a:rPr lang="en-IE" smtClean="0"/>
-              <a:t>25/09/2026</a:t>
+              <a:t>28/09/2026</a:t>
             </a:fld>
             <a:endParaRPr lang="en-IE"/>
           </a:p>
@@ -1673,6 +1673,115 @@
 </p:notesMaster>
 </file>
 
+<file path=ppt/notesSlides/notesSlide1.xml><?xml version="1.0" encoding="utf-8"?>
+<p:notes xmlns:a="http://schemas.openxmlformats.org/drawingml/2006/main" xmlns:r="http://schemas.openxmlformats.org/officeDocument/2006/relationships" xmlns:p="http://schemas.openxmlformats.org/presentationml/2006/main">
+  <p:cSld>
+    <p:spTree>
+      <p:nvGrpSpPr>
+        <p:cNvPr id="1" name=""/>
+        <p:cNvGrpSpPr/>
+        <p:nvPr/>
+      </p:nvGrpSpPr>
+      <p:grpSpPr>
+        <a:xfrm>
+          <a:off x="0" y="0"/>
+          <a:ext cx="0" cy="0"/>
+          <a:chOff x="0" y="0"/>
+          <a:chExt cx="0" cy="0"/>
+        </a:xfrm>
+      </p:grpSpPr>
+      <p:sp>
+        <p:nvSpPr>
+          <p:cNvPr id="2" name="Espace réservé de l'image des diapositives 1"/>
+          <p:cNvSpPr>
+            <a:spLocks noGrp="1" noRot="1" noChangeAspect="1"/>
+          </p:cNvSpPr>
+          <p:nvPr>
+            <p:ph type="sldImg"/>
+          </p:nvPr>
+        </p:nvSpPr>
+        <p:spPr/>
+      </p:sp>
+      <p:sp>
+        <p:nvSpPr>
+          <p:cNvPr id="3" name="Espace réservé des notes 2"/>
+          <p:cNvSpPr>
+            <a:spLocks noGrp="1"/>
+          </p:cNvSpPr>
+          <p:nvPr>
+            <p:ph type="body" idx="1"/>
+          </p:nvPr>
+        </p:nvSpPr>
+        <p:spPr/>
+        <p:txBody>
+          <a:bodyPr/>
+          <a:lstStyle/>
+          <a:p>
+            <a:endParaRPr lang="en-GB" dirty="0"/>
+          </a:p>
+        </p:txBody>
+      </p:sp>
+      <p:sp>
+        <p:nvSpPr>
+          <p:cNvPr id="4" name="Espace réservé du numéro de diapositive 3"/>
+          <p:cNvSpPr>
+            <a:spLocks noGrp="1"/>
+          </p:cNvSpPr>
+          <p:nvPr>
+            <p:ph type="sldNum" idx="12"/>
+          </p:nvPr>
+        </p:nvSpPr>
+        <p:spPr/>
+        <p:txBody>
+          <a:bodyPr/>
+          <a:lstStyle/>
+          <a:p>
+            <a:pPr marL="0" marR="0" lvl="0" indent="0" algn="r" rtl="0">
+              <a:spcBef>
+                <a:spcPts val="0"/>
+              </a:spcBef>
+              <a:spcAft>
+                <a:spcPts val="0"/>
+              </a:spcAft>
+              <a:buNone/>
+            </a:pPr>
+            <a:fld id="{00000000-1234-1234-1234-123412341234}" type="slidenum">
+              <a:rPr lang="en-GB" sz="1200" b="0" i="0" u="none" strike="noStrike" cap="none" smtClean="0">
+                <a:solidFill>
+                  <a:schemeClr val="dk1"/>
+                </a:solidFill>
+                <a:latin typeface="Calibri"/>
+                <a:ea typeface="Calibri"/>
+                <a:cs typeface="Calibri"/>
+                <a:sym typeface="Calibri"/>
+              </a:rPr>
+              <a:t>4</a:t>
+            </a:fld>
+            <a:endParaRPr lang="en-GB" sz="1200" b="0" i="0" u="none" strike="noStrike" cap="none">
+              <a:solidFill>
+                <a:schemeClr val="dk1"/>
+              </a:solidFill>
+              <a:latin typeface="Calibri"/>
+              <a:ea typeface="Calibri"/>
+              <a:cs typeface="Calibri"/>
+              <a:sym typeface="Calibri"/>
+            </a:endParaRPr>
+          </a:p>
+        </p:txBody>
+      </p:sp>
+    </p:spTree>
+    <p:extLst>
+      <p:ext uri="{BB962C8B-B14F-4D97-AF65-F5344CB8AC3E}">
+        <p14:creationId xmlns:p14="http://schemas.microsoft.com/office/powerpoint/2010/main" val="207767069"/>
+      </p:ext>
+    </p:extLst>
+  </p:cSld>
+  <p:clrMapOvr>
+    <a:masterClrMapping/>
+  </p:clrMapOvr>
+</p:notes>
+</file>
+
 <file path=ppt/slideLayouts/slideLayout1.xml><?xml version="1.0" encoding="utf-8"?>
 <p:sldLayout xmlns:a="http://schemas.openxmlformats.org/drawingml/2006/main" xmlns:r="http://schemas.openxmlformats.org/officeDocument/2006/relationships" xmlns:p="http://schemas.openxmlformats.org/presentationml/2006/main" matchingName="Title Slide" preserve="1" userDrawn="1">
   <p:cSld name=" Title Slide">
@@ -4948,10 +5057,6 @@
           <a:bodyPr/>
           <a:lstStyle/>
           <a:p>
-            <a:r>
-              <a:rPr lang="en-US"/>
-              <a:t>15-17/10/2024</a:t>
-            </a:r>
             <a:endParaRPr lang="en-GB"/>
           </a:p>
         </p:txBody>
@@ -5478,7 +5583,7 @@
     <p:sldLayoutId id="2147483723" r:id="rId5"/>
     <p:sldLayoutId id="2147483728" r:id="rId6"/>
   </p:sldLayoutIdLst>
-  <p:hf sldNum="0" hdr="0" dt="0"/>
+  <p:hf hdr="0" dt="0"/>
   <p:txStyles>
     <p:titleStyle>
       <a:defPPr marR="0" lvl="0" algn="l" rtl="0">
@@ -6336,6 +6441,35 @@
       </p:sp>
       <p:sp>
         <p:nvSpPr>
+          <p:cNvPr id="3" name="Espace réservé du numéro de diapositive 2">
+            <a:extLst>
+              <a:ext uri="{FF2B5EF4-FFF2-40B4-BE49-F238E27FC236}">
+                <a16:creationId xmlns:a16="http://schemas.microsoft.com/office/drawing/2014/main" id="{5E4528E1-465C-CB9A-D6ED-C459F52689CA}"/>
+              </a:ext>
+            </a:extLst>
+          </p:cNvPr>
+          <p:cNvSpPr>
+            <a:spLocks noGrp="1"/>
+          </p:cNvSpPr>
+          <p:nvPr>
+            <p:ph type="sldNum" idx="12"/>
+          </p:nvPr>
+        </p:nvSpPr>
+        <p:spPr/>
+        <p:txBody>
+          <a:bodyPr/>
+          <a:lstStyle/>
+          <a:p>
+            <a:fld id="{71CC62B1-FA1F-4849-B719-012F8D8A46B3}" type="slidenum">
+              <a:rPr lang="en-GB" smtClean="0"/>
+              <a:t>10</a:t>
+            </a:fld>
+            <a:endParaRPr lang="en-GB"/>
+          </a:p>
+        </p:txBody>
+      </p:sp>
+      <p:sp>
+        <p:nvSpPr>
           <p:cNvPr id="5" name="Footer Placeholder 4">
             <a:extLst>
               <a:ext uri="{FF2B5EF4-FFF2-40B4-BE49-F238E27FC236}">
@@ -6347,10 +6481,15 @@
             <a:spLocks noGrp="1"/>
           </p:cNvSpPr>
           <p:nvPr>
-            <p:ph type="ftr" sz="quarter" idx="11"/>
+            <p:ph type="ftr" sz="quarter" idx="4294967295"/>
           </p:nvPr>
         </p:nvSpPr>
-        <p:spPr/>
+        <p:spPr>
+          <a:xfrm>
+            <a:off x="0" y="0"/>
+            <a:ext cx="0" cy="0"/>
+          </a:xfrm>
+        </p:spPr>
         <p:txBody>
           <a:bodyPr/>
           <a:lstStyle/>
@@ -6384,8 +6523,8 @@
         </p:blipFill>
         <p:spPr>
           <a:xfrm>
-            <a:off x="441986" y="2096955"/>
-            <a:ext cx="4409331" cy="3267723"/>
+            <a:off x="970722" y="1901951"/>
+            <a:ext cx="5718895" cy="4238231"/>
           </a:xfrm>
           <a:prstGeom prst="rect">
             <a:avLst/>
@@ -6427,70 +6566,6 @@
           <a:chExt cx="0" cy="0"/>
         </a:xfrm>
       </p:grpSpPr>
-      <p:sp>
-        <p:nvSpPr>
-          <p:cNvPr id="2" name="Title 1">
-            <a:extLst>
-              <a:ext uri="{FF2B5EF4-FFF2-40B4-BE49-F238E27FC236}">
-                <a16:creationId xmlns:a16="http://schemas.microsoft.com/office/drawing/2014/main" id="{1674612C-4204-0C99-33A2-7EB1815A6740}"/>
-              </a:ext>
-            </a:extLst>
-          </p:cNvPr>
-          <p:cNvSpPr>
-            <a:spLocks noGrp="1"/>
-          </p:cNvSpPr>
-          <p:nvPr>
-            <p:ph type="title"/>
-          </p:nvPr>
-        </p:nvSpPr>
-        <p:spPr/>
-        <p:txBody>
-          <a:bodyPr/>
-          <a:lstStyle/>
-          <a:p>
-            <a:r>
-              <a:rPr lang="fr-BE" dirty="0"/>
-              <a:t>Trading </a:t>
-            </a:r>
-            <a:r>
-              <a:rPr lang="fr-BE" dirty="0" err="1"/>
-              <a:t>days</a:t>
-            </a:r>
-            <a:r>
-              <a:rPr lang="fr-BE" dirty="0"/>
-              <a:t> tests in R</a:t>
-            </a:r>
-          </a:p>
-        </p:txBody>
-      </p:sp>
-      <p:sp>
-        <p:nvSpPr>
-          <p:cNvPr id="5" name="Footer Placeholder 4">
-            <a:extLst>
-              <a:ext uri="{FF2B5EF4-FFF2-40B4-BE49-F238E27FC236}">
-                <a16:creationId xmlns:a16="http://schemas.microsoft.com/office/drawing/2014/main" id="{DF69B21F-C80E-2986-0A8B-EC53A35F2885}"/>
-              </a:ext>
-            </a:extLst>
-          </p:cNvPr>
-          <p:cNvSpPr>
-            <a:spLocks noGrp="1"/>
-          </p:cNvSpPr>
-          <p:nvPr>
-            <p:ph type="ftr" sz="quarter" idx="11"/>
-          </p:nvPr>
-        </p:nvSpPr>
-        <p:spPr/>
-        <p:txBody>
-          <a:bodyPr/>
-          <a:lstStyle/>
-          <a:p>
-            <a:r>
-              <a:rPr lang="en-GB"/>
-              <a:t>Seasonality and trading days tests</a:t>
-            </a:r>
-          </a:p>
-        </p:txBody>
-      </p:sp>
       <p:pic>
         <p:nvPicPr>
           <p:cNvPr id="7" name="Picture 6">
@@ -6513,8 +6588,8 @@
         </p:blipFill>
         <p:spPr>
           <a:xfrm>
-            <a:off x="316308" y="1569510"/>
-            <a:ext cx="6240214" cy="3715884"/>
+            <a:off x="236250" y="1800731"/>
+            <a:ext cx="7043426" cy="4194176"/>
           </a:xfrm>
           <a:prstGeom prst="rect">
             <a:avLst/>
@@ -6526,19 +6601,86 @@
           </a:ln>
         </p:spPr>
       </p:pic>
+      <p:sp>
+        <p:nvSpPr>
+          <p:cNvPr id="2" name="Title 1">
+            <a:extLst>
+              <a:ext uri="{FF2B5EF4-FFF2-40B4-BE49-F238E27FC236}">
+                <a16:creationId xmlns:a16="http://schemas.microsoft.com/office/drawing/2014/main" id="{1674612C-4204-0C99-33A2-7EB1815A6740}"/>
+              </a:ext>
+            </a:extLst>
+          </p:cNvPr>
+          <p:cNvSpPr>
+            <a:spLocks noGrp="1"/>
+          </p:cNvSpPr>
+          <p:nvPr>
+            <p:ph type="title"/>
+          </p:nvPr>
+        </p:nvSpPr>
+        <p:spPr/>
+        <p:txBody>
+          <a:bodyPr/>
+          <a:lstStyle/>
+          <a:p>
+            <a:r>
+              <a:rPr lang="fr-BE" dirty="0"/>
+              <a:t>Trading </a:t>
+            </a:r>
+            <a:r>
+              <a:rPr lang="fr-BE" dirty="0" err="1"/>
+              <a:t>days</a:t>
+            </a:r>
+            <a:r>
+              <a:rPr lang="fr-BE" dirty="0"/>
+              <a:t> tests in R</a:t>
+            </a:r>
+          </a:p>
+        </p:txBody>
+      </p:sp>
+      <p:sp>
+        <p:nvSpPr>
+          <p:cNvPr id="3" name="Espace réservé du numéro de diapositive 2">
+            <a:extLst>
+              <a:ext uri="{FF2B5EF4-FFF2-40B4-BE49-F238E27FC236}">
+                <a16:creationId xmlns:a16="http://schemas.microsoft.com/office/drawing/2014/main" id="{59311E8F-86AE-EFCF-162F-F08334078983}"/>
+              </a:ext>
+            </a:extLst>
+          </p:cNvPr>
+          <p:cNvSpPr>
+            <a:spLocks noGrp="1"/>
+          </p:cNvSpPr>
+          <p:nvPr>
+            <p:ph type="sldNum" idx="12"/>
+          </p:nvPr>
+        </p:nvSpPr>
+        <p:spPr/>
+        <p:txBody>
+          <a:bodyPr/>
+          <a:lstStyle/>
+          <a:p>
+            <a:fld id="{71CC62B1-FA1F-4849-B719-012F8D8A46B3}" type="slidenum">
+              <a:rPr lang="en-GB" smtClean="0"/>
+              <a:t>11</a:t>
+            </a:fld>
+            <a:endParaRPr lang="en-GB"/>
+          </a:p>
+        </p:txBody>
+      </p:sp>
       <p:pic>
         <p:nvPicPr>
-          <p:cNvPr id="8" name="Picture 7">
+          <p:cNvPr id="10" name="Espace réservé du contenu 9">
             <a:extLst>
               <a:ext uri="{FF2B5EF4-FFF2-40B4-BE49-F238E27FC236}">
-                <a16:creationId xmlns:a16="http://schemas.microsoft.com/office/drawing/2014/main" id="{D9B1FF77-CC37-4C05-1343-03767076B974}"/>
+                <a16:creationId xmlns:a16="http://schemas.microsoft.com/office/drawing/2014/main" id="{B60C8452-182E-143C-F289-E9E7A886CB02}"/>
               </a:ext>
             </a:extLst>
           </p:cNvPr>
           <p:cNvPicPr>
-            <a:picLocks noChangeAspect="1"/>
+            <a:picLocks noGrp="1" noChangeAspect="1"/>
           </p:cNvPicPr>
-          <p:nvPr/>
+          <p:nvPr>
+            <p:ph sz="half" idx="2"/>
+          </p:nvPr>
         </p:nvPicPr>
         <p:blipFill>
           <a:blip r:embed="rId3"/>
@@ -6548,25 +6690,59 @@
         </p:blipFill>
         <p:spPr>
           <a:xfrm>
-            <a:off x="6809172" y="292962"/>
-            <a:ext cx="5038829" cy="2916111"/>
+            <a:off x="6809174" y="3203911"/>
+            <a:ext cx="4677148" cy="2790996"/>
           </a:xfrm>
           <a:prstGeom prst="rect">
             <a:avLst/>
           </a:prstGeom>
+          <a:noFill/>
           <a:ln>
             <a:solidFill>
-              <a:srgbClr val="0070C0"/>
+              <a:schemeClr val="tx1"/>
             </a:solidFill>
           </a:ln>
         </p:spPr>
       </p:pic>
+      <p:sp>
+        <p:nvSpPr>
+          <p:cNvPr id="5" name="Footer Placeholder 4">
+            <a:extLst>
+              <a:ext uri="{FF2B5EF4-FFF2-40B4-BE49-F238E27FC236}">
+                <a16:creationId xmlns:a16="http://schemas.microsoft.com/office/drawing/2014/main" id="{DF69B21F-C80E-2986-0A8B-EC53A35F2885}"/>
+              </a:ext>
+            </a:extLst>
+          </p:cNvPr>
+          <p:cNvSpPr>
+            <a:spLocks noGrp="1"/>
+          </p:cNvSpPr>
+          <p:nvPr>
+            <p:ph type="ftr" sz="quarter" idx="4294967295"/>
+          </p:nvPr>
+        </p:nvSpPr>
+        <p:spPr>
+          <a:xfrm>
+            <a:off x="0" y="0"/>
+            <a:ext cx="0" cy="0"/>
+          </a:xfrm>
+        </p:spPr>
+        <p:txBody>
+          <a:bodyPr/>
+          <a:lstStyle/>
+          <a:p>
+            <a:r>
+              <a:rPr lang="en-GB"/>
+              <a:t>Seasonality and trading days tests</a:t>
+            </a:r>
+          </a:p>
+        </p:txBody>
+      </p:sp>
       <p:pic>
         <p:nvPicPr>
-          <p:cNvPr id="9" name="Picture 8">
+          <p:cNvPr id="8" name="Picture 7">
             <a:extLst>
               <a:ext uri="{FF2B5EF4-FFF2-40B4-BE49-F238E27FC236}">
-                <a16:creationId xmlns:a16="http://schemas.microsoft.com/office/drawing/2014/main" id="{F12EB992-20EB-D64B-B04A-A55CEAD51069}"/>
+                <a16:creationId xmlns:a16="http://schemas.microsoft.com/office/drawing/2014/main" id="{D9B1FF77-CC37-4C05-1343-03767076B974}"/>
               </a:ext>
             </a:extLst>
           </p:cNvPr>
@@ -6583,15 +6759,15 @@
         </p:blipFill>
         <p:spPr>
           <a:xfrm>
-            <a:off x="6809171" y="3281236"/>
-            <a:ext cx="5038830" cy="2916111"/>
+            <a:off x="6809173" y="518554"/>
+            <a:ext cx="4677150" cy="2706797"/>
           </a:xfrm>
           <a:prstGeom prst="rect">
             <a:avLst/>
           </a:prstGeom>
           <a:ln>
             <a:solidFill>
-              <a:schemeClr val="accent1"/>
+              <a:srgbClr val="0070C0"/>
             </a:solidFill>
           </a:ln>
         </p:spPr>
@@ -6676,6 +6852,36 @@
           </a:p>
         </p:txBody>
       </p:sp>
+      <p:sp>
+        <p:nvSpPr>
+          <p:cNvPr id="4" name="Espace réservé du numéro de diapositive 3">
+            <a:extLst>
+              <a:ext uri="{FF2B5EF4-FFF2-40B4-BE49-F238E27FC236}">
+                <a16:creationId xmlns:a16="http://schemas.microsoft.com/office/drawing/2014/main" id="{F41CD9A3-F785-365F-6876-BF17463B780A}"/>
+              </a:ext>
+            </a:extLst>
+          </p:cNvPr>
+          <p:cNvSpPr>
+            <a:spLocks noGrp="1"/>
+          </p:cNvSpPr>
+          <p:nvPr>
+            <p:ph type="sldNum" idx="12"/>
+          </p:nvPr>
+        </p:nvSpPr>
+        <p:spPr/>
+        <p:txBody>
+          <a:bodyPr/>
+          <a:lstStyle/>
+          <a:p>
+            <a:fld id="{00000000-1234-1234-1234-123412341234}" type="slidenum">
+              <a:rPr lang="en-GB" smtClean="0"/>
+              <a:pPr/>
+              <a:t>12</a:t>
+            </a:fld>
+            <a:endParaRPr lang="en-GB"/>
+          </a:p>
+        </p:txBody>
+      </p:sp>
     </p:spTree>
     <p:extLst>
       <p:ext uri="{BB962C8B-B14F-4D97-AF65-F5344CB8AC3E}">
@@ -6730,6 +6936,64 @@
             <a:r>
               <a:rPr lang="en-GB" dirty="0"/>
               <a:t>Overview</a:t>
+            </a:r>
+          </a:p>
+        </p:txBody>
+      </p:sp>
+      <p:sp>
+        <p:nvSpPr>
+          <p:cNvPr id="5" name="Espace réservé du contenu 4">
+            <a:extLst>
+              <a:ext uri="{FF2B5EF4-FFF2-40B4-BE49-F238E27FC236}">
+                <a16:creationId xmlns:a16="http://schemas.microsoft.com/office/drawing/2014/main" id="{4A914FCB-70F4-BE4A-6DC8-F1EB5CCD86E5}"/>
+              </a:ext>
+            </a:extLst>
+          </p:cNvPr>
+          <p:cNvSpPr>
+            <a:spLocks noGrp="1"/>
+          </p:cNvSpPr>
+          <p:nvPr>
+            <p:ph sz="half" idx="2"/>
+          </p:nvPr>
+        </p:nvSpPr>
+        <p:spPr/>
+        <p:txBody>
+          <a:bodyPr/>
+          <a:lstStyle/>
+          <a:p>
+            <a:endParaRPr lang="en-GB"/>
+          </a:p>
+        </p:txBody>
+      </p:sp>
+      <p:sp>
+        <p:nvSpPr>
+          <p:cNvPr id="3" name="Footer Placeholder 2">
+            <a:extLst>
+              <a:ext uri="{FF2B5EF4-FFF2-40B4-BE49-F238E27FC236}">
+                <a16:creationId xmlns:a16="http://schemas.microsoft.com/office/drawing/2014/main" id="{38601312-4157-49B2-A0C5-00D7D93BCF78}"/>
+              </a:ext>
+            </a:extLst>
+          </p:cNvPr>
+          <p:cNvSpPr>
+            <a:spLocks noGrp="1"/>
+          </p:cNvSpPr>
+          <p:nvPr>
+            <p:ph type="ftr" sz="quarter" idx="4294967295"/>
+          </p:nvPr>
+        </p:nvSpPr>
+        <p:spPr>
+          <a:xfrm>
+            <a:off x="0" y="0"/>
+            <a:ext cx="0" cy="0"/>
+          </a:xfrm>
+        </p:spPr>
+        <p:txBody>
+          <a:bodyPr/>
+          <a:lstStyle/>
+          <a:p>
+            <a:r>
+              <a:rPr lang="en-GB"/>
+              <a:t>Seasonality and trading days tests</a:t>
             </a:r>
           </a:p>
         </p:txBody>
@@ -6859,10 +7123,10 @@
       </p:pic>
       <p:sp>
         <p:nvSpPr>
-          <p:cNvPr id="3" name="Footer Placeholder 2">
+          <p:cNvPr id="7" name="Espace réservé du numéro de diapositive 6">
             <a:extLst>
               <a:ext uri="{FF2B5EF4-FFF2-40B4-BE49-F238E27FC236}">
-                <a16:creationId xmlns:a16="http://schemas.microsoft.com/office/drawing/2014/main" id="{38601312-4157-49B2-A0C5-00D7D93BCF78}"/>
+                <a16:creationId xmlns:a16="http://schemas.microsoft.com/office/drawing/2014/main" id="{76CF291E-05FC-3161-3438-113B7CC4F56B}"/>
               </a:ext>
             </a:extLst>
           </p:cNvPr>
@@ -6870,7 +7134,7 @@
             <a:spLocks noGrp="1"/>
           </p:cNvSpPr>
           <p:nvPr>
-            <p:ph type="ftr" sz="quarter" idx="11"/>
+            <p:ph type="sldNum" idx="12"/>
           </p:nvPr>
         </p:nvSpPr>
         <p:spPr/>
@@ -6878,10 +7142,12 @@
           <a:bodyPr/>
           <a:lstStyle/>
           <a:p>
-            <a:r>
-              <a:rPr lang="en-GB"/>
-              <a:t>Seasonality and trading days tests</a:t>
-            </a:r>
+            <a:fld id="{00000000-1234-1234-1234-123412341234}" type="slidenum">
+              <a:rPr lang="en-GB" smtClean="0"/>
+              <a:pPr/>
+              <a:t>2</a:t>
+            </a:fld>
+            <a:endParaRPr lang="en-GB"/>
           </a:p>
         </p:txBody>
       </p:sp>
@@ -6956,69 +7222,74 @@
             <a:spLocks noGrp="1"/>
           </p:cNvSpPr>
           <p:nvPr>
-            <p:ph idx="1"/>
+            <p:ph sz="half" idx="2"/>
           </p:nvPr>
         </p:nvSpPr>
-        <p:spPr/>
+        <p:spPr>
+          <a:xfrm>
+            <a:off x="970722" y="1195947"/>
+            <a:ext cx="10515597" cy="4900180"/>
+          </a:xfrm>
+        </p:spPr>
         <p:txBody>
           <a:bodyPr/>
           <a:lstStyle/>
           <a:p>
             <a:r>
-              <a:rPr lang="en-GB" dirty="0"/>
+              <a:rPr lang="en-GB" sz="2800" dirty="0"/>
               <a:t>Non-parametric tests</a:t>
             </a:r>
           </a:p>
           <a:p>
             <a:pPr lvl="1"/>
             <a:r>
-              <a:rPr lang="en-GB" dirty="0"/>
+              <a:rPr lang="en-GB" sz="2400" dirty="0"/>
               <a:t>Applied on series without trend (for instance (log) differenced series) </a:t>
             </a:r>
           </a:p>
           <a:p>
             <a:pPr lvl="1"/>
             <a:r>
-              <a:rPr lang="en-GB" b="1" dirty="0"/>
+              <a:rPr lang="en-GB" sz="2400" b="1" dirty="0"/>
               <a:t>Friedman</a:t>
             </a:r>
           </a:p>
           <a:p>
             <a:pPr lvl="2"/>
             <a:r>
-              <a:rPr lang="en-GB" sz="1600" dirty="0"/>
+              <a:rPr lang="en-GB" sz="2000" dirty="0"/>
               <a:t>ANOVA-type. The test uses the rankings of the observations within each year. It does not require distributional assumptions. </a:t>
             </a:r>
           </a:p>
           <a:p>
             <a:pPr lvl="2"/>
             <a:r>
-              <a:rPr lang="en-GB" sz="1600" dirty="0"/>
+              <a:rPr lang="en-GB" sz="2000" dirty="0"/>
               <a:t>H0: all periods can be treated equally (= no seasonality), H1: series is seasonal</a:t>
             </a:r>
           </a:p>
           <a:p>
             <a:pPr lvl="1"/>
             <a:r>
-              <a:rPr lang="en-GB" b="1" dirty="0" err="1"/>
+              <a:rPr lang="en-GB" sz="2400" b="1" dirty="0" err="1"/>
               <a:t>Kruskall</a:t>
             </a:r>
             <a:r>
-              <a:rPr lang="en-GB" b="1" dirty="0"/>
+              <a:rPr lang="en-GB" sz="2400" b="1" dirty="0"/>
               <a:t>-Wallis</a:t>
             </a:r>
           </a:p>
           <a:p>
             <a:pPr lvl="2"/>
             <a:r>
-              <a:rPr lang="en-GB" sz="1600" dirty="0"/>
+              <a:rPr lang="en-GB" sz="2000" dirty="0"/>
               <a:t>The test uses the rankings of all the observations. It does not require distributional assumptions.</a:t>
             </a:r>
           </a:p>
           <a:p>
             <a:pPr lvl="2"/>
             <a:r>
-              <a:rPr lang="en-GB" sz="1600" dirty="0"/>
+              <a:rPr lang="en-GB" sz="2000" dirty="0"/>
               <a:t>H0: All periods have the same mean(average ranking), H1: series is seasonal</a:t>
             </a:r>
           </a:p>
@@ -7043,7 +7314,40 @@
             <a:spLocks noGrp="1"/>
           </p:cNvSpPr>
           <p:nvPr>
-            <p:ph type="ftr" sz="quarter" idx="11"/>
+            <p:ph type="ftr" sz="quarter" idx="4294967295"/>
+          </p:nvPr>
+        </p:nvSpPr>
+        <p:spPr>
+          <a:xfrm>
+            <a:off x="0" y="0"/>
+            <a:ext cx="0" cy="0"/>
+          </a:xfrm>
+        </p:spPr>
+        <p:txBody>
+          <a:bodyPr/>
+          <a:lstStyle/>
+          <a:p>
+            <a:r>
+              <a:rPr lang="en-GB"/>
+              <a:t>Seasonality and trading days tests</a:t>
+            </a:r>
+          </a:p>
+        </p:txBody>
+      </p:sp>
+      <p:sp>
+        <p:nvSpPr>
+          <p:cNvPr id="5" name="Espace réservé du numéro de diapositive 4">
+            <a:extLst>
+              <a:ext uri="{FF2B5EF4-FFF2-40B4-BE49-F238E27FC236}">
+                <a16:creationId xmlns:a16="http://schemas.microsoft.com/office/drawing/2014/main" id="{3C6FE919-F8A9-36F7-8C16-7E1A5825FF89}"/>
+              </a:ext>
+            </a:extLst>
+          </p:cNvPr>
+          <p:cNvSpPr>
+            <a:spLocks noGrp="1"/>
+          </p:cNvSpPr>
+          <p:nvPr>
+            <p:ph type="sldNum" idx="12"/>
           </p:nvPr>
         </p:nvSpPr>
         <p:spPr/>
@@ -7051,10 +7355,12 @@
           <a:bodyPr/>
           <a:lstStyle/>
           <a:p>
-            <a:r>
-              <a:rPr lang="en-GB"/>
-              <a:t>Seasonality and trading days tests</a:t>
-            </a:r>
+            <a:fld id="{00000000-1234-1234-1234-123412341234}" type="slidenum">
+              <a:rPr lang="en-GB" smtClean="0"/>
+              <a:pPr/>
+              <a:t>3</a:t>
+            </a:fld>
+            <a:endParaRPr lang="en-GB"/>
           </a:p>
         </p:txBody>
       </p:sp>
@@ -7116,6 +7422,35 @@
           </a:p>
         </p:txBody>
       </p:sp>
+      <p:sp>
+        <p:nvSpPr>
+          <p:cNvPr id="5" name="Espace réservé du numéro de diapositive 4">
+            <a:extLst>
+              <a:ext uri="{FF2B5EF4-FFF2-40B4-BE49-F238E27FC236}">
+                <a16:creationId xmlns:a16="http://schemas.microsoft.com/office/drawing/2014/main" id="{89F192CD-036B-1E59-0333-1C2E94EB43DA}"/>
+              </a:ext>
+            </a:extLst>
+          </p:cNvPr>
+          <p:cNvSpPr>
+            <a:spLocks noGrp="1"/>
+          </p:cNvSpPr>
+          <p:nvPr>
+            <p:ph type="sldNum" idx="12"/>
+          </p:nvPr>
+        </p:nvSpPr>
+        <p:spPr/>
+        <p:txBody>
+          <a:bodyPr/>
+          <a:lstStyle/>
+          <a:p>
+            <a:fld id="{71CC62B1-FA1F-4849-B719-012F8D8A46B3}" type="slidenum">
+              <a:rPr lang="en-GB" smtClean="0"/>
+              <a:t>4</a:t>
+            </a:fld>
+            <a:endParaRPr lang="en-GB"/>
+          </a:p>
+        </p:txBody>
+      </p:sp>
       <mc:AlternateContent xmlns:mc="http://schemas.openxmlformats.org/markup-compatibility/2006">
         <mc:Choice xmlns:a14="http://schemas.microsoft.com/office/drawing/2010/main" Requires="a14">
           <p:sp>
@@ -7131,23 +7466,28 @@
                 <a:spLocks noGrp="1"/>
               </p:cNvSpPr>
               <p:nvPr>
-                <p:ph idx="1"/>
+                <p:ph sz="half" idx="2"/>
               </p:nvPr>
             </p:nvSpPr>
-            <p:spPr/>
+            <p:spPr>
+              <a:xfrm>
+                <a:off x="970722" y="1277471"/>
+                <a:ext cx="10515597" cy="4818656"/>
+              </a:xfrm>
+            </p:spPr>
             <p:txBody>
               <a:bodyPr>
-                <a:normAutofit fontScale="55000" lnSpcReduction="20000"/>
+                <a:normAutofit/>
               </a:bodyPr>
               <a:lstStyle/>
               <a:p>
                 <a:r>
                   <a:rPr lang="en-GB" b="1" dirty="0"/>
-                  <a:t>QS test, a</a:t>
+                  <a:t>QS test, </a:t>
                 </a:r>
                 <a:r>
                   <a:rPr lang="en-GB" dirty="0"/>
-                  <a:t>pplied on (log) differenced series (no trend), corrected for mean effect</a:t>
+                  <a:t>applied on (log) differenced series, corrected for mean effect</a:t>
                 </a:r>
               </a:p>
               <a:p>
@@ -7182,11 +7522,11 @@
               <a:p>
                 <a:r>
                   <a:rPr lang="en-GB" b="1" dirty="0"/>
-                  <a:t>F test </a:t>
+                  <a:t>F test, </a:t>
                 </a:r>
                 <a:r>
                   <a:rPr lang="en-GB" dirty="0"/>
-                  <a:t>on seasonal dummies</a:t>
+                  <a:t>applied on (log) series</a:t>
                 </a:r>
               </a:p>
               <a:p>
@@ -7278,13 +7618,14 @@
                       <a:rPr lang="fr-BE" b="0" i="1" smtClean="0">
                         <a:latin typeface="Cambria Math" panose="02040503050406030204" pitchFamily="18" charset="0"/>
                       </a:rPr>
-                      <m:t>−</m:t>
+                      <m:t>=</m:t>
                     </m:r>
                     <m:sSub>
                       <m:sSubPr>
                         <m:ctrlPr>
                           <a:rPr lang="fr-BE" i="1">
                             <a:latin typeface="Cambria Math" panose="02040503050406030204" pitchFamily="18" charset="0"/>
+                            <a:ea typeface="Cambria Math" panose="02040503050406030204" pitchFamily="18" charset="0"/>
                           </a:rPr>
                         </m:ctrlPr>
                       </m:sSubPr>
@@ -7292,40 +7633,17 @@
                         <m:r>
                           <a:rPr lang="fr-BE" i="1">
                             <a:latin typeface="Cambria Math" panose="02040503050406030204" pitchFamily="18" charset="0"/>
+                            <a:ea typeface="Cambria Math" panose="02040503050406030204" pitchFamily="18" charset="0"/>
                           </a:rPr>
-                          <m:t>𝑦</m:t>
+                          <m:t>𝛼</m:t>
                         </m:r>
-                      </m:e>
-                      <m:sub>
                         <m:r>
                           <a:rPr lang="fr-BE" i="1">
                             <a:latin typeface="Cambria Math" panose="02040503050406030204" pitchFamily="18" charset="0"/>
+                            <a:ea typeface="Cambria Math" panose="02040503050406030204" pitchFamily="18" charset="0"/>
                           </a:rPr>
-                          <m:t>𝑡</m:t>
+                          <m:t>+</m:t>
                         </m:r>
-                        <m:r>
-                          <a:rPr lang="fr-BE" b="0" i="1" smtClean="0">
-                            <a:latin typeface="Cambria Math" panose="02040503050406030204" pitchFamily="18" charset="0"/>
-                          </a:rPr>
-                          <m:t>−1</m:t>
-                        </m:r>
-                      </m:sub>
-                    </m:sSub>
-                    <m:r>
-                      <a:rPr lang="fr-BE" b="0" i="1" smtClean="0">
-                        <a:latin typeface="Cambria Math" panose="02040503050406030204" pitchFamily="18" charset="0"/>
-                      </a:rPr>
-                      <m:t>=</m:t>
-                    </m:r>
-                    <m:sSub>
-                      <m:sSubPr>
-                        <m:ctrlPr>
-                          <a:rPr lang="fr-BE" b="0" i="1" smtClean="0">
-                            <a:latin typeface="Cambria Math" panose="02040503050406030204" pitchFamily="18" charset="0"/>
-                          </a:rPr>
-                        </m:ctrlPr>
-                      </m:sSubPr>
-                      <m:e>
                         <m:r>
                           <a:rPr lang="fr-BE" b="0" i="1" smtClean="0">
                             <a:latin typeface="Cambria Math" panose="02040503050406030204" pitchFamily="18" charset="0"/>
@@ -7371,48 +7689,6 @@
                     <m:sSub>
                       <m:sSubPr>
                         <m:ctrlPr>
-                          <a:rPr lang="fr-BE" b="0" i="1" smtClean="0">
-                            <a:latin typeface="Cambria Math" panose="02040503050406030204" pitchFamily="18" charset="0"/>
-                            <a:ea typeface="Cambria Math" panose="02040503050406030204" pitchFamily="18" charset="0"/>
-                          </a:rPr>
-                        </m:ctrlPr>
-                      </m:sSubPr>
-                      <m:e>
-                        <m:r>
-                          <a:rPr lang="fr-BE" b="0" i="1" smtClean="0">
-                            <a:latin typeface="Cambria Math" panose="02040503050406030204" pitchFamily="18" charset="0"/>
-                            <a:ea typeface="Cambria Math" panose="02040503050406030204" pitchFamily="18" charset="0"/>
-                          </a:rPr>
-                          <m:t>𝜀</m:t>
-                        </m:r>
-                      </m:e>
-                      <m:sub>
-                        <m:r>
-                          <a:rPr lang="fr-BE" b="0" i="1" smtClean="0">
-                            <a:latin typeface="Cambria Math" panose="02040503050406030204" pitchFamily="18" charset="0"/>
-                            <a:ea typeface="Cambria Math" panose="02040503050406030204" pitchFamily="18" charset="0"/>
-                          </a:rPr>
-                          <m:t>𝑡</m:t>
-                        </m:r>
-                      </m:sub>
-                    </m:sSub>
-                    <m:r>
-                      <a:rPr lang="fr-BE" b="0" i="1" smtClean="0">
-                        <a:latin typeface="Cambria Math" panose="02040503050406030204" pitchFamily="18" charset="0"/>
-                        <a:ea typeface="Cambria Math" panose="02040503050406030204" pitchFamily="18" charset="0"/>
-                      </a:rPr>
-                      <m:t>+</m:t>
-                    </m:r>
-                    <m:r>
-                      <a:rPr lang="fr-BE" b="0" i="1" smtClean="0">
-                        <a:latin typeface="Cambria Math" panose="02040503050406030204" pitchFamily="18" charset="0"/>
-                        <a:ea typeface="Cambria Math" panose="02040503050406030204" pitchFamily="18" charset="0"/>
-                      </a:rPr>
-                      <m:t>𝜃</m:t>
-                    </m:r>
-                    <m:sSub>
-                      <m:sSubPr>
-                        <m:ctrlPr>
                           <a:rPr lang="fr-BE" i="1">
                             <a:latin typeface="Cambria Math" panose="02040503050406030204" pitchFamily="18" charset="0"/>
                             <a:ea typeface="Cambria Math" panose="02040503050406030204" pitchFamily="18" charset="0"/>
@@ -7436,20 +7712,21 @@
                           </a:rPr>
                           <m:t>𝑡</m:t>
                         </m:r>
-                        <m:r>
-                          <a:rPr lang="fr-BE" i="1">
-                            <a:latin typeface="Cambria Math" panose="02040503050406030204" pitchFamily="18" charset="0"/>
-                            <a:ea typeface="Cambria Math" panose="02040503050406030204" pitchFamily="18" charset="0"/>
-                          </a:rPr>
-                          <m:t>−1</m:t>
-                        </m:r>
                       </m:sub>
                     </m:sSub>
                   </m:oMath>
                 </a14:m>
                 <a:r>
                   <a:rPr lang="en-GB" dirty="0"/>
-                  <a:t> 		(GUI)</a:t>
+                  <a:t> 		(WN ; </a:t>
+                </a:r>
+                <a:r>
+                  <a:rPr lang="en-GB" sz="1400" dirty="0"/>
+                  <a:t>for residuals</a:t>
+                </a:r>
+                <a:r>
+                  <a:rPr lang="en-GB" dirty="0"/>
+                  <a:t>)</a:t>
                 </a:r>
               </a:p>
               <a:p>
@@ -7628,7 +7905,15 @@
                 </a14:m>
                 <a:r>
                   <a:rPr lang="en-GB" dirty="0"/>
-                  <a:t>		(diagnostics)</a:t>
+                  <a:t>		(AR ; </a:t>
+                </a:r>
+                <a:r>
+                  <a:rPr lang="en-GB" sz="1400" dirty="0"/>
+                  <a:t>GUI</a:t>
+                </a:r>
+                <a:r>
+                  <a:rPr lang="en-GB" dirty="0"/>
+                  <a:t>)</a:t>
                 </a:r>
               </a:p>
               <a:p>
@@ -7800,7 +8085,60 @@
                 </a14:m>
                 <a:r>
                   <a:rPr lang="en-GB" dirty="0"/>
-                  <a:t> 		(diagnostics)</a:t>
+                  <a:t> 		(D1; </a:t>
+                </a:r>
+                <a:r>
+                  <a:rPr lang="en-GB" sz="1400" dirty="0"/>
+                  <a:t>for Y, SA ; differencing </a:t>
+                </a:r>
+                <a14:m>
+                  <m:oMath xmlns:m="http://schemas.openxmlformats.org/officeDocument/2006/math">
+                    <m:sSub>
+                      <m:sSubPr>
+                        <m:ctrlPr>
+                          <a:rPr lang="fr-BE" sz="1400" i="1">
+                            <a:latin typeface="Cambria Math" panose="02040503050406030204" pitchFamily="18" charset="0"/>
+                          </a:rPr>
+                        </m:ctrlPr>
+                      </m:sSubPr>
+                      <m:e>
+                        <m:r>
+                          <a:rPr lang="fr-BE" sz="1400" i="1">
+                            <a:latin typeface="Cambria Math" panose="02040503050406030204" pitchFamily="18" charset="0"/>
+                          </a:rPr>
+                          <m:t>𝐷</m:t>
+                        </m:r>
+                      </m:e>
+                      <m:sub>
+                        <m:r>
+                          <a:rPr lang="fr-BE" sz="1400" i="1">
+                            <a:latin typeface="Cambria Math" panose="02040503050406030204" pitchFamily="18" charset="0"/>
+                          </a:rPr>
+                          <m:t>𝑠</m:t>
+                        </m:r>
+                        <m:r>
+                          <a:rPr lang="fr-BE" sz="1400" i="1">
+                            <a:latin typeface="Cambria Math" panose="02040503050406030204" pitchFamily="18" charset="0"/>
+                          </a:rPr>
+                          <m:t>,</m:t>
+                        </m:r>
+                        <m:r>
+                          <a:rPr lang="fr-BE" sz="1400" i="1">
+                            <a:latin typeface="Cambria Math" panose="02040503050406030204" pitchFamily="18" charset="0"/>
+                          </a:rPr>
+                          <m:t>𝑡</m:t>
+                        </m:r>
+                      </m:sub>
+                    </m:sSub>
+                  </m:oMath>
+                </a14:m>
+                <a:r>
+                  <a:rPr lang="en-GB" sz="1400" dirty="0"/>
+                  <a:t> is useless: same projection space</a:t>
+                </a:r>
+                <a:r>
+                  <a:rPr lang="en-GB" dirty="0"/>
+                  <a:t>)</a:t>
                 </a:r>
               </a:p>
               <a:p>
@@ -7853,14 +8191,18 @@
                 <a:spLocks noGrp="1" noRot="1" noChangeAspect="1" noMove="1" noResize="1" noEditPoints="1" noAdjustHandles="1" noChangeArrowheads="1" noChangeShapeType="1" noTextEdit="1"/>
               </p:cNvSpPr>
               <p:nvPr>
-                <p:ph idx="1"/>
+                <p:ph sz="half" idx="2"/>
               </p:nvPr>
             </p:nvSpPr>
             <p:spPr>
+              <a:xfrm>
+                <a:off x="970722" y="1277471"/>
+                <a:ext cx="10515597" cy="4818656"/>
+              </a:xfrm>
               <a:blipFill>
-                <a:blip r:embed="rId2"/>
+                <a:blip r:embed="rId3"/>
                 <a:stretch>
-                  <a:fillRect l="-58" t="-5024" b="-1570"/>
+                  <a:fillRect l="-754" t="-2025"/>
                 </a:stretch>
               </a:blipFill>
             </p:spPr>
@@ -7892,10 +8234,15 @@
             <a:spLocks noGrp="1"/>
           </p:cNvSpPr>
           <p:nvPr>
-            <p:ph type="ftr" sz="quarter" idx="11"/>
+            <p:ph type="ftr" sz="quarter" idx="4294967295"/>
           </p:nvPr>
         </p:nvSpPr>
-        <p:spPr/>
+        <p:spPr>
+          <a:xfrm>
+            <a:off x="0" y="0"/>
+            <a:ext cx="0" cy="0"/>
+          </a:xfrm>
+        </p:spPr>
         <p:txBody>
           <a:bodyPr/>
           <a:lstStyle/>
@@ -7967,6 +8314,35 @@
       </p:sp>
       <p:sp>
         <p:nvSpPr>
+          <p:cNvPr id="10" name="Espace réservé du numéro de diapositive 9">
+            <a:extLst>
+              <a:ext uri="{FF2B5EF4-FFF2-40B4-BE49-F238E27FC236}">
+                <a16:creationId xmlns:a16="http://schemas.microsoft.com/office/drawing/2014/main" id="{B027CAA5-D400-DB2F-E55E-874C6D556D5C}"/>
+              </a:ext>
+            </a:extLst>
+          </p:cNvPr>
+          <p:cNvSpPr>
+            <a:spLocks noGrp="1"/>
+          </p:cNvSpPr>
+          <p:nvPr>
+            <p:ph type="sldNum" idx="12"/>
+          </p:nvPr>
+        </p:nvSpPr>
+        <p:spPr/>
+        <p:txBody>
+          <a:bodyPr/>
+          <a:lstStyle/>
+          <a:p>
+            <a:fld id="{71CC62B1-FA1F-4849-B719-012F8D8A46B3}" type="slidenum">
+              <a:rPr lang="en-GB" smtClean="0"/>
+              <a:t>5</a:t>
+            </a:fld>
+            <a:endParaRPr lang="en-GB"/>
+          </a:p>
+        </p:txBody>
+      </p:sp>
+      <p:sp>
+        <p:nvSpPr>
           <p:cNvPr id="3" name="Content Placeholder 2">
             <a:extLst>
               <a:ext uri="{FF2B5EF4-FFF2-40B4-BE49-F238E27FC236}">
@@ -7978,17 +8354,55 @@
             <a:spLocks noGrp="1"/>
           </p:cNvSpPr>
           <p:nvPr>
-            <p:ph idx="1"/>
+            <p:ph sz="half" idx="2"/>
           </p:nvPr>
         </p:nvSpPr>
-        <p:spPr/>
+        <p:spPr>
+          <a:xfrm>
+            <a:off x="970722" y="1337982"/>
+            <a:ext cx="10515597" cy="4758145"/>
+          </a:xfrm>
+        </p:spPr>
         <p:txBody>
           <a:bodyPr/>
           <a:lstStyle/>
           <a:p>
             <a:r>
-              <a:rPr lang="en-GB" dirty="0"/>
+              <a:rPr lang="en-GB" sz="2800" dirty="0"/>
               <a:t>Combined seasonality test (X11-like)</a:t>
+            </a:r>
+          </a:p>
+        </p:txBody>
+      </p:sp>
+      <p:sp>
+        <p:nvSpPr>
+          <p:cNvPr id="5" name="Footer Placeholder 4">
+            <a:extLst>
+              <a:ext uri="{FF2B5EF4-FFF2-40B4-BE49-F238E27FC236}">
+                <a16:creationId xmlns:a16="http://schemas.microsoft.com/office/drawing/2014/main" id="{4D444ED8-86F6-4CED-842B-4D05DB3C454C}"/>
+              </a:ext>
+            </a:extLst>
+          </p:cNvPr>
+          <p:cNvSpPr>
+            <a:spLocks noGrp="1"/>
+          </p:cNvSpPr>
+          <p:nvPr>
+            <p:ph type="ftr" sz="quarter" idx="4294967295"/>
+          </p:nvPr>
+        </p:nvSpPr>
+        <p:spPr>
+          <a:xfrm>
+            <a:off x="0" y="0"/>
+            <a:ext cx="0" cy="0"/>
+          </a:xfrm>
+        </p:spPr>
+        <p:txBody>
+          <a:bodyPr/>
+          <a:lstStyle/>
+          <a:p>
+            <a:r>
+              <a:rPr lang="en-GB"/>
+              <a:t>Seasonality and trading days tests</a:t>
             </a:r>
           </a:p>
         </p:txBody>
@@ -9056,34 +9470,6 @@
           </a:p>
         </p:txBody>
       </p:sp>
-      <p:sp>
-        <p:nvSpPr>
-          <p:cNvPr id="5" name="Footer Placeholder 4">
-            <a:extLst>
-              <a:ext uri="{FF2B5EF4-FFF2-40B4-BE49-F238E27FC236}">
-                <a16:creationId xmlns:a16="http://schemas.microsoft.com/office/drawing/2014/main" id="{4D444ED8-86F6-4CED-842B-4D05DB3C454C}"/>
-              </a:ext>
-            </a:extLst>
-          </p:cNvPr>
-          <p:cNvSpPr>
-            <a:spLocks noGrp="1"/>
-          </p:cNvSpPr>
-          <p:nvPr>
-            <p:ph type="ftr" sz="quarter" idx="11"/>
-          </p:nvPr>
-        </p:nvSpPr>
-        <p:spPr/>
-        <p:txBody>
-          <a:bodyPr/>
-          <a:lstStyle/>
-          <a:p>
-            <a:r>
-              <a:rPr lang="en-GB"/>
-              <a:t>Seasonality and trading days tests</a:t>
-            </a:r>
-          </a:p>
-        </p:txBody>
-      </p:sp>
     </p:spTree>
     <p:extLst>
       <p:ext uri="{BB962C8B-B14F-4D97-AF65-F5344CB8AC3E}">
@@ -9144,6 +9530,35 @@
       </p:sp>
       <p:sp>
         <p:nvSpPr>
+          <p:cNvPr id="5" name="Espace réservé du numéro de diapositive 4">
+            <a:extLst>
+              <a:ext uri="{FF2B5EF4-FFF2-40B4-BE49-F238E27FC236}">
+                <a16:creationId xmlns:a16="http://schemas.microsoft.com/office/drawing/2014/main" id="{55E2DBCC-465C-8EDD-BD70-E5CD10396D0B}"/>
+              </a:ext>
+            </a:extLst>
+          </p:cNvPr>
+          <p:cNvSpPr>
+            <a:spLocks noGrp="1"/>
+          </p:cNvSpPr>
+          <p:nvPr>
+            <p:ph type="sldNum" idx="12"/>
+          </p:nvPr>
+        </p:nvSpPr>
+        <p:spPr/>
+        <p:txBody>
+          <a:bodyPr/>
+          <a:lstStyle/>
+          <a:p>
+            <a:fld id="{71CC62B1-FA1F-4849-B719-012F8D8A46B3}" type="slidenum">
+              <a:rPr lang="en-GB" smtClean="0"/>
+              <a:t>6</a:t>
+            </a:fld>
+            <a:endParaRPr lang="en-GB"/>
+          </a:p>
+        </p:txBody>
+      </p:sp>
+      <p:sp>
+        <p:nvSpPr>
           <p:cNvPr id="3" name="Content Placeholder 2">
             <a:extLst>
               <a:ext uri="{FF2B5EF4-FFF2-40B4-BE49-F238E27FC236}">
@@ -9155,32 +9570,37 @@
             <a:spLocks noGrp="1"/>
           </p:cNvSpPr>
           <p:nvPr>
-            <p:ph idx="1"/>
+            <p:ph sz="half" idx="2"/>
           </p:nvPr>
         </p:nvSpPr>
-        <p:spPr/>
+        <p:spPr>
+          <a:xfrm>
+            <a:off x="970722" y="1195947"/>
+            <a:ext cx="10515597" cy="4900180"/>
+          </a:xfrm>
+        </p:spPr>
         <p:txBody>
           <a:bodyPr>
-            <a:normAutofit fontScale="77500" lnSpcReduction="20000"/>
+            <a:normAutofit/>
           </a:bodyPr>
           <a:lstStyle/>
           <a:p>
             <a:r>
-              <a:rPr lang="en-GB" dirty="0"/>
+              <a:rPr lang="en-GB" sz="2400" dirty="0"/>
               <a:t>Spectral diagnostics</a:t>
             </a:r>
           </a:p>
           <a:p>
             <a:pPr lvl="1"/>
             <a:r>
-              <a:rPr lang="en-GB" b="1" dirty="0"/>
+              <a:rPr lang="en-GB" sz="2000" b="1" dirty="0"/>
               <a:t>Spectral peaks (X13-like)</a:t>
             </a:r>
           </a:p>
           <a:p>
             <a:pPr lvl="2"/>
             <a:r>
-              <a:rPr lang="en-US" sz="1800" dirty="0">
+              <a:rPr lang="en-US" sz="2000" dirty="0">
                 <a:effectLst/>
                 <a:latin typeface="Calibri" panose="020F0502020204030204" pitchFamily="34" charset="0"/>
                 <a:ea typeface="Times New Roman" panose="02020603050405020304" pitchFamily="18" charset="0"/>
@@ -9188,12 +9608,12 @@
               </a:rPr>
               <a:t>Based on the spectrum of a long auto-regressive model that fits the series (see X13 documentation)</a:t>
             </a:r>
-            <a:endParaRPr lang="en-GB" dirty="0"/>
+            <a:endParaRPr lang="en-GB" sz="1800" dirty="0"/>
           </a:p>
           <a:p>
             <a:pPr lvl="1"/>
             <a:r>
-              <a:rPr lang="en-GB" b="1" dirty="0"/>
+              <a:rPr lang="en-GB" sz="2000" b="1" dirty="0"/>
               <a:t>Periodogram</a:t>
             </a:r>
           </a:p>
@@ -9207,7 +9627,7 @@
               </a:spcAft>
             </a:pPr>
             <a:r>
-              <a:rPr lang="en-US" sz="1800" dirty="0">
+              <a:rPr lang="en-US" sz="2000" dirty="0">
                 <a:effectLst/>
                 <a:latin typeface="Calibri" panose="020F0502020204030204" pitchFamily="34" charset="0"/>
                 <a:ea typeface="Times New Roman" panose="02020603050405020304" pitchFamily="18" charset="0"/>
@@ -9226,7 +9646,7 @@
               </a:spcAft>
             </a:pPr>
             <a:r>
-              <a:rPr lang="en-US" u="sng" dirty="0">
+              <a:rPr lang="en-US" sz="1600" u="sng" dirty="0">
                 <a:latin typeface="Calibri" panose="020F0502020204030204" pitchFamily="34" charset="0"/>
                 <a:ea typeface="Times New Roman" panose="02020603050405020304" pitchFamily="18" charset="0"/>
                 <a:cs typeface="Times New Roman" panose="02020603050405020304" pitchFamily="18" charset="0"/>
@@ -9234,7 +9654,7 @@
               <a:t>maximum</a:t>
             </a:r>
             <a:r>
-              <a:rPr lang="en-US" dirty="0">
+              <a:rPr lang="en-US" sz="1600" dirty="0">
                 <a:latin typeface="Calibri" panose="020F0502020204030204" pitchFamily="34" charset="0"/>
                 <a:ea typeface="Times New Roman" panose="02020603050405020304" pitchFamily="18" charset="0"/>
                 <a:cs typeface="Times New Roman" panose="02020603050405020304" pitchFamily="18" charset="0"/>
@@ -9252,7 +9672,7 @@
               </a:spcAft>
             </a:pPr>
             <a:r>
-              <a:rPr lang="en-US" u="sng" dirty="0">
+              <a:rPr lang="en-US" sz="1600" u="sng" dirty="0">
                 <a:latin typeface="Calibri" panose="020F0502020204030204" pitchFamily="34" charset="0"/>
                 <a:ea typeface="Times New Roman" panose="02020603050405020304" pitchFamily="18" charset="0"/>
                 <a:cs typeface="Times New Roman" panose="02020603050405020304" pitchFamily="18" charset="0"/>
@@ -9260,14 +9680,14 @@
               <a:t>sum</a:t>
             </a:r>
             <a:r>
-              <a:rPr lang="en-US" dirty="0">
+              <a:rPr lang="en-US" sz="1600" dirty="0">
                 <a:latin typeface="Calibri" panose="020F0502020204030204" pitchFamily="34" charset="0"/>
                 <a:ea typeface="Times New Roman" panose="02020603050405020304" pitchFamily="18" charset="0"/>
                 <a:cs typeface="Times New Roman" panose="02020603050405020304" pitchFamily="18" charset="0"/>
               </a:rPr>
               <a:t> of the values of the periodogram on or around the seasonal frequencies</a:t>
             </a:r>
-            <a:endParaRPr lang="en-US" dirty="0">
+            <a:endParaRPr lang="en-US" sz="1600" dirty="0">
               <a:effectLst/>
               <a:latin typeface="Calibri" panose="020F0502020204030204" pitchFamily="34" charset="0"/>
               <a:ea typeface="Times New Roman" panose="02020603050405020304" pitchFamily="18" charset="0"/>
@@ -9284,7 +9704,7 @@
               </a:spcAft>
             </a:pPr>
             <a:r>
-              <a:rPr lang="en-US" sz="1800" dirty="0">
+              <a:rPr lang="en-US" sz="2000" dirty="0">
                 <a:effectLst/>
                 <a:latin typeface="Calibri" panose="020F0502020204030204" pitchFamily="34" charset="0"/>
                 <a:ea typeface="Times New Roman" panose="02020603050405020304" pitchFamily="18" charset="0"/>
@@ -9292,7 +9712,7 @@
               </a:rPr>
               <a:t>Strictly speaking, only valid against the hypothesis that the (transformed) series is a white noise. As the spectral peaks, they don’t perform well for short series.</a:t>
             </a:r>
-            <a:endParaRPr lang="fr-BE" sz="1800" dirty="0">
+            <a:endParaRPr lang="fr-BE" sz="2000" dirty="0">
               <a:effectLst/>
               <a:latin typeface="Calibri" panose="020F0502020204030204" pitchFamily="34" charset="0"/>
               <a:ea typeface="Times New Roman" panose="02020603050405020304" pitchFamily="18" charset="0"/>
@@ -9327,10 +9747,15 @@
             <a:spLocks noGrp="1"/>
           </p:cNvSpPr>
           <p:nvPr>
-            <p:ph type="ftr" sz="quarter" idx="11"/>
+            <p:ph type="ftr" sz="quarter" idx="4294967295"/>
           </p:nvPr>
         </p:nvSpPr>
-        <p:spPr/>
+        <p:spPr>
+          <a:xfrm>
+            <a:off x="0" y="0"/>
+            <a:ext cx="0" cy="0"/>
+          </a:xfrm>
+        </p:spPr>
         <p:txBody>
           <a:bodyPr/>
           <a:lstStyle/>
@@ -9402,6 +9827,35 @@
       </p:sp>
       <p:sp>
         <p:nvSpPr>
+          <p:cNvPr id="5" name="Espace réservé du numéro de diapositive 4">
+            <a:extLst>
+              <a:ext uri="{FF2B5EF4-FFF2-40B4-BE49-F238E27FC236}">
+                <a16:creationId xmlns:a16="http://schemas.microsoft.com/office/drawing/2014/main" id="{414DB151-AC9A-AC68-D7C1-28998D5729D2}"/>
+              </a:ext>
+            </a:extLst>
+          </p:cNvPr>
+          <p:cNvSpPr>
+            <a:spLocks noGrp="1"/>
+          </p:cNvSpPr>
+          <p:nvPr>
+            <p:ph type="sldNum" idx="12"/>
+          </p:nvPr>
+        </p:nvSpPr>
+        <p:spPr/>
+        <p:txBody>
+          <a:bodyPr/>
+          <a:lstStyle/>
+          <a:p>
+            <a:fld id="{71CC62B1-FA1F-4849-B719-012F8D8A46B3}" type="slidenum">
+              <a:rPr lang="en-GB" smtClean="0"/>
+              <a:t>7</a:t>
+            </a:fld>
+            <a:endParaRPr lang="en-GB"/>
+          </a:p>
+        </p:txBody>
+      </p:sp>
+      <p:sp>
+        <p:nvSpPr>
           <p:cNvPr id="3" name="Content Placeholder 2">
             <a:extLst>
               <a:ext uri="{FF2B5EF4-FFF2-40B4-BE49-F238E27FC236}">
@@ -9413,10 +9867,15 @@
             <a:spLocks noGrp="1"/>
           </p:cNvSpPr>
           <p:nvPr>
-            <p:ph idx="1"/>
+            <p:ph sz="half" idx="2"/>
           </p:nvPr>
         </p:nvSpPr>
-        <p:spPr/>
+        <p:spPr>
+          <a:xfrm>
+            <a:off x="970722" y="1195947"/>
+            <a:ext cx="10515597" cy="4900180"/>
+          </a:xfrm>
+        </p:spPr>
         <p:txBody>
           <a:bodyPr>
             <a:normAutofit/>
@@ -9424,14 +9883,14 @@
           <a:lstStyle/>
           <a:p>
             <a:r>
-              <a:rPr lang="en-GB" b="1" dirty="0"/>
+              <a:rPr lang="en-GB" sz="2800" b="1" dirty="0"/>
               <a:t>Canova-Hansen test (R only)</a:t>
             </a:r>
           </a:p>
           <a:p>
             <a:pPr lvl="1"/>
             <a:r>
-              <a:rPr lang="en-GB" b="0" i="0" dirty="0">
+              <a:rPr lang="en-GB" sz="2400" b="0" i="0" dirty="0">
                 <a:solidFill>
                   <a:srgbClr val="000000"/>
                 </a:solidFill>
@@ -9441,19 +9900,19 @@
               <a:t>test the stability of </a:t>
             </a:r>
             <a:r>
-              <a:rPr lang="en-GB" dirty="0">
+              <a:rPr lang="en-GB" sz="2400" dirty="0">
                 <a:solidFill>
                   <a:srgbClr val="000000"/>
                 </a:solidFill>
                 <a:latin typeface="Arial" panose="020B0604020202020204" pitchFamily="34" charset="0"/>
               </a:rPr>
-              <a:t>the coefficients of seasonal regressors (model quite similar to the F-test), using a Lagrange multiplier test.</a:t>
+              <a:t>the coefficients of seasonal regressors (model quite like the F-test), using a Lagrange multiplier test.</a:t>
             </a:r>
           </a:p>
           <a:p>
             <a:pPr lvl="1"/>
             <a:r>
-              <a:rPr lang="en-GB" b="0" i="0" dirty="0">
+              <a:rPr lang="en-GB" sz="2400" b="0" i="0" dirty="0">
                 <a:solidFill>
                   <a:srgbClr val="000000"/>
                 </a:solidFill>
@@ -9466,7 +9925,7 @@
           <a:p>
             <a:pPr lvl="1"/>
             <a:r>
-              <a:rPr lang="en-GB" dirty="0">
+              <a:rPr lang="en-GB" sz="2400" dirty="0">
                 <a:solidFill>
                   <a:srgbClr val="000000"/>
                 </a:solidFill>
@@ -9478,7 +9937,7 @@
           <a:p>
             <a:pPr lvl="1"/>
             <a:r>
-              <a:rPr lang="en-GB" dirty="0">
+              <a:rPr lang="en-GB" sz="2400" dirty="0">
                 <a:solidFill>
                   <a:srgbClr val="000000"/>
                 </a:solidFill>
@@ -9519,10 +9978,15 @@
             <a:spLocks noGrp="1"/>
           </p:cNvSpPr>
           <p:nvPr>
-            <p:ph type="ftr" sz="quarter" idx="11"/>
+            <p:ph type="ftr" sz="quarter" idx="4294967295"/>
           </p:nvPr>
         </p:nvSpPr>
-        <p:spPr/>
+        <p:spPr>
+          <a:xfrm>
+            <a:off x="0" y="0"/>
+            <a:ext cx="0" cy="0"/>
+          </a:xfrm>
+        </p:spPr>
         <p:txBody>
           <a:bodyPr/>
           <a:lstStyle/>
@@ -9592,6 +10056,35 @@
           </a:p>
         </p:txBody>
       </p:sp>
+      <p:sp>
+        <p:nvSpPr>
+          <p:cNvPr id="5" name="Espace réservé du numéro de diapositive 4">
+            <a:extLst>
+              <a:ext uri="{FF2B5EF4-FFF2-40B4-BE49-F238E27FC236}">
+                <a16:creationId xmlns:a16="http://schemas.microsoft.com/office/drawing/2014/main" id="{46F6A09A-50B8-1102-B92B-CC1C8DB76F83}"/>
+              </a:ext>
+            </a:extLst>
+          </p:cNvPr>
+          <p:cNvSpPr>
+            <a:spLocks noGrp="1"/>
+          </p:cNvSpPr>
+          <p:nvPr>
+            <p:ph type="sldNum" idx="12"/>
+          </p:nvPr>
+        </p:nvSpPr>
+        <p:spPr/>
+        <p:txBody>
+          <a:bodyPr/>
+          <a:lstStyle/>
+          <a:p>
+            <a:fld id="{71CC62B1-FA1F-4849-B719-012F8D8A46B3}" type="slidenum">
+              <a:rPr lang="en-GB" smtClean="0"/>
+              <a:t>8</a:t>
+            </a:fld>
+            <a:endParaRPr lang="en-GB"/>
+          </a:p>
+        </p:txBody>
+      </p:sp>
       <mc:AlternateContent xmlns:mc="http://schemas.openxmlformats.org/markup-compatibility/2006" xmlns:a14="http://schemas.microsoft.com/office/drawing/2010/main">
         <mc:Choice Requires="a14">
           <p:sp>
@@ -9607,27 +10100,32 @@
                 <a:spLocks noGrp="1"/>
               </p:cNvSpPr>
               <p:nvPr>
-                <p:ph idx="1"/>
+                <p:ph sz="half" idx="2"/>
               </p:nvPr>
             </p:nvSpPr>
-            <p:spPr/>
+            <p:spPr>
+              <a:xfrm>
+                <a:off x="970722" y="1278965"/>
+                <a:ext cx="10515597" cy="4817162"/>
+              </a:xfrm>
+            </p:spPr>
             <p:txBody>
               <a:bodyPr/>
               <a:lstStyle/>
               <a:p>
                 <a:r>
-                  <a:rPr lang="en-GB" b="1" dirty="0"/>
+                  <a:rPr lang="en-GB" sz="2800" b="1" dirty="0"/>
                   <a:t>F test </a:t>
                 </a:r>
                 <a:r>
-                  <a:rPr lang="en-GB" dirty="0"/>
+                  <a:rPr lang="en-GB" sz="2800" dirty="0"/>
                   <a:t>on default trading days variables (contrasts)</a:t>
                 </a:r>
               </a:p>
               <a:p>
                 <a:pPr lvl="1"/>
                 <a:r>
-                  <a:rPr lang="en-GB" dirty="0"/>
+                  <a:rPr lang="en-GB" sz="2400" dirty="0"/>
                   <a:t>Regression test with trading days contrasts (</a:t>
                 </a:r>
                 <a14:m>
@@ -9635,14 +10133,14 @@
                     <m:sSub>
                       <m:sSubPr>
                         <m:ctrlPr>
-                          <a:rPr lang="fr-BE" b="0" i="1" smtClean="0">
+                          <a:rPr lang="fr-BE" sz="2400" b="0" i="1" smtClean="0">
                             <a:latin typeface="Cambria Math" panose="02040503050406030204" pitchFamily="18" charset="0"/>
                           </a:rPr>
                         </m:ctrlPr>
                       </m:sSubPr>
                       <m:e>
                         <m:r>
-                          <a:rPr lang="fr-BE" b="0" i="1" smtClean="0">
+                          <a:rPr lang="fr-BE" sz="2400" b="0" i="1" smtClean="0">
                             <a:latin typeface="Cambria Math" panose="02040503050406030204" pitchFamily="18" charset="0"/>
                           </a:rPr>
                           <m:t>𝑇𝐷</m:t>
@@ -9650,7 +10148,7 @@
                       </m:e>
                       <m:sub>
                         <m:r>
-                          <a:rPr lang="fr-BE" b="0" i="1" smtClean="0">
+                          <a:rPr lang="fr-BE" sz="2400" b="0" i="1" smtClean="0">
                             <a:latin typeface="Cambria Math" panose="02040503050406030204" pitchFamily="18" charset="0"/>
                           </a:rPr>
                           <m:t>𝑡</m:t>
@@ -9660,7 +10158,7 @@
                   </m:oMath>
                 </a14:m>
                 <a:r>
-                  <a:rPr lang="en-GB" dirty="0"/>
+                  <a:rPr lang="en-GB" sz="2400" dirty="0"/>
                   <a:t>) and different models</a:t>
                 </a:r>
               </a:p>
@@ -9671,14 +10169,14 @@
                     <m:sSub>
                       <m:sSubPr>
                         <m:ctrlPr>
-                          <a:rPr lang="fr-BE" b="0" i="1" smtClean="0">
+                          <a:rPr lang="fr-BE" sz="2000" b="0" i="1" smtClean="0">
                             <a:latin typeface="Cambria Math" panose="02040503050406030204" pitchFamily="18" charset="0"/>
                           </a:rPr>
                         </m:ctrlPr>
                       </m:sSubPr>
                       <m:e>
                         <m:r>
-                          <a:rPr lang="fr-BE" b="0" i="1" smtClean="0">
+                          <a:rPr lang="fr-BE" sz="2000" b="0" i="1" smtClean="0">
                             <a:latin typeface="Cambria Math" panose="02040503050406030204" pitchFamily="18" charset="0"/>
                           </a:rPr>
                           <m:t>𝑦</m:t>
@@ -9686,7 +10184,7 @@
                       </m:e>
                       <m:sub>
                         <m:r>
-                          <a:rPr lang="fr-BE" b="0" i="1" smtClean="0">
+                          <a:rPr lang="fr-BE" sz="2000" b="0" i="1" smtClean="0">
                             <a:latin typeface="Cambria Math" panose="02040503050406030204" pitchFamily="18" charset="0"/>
                           </a:rPr>
                           <m:t>𝑡</m:t>
@@ -9694,27 +10192,27 @@
                       </m:sub>
                     </m:sSub>
                     <m:r>
-                      <a:rPr lang="fr-BE" b="0" i="1" smtClean="0">
+                      <a:rPr lang="fr-BE" sz="2000" b="0" i="1" smtClean="0">
                         <a:latin typeface="Cambria Math" panose="02040503050406030204" pitchFamily="18" charset="0"/>
                       </a:rPr>
                       <m:t>=</m:t>
                     </m:r>
                     <m:r>
-                      <a:rPr lang="fr-BE" b="0" i="1" smtClean="0">
+                      <a:rPr lang="fr-BE" sz="2000" b="0" i="1" smtClean="0">
                         <a:latin typeface="Cambria Math" panose="02040503050406030204" pitchFamily="18" charset="0"/>
                         <a:ea typeface="Cambria Math" panose="02040503050406030204" pitchFamily="18" charset="0"/>
                       </a:rPr>
                       <m:t>𝛼</m:t>
                     </m:r>
                     <m:r>
-                      <a:rPr lang="fr-BE" b="0" i="1" smtClean="0">
+                      <a:rPr lang="fr-BE" sz="2000" b="0" i="1" smtClean="0">
                         <a:latin typeface="Cambria Math" panose="02040503050406030204" pitchFamily="18" charset="0"/>
                         <a:ea typeface="Cambria Math" panose="02040503050406030204" pitchFamily="18" charset="0"/>
                       </a:rPr>
                       <m:t>+</m:t>
                     </m:r>
                     <m:r>
-                      <a:rPr lang="fr-BE" b="0" i="1" smtClean="0">
+                      <a:rPr lang="fr-BE" sz="2000" b="0" i="1" smtClean="0">
                         <a:latin typeface="Cambria Math" panose="02040503050406030204" pitchFamily="18" charset="0"/>
                         <a:ea typeface="Cambria Math" panose="02040503050406030204" pitchFamily="18" charset="0"/>
                       </a:rPr>
@@ -9723,14 +10221,14 @@
                     <m:sSub>
                       <m:sSubPr>
                         <m:ctrlPr>
-                          <a:rPr lang="fr-BE" i="1">
+                          <a:rPr lang="fr-BE" sz="2000" i="1">
                             <a:latin typeface="Cambria Math" panose="02040503050406030204" pitchFamily="18" charset="0"/>
                           </a:rPr>
                         </m:ctrlPr>
                       </m:sSubPr>
                       <m:e>
                         <m:r>
-                          <a:rPr lang="fr-BE" i="1">
+                          <a:rPr lang="fr-BE" sz="2000" i="1">
                             <a:latin typeface="Cambria Math" panose="02040503050406030204" pitchFamily="18" charset="0"/>
                           </a:rPr>
                           <m:t>𝑦</m:t>
@@ -9738,13 +10236,13 @@
                       </m:e>
                       <m:sub>
                         <m:r>
-                          <a:rPr lang="fr-BE" i="1">
+                          <a:rPr lang="fr-BE" sz="2000" i="1">
                             <a:latin typeface="Cambria Math" panose="02040503050406030204" pitchFamily="18" charset="0"/>
                           </a:rPr>
                           <m:t>𝑡</m:t>
                         </m:r>
                         <m:r>
-                          <a:rPr lang="fr-BE" b="0" i="1" smtClean="0">
+                          <a:rPr lang="fr-BE" sz="2000" b="0" i="1" smtClean="0">
                             <a:latin typeface="Cambria Math" panose="02040503050406030204" pitchFamily="18" charset="0"/>
                           </a:rPr>
                           <m:t>−1</m:t>
@@ -9752,7 +10250,7 @@
                       </m:sub>
                     </m:sSub>
                     <m:r>
-                      <a:rPr lang="fr-BE" b="0" i="1" smtClean="0">
+                      <a:rPr lang="fr-BE" sz="2000" b="0" i="1" smtClean="0">
                         <a:latin typeface="Cambria Math" panose="02040503050406030204" pitchFamily="18" charset="0"/>
                       </a:rPr>
                       <m:t>+</m:t>
@@ -9760,14 +10258,14 @@
                     <m:sSub>
                       <m:sSubPr>
                         <m:ctrlPr>
-                          <a:rPr lang="fr-BE" b="0" i="1" smtClean="0">
+                          <a:rPr lang="fr-BE" sz="2000" b="0" i="1" smtClean="0">
                             <a:latin typeface="Cambria Math" panose="02040503050406030204" pitchFamily="18" charset="0"/>
                           </a:rPr>
                         </m:ctrlPr>
                       </m:sSubPr>
                       <m:e>
                         <m:r>
-                          <a:rPr lang="fr-BE" b="0" i="1" smtClean="0">
+                          <a:rPr lang="fr-BE" sz="2000" b="0" i="1" smtClean="0">
                             <a:latin typeface="Cambria Math" panose="02040503050406030204" pitchFamily="18" charset="0"/>
                           </a:rPr>
                           <m:t>𝑇𝐷</m:t>
@@ -9775,7 +10273,7 @@
                       </m:e>
                       <m:sub>
                         <m:r>
-                          <a:rPr lang="fr-BE" b="0" i="1" smtClean="0">
+                          <a:rPr lang="fr-BE" sz="2000" b="0" i="1" smtClean="0">
                             <a:latin typeface="Cambria Math" panose="02040503050406030204" pitchFamily="18" charset="0"/>
                           </a:rPr>
                           <m:t>𝑡</m:t>
@@ -9783,14 +10281,14 @@
                       </m:sub>
                     </m:sSub>
                     <m:r>
-                      <a:rPr lang="fr-BE" b="0" i="1" smtClean="0">
+                      <a:rPr lang="fr-BE" sz="2000" b="0" i="1" smtClean="0">
                         <a:latin typeface="Cambria Math" panose="02040503050406030204" pitchFamily="18" charset="0"/>
                         <a:ea typeface="Cambria Math" panose="02040503050406030204" pitchFamily="18" charset="0"/>
                       </a:rPr>
                       <m:t>𝛽</m:t>
                     </m:r>
                     <m:r>
-                      <a:rPr lang="fr-BE" b="0" i="1" smtClean="0">
+                      <a:rPr lang="fr-BE" sz="2000" b="0" i="1" smtClean="0">
                         <a:latin typeface="Cambria Math" panose="02040503050406030204" pitchFamily="18" charset="0"/>
                         <a:ea typeface="Cambria Math" panose="02040503050406030204" pitchFamily="18" charset="0"/>
                       </a:rPr>
@@ -9799,7 +10297,7 @@
                     <m:sSub>
                       <m:sSubPr>
                         <m:ctrlPr>
-                          <a:rPr lang="fr-BE" b="0" i="1" smtClean="0">
+                          <a:rPr lang="fr-BE" sz="2000" b="0" i="1" smtClean="0">
                             <a:latin typeface="Cambria Math" panose="02040503050406030204" pitchFamily="18" charset="0"/>
                             <a:ea typeface="Cambria Math" panose="02040503050406030204" pitchFamily="18" charset="0"/>
                           </a:rPr>
@@ -9807,7 +10305,7 @@
                       </m:sSubPr>
                       <m:e>
                         <m:r>
-                          <a:rPr lang="fr-BE" b="0" i="1" smtClean="0">
+                          <a:rPr lang="fr-BE" sz="2000" b="0" i="1" smtClean="0">
                             <a:latin typeface="Cambria Math" panose="02040503050406030204" pitchFamily="18" charset="0"/>
                             <a:ea typeface="Cambria Math" panose="02040503050406030204" pitchFamily="18" charset="0"/>
                           </a:rPr>
@@ -9816,7 +10314,7 @@
                       </m:e>
                       <m:sub>
                         <m:r>
-                          <a:rPr lang="fr-BE" b="0" i="1" smtClean="0">
+                          <a:rPr lang="fr-BE" sz="2000" b="0" i="1" smtClean="0">
                             <a:latin typeface="Cambria Math" panose="02040503050406030204" pitchFamily="18" charset="0"/>
                             <a:ea typeface="Cambria Math" panose="02040503050406030204" pitchFamily="18" charset="0"/>
                           </a:rPr>
@@ -9827,7 +10325,7 @@
                   </m:oMath>
                 </a14:m>
                 <a:r>
-                  <a:rPr lang="en-GB" dirty="0"/>
+                  <a:rPr lang="en-GB" sz="2000" dirty="0"/>
                   <a:t>		(2.2.x)</a:t>
                 </a:r>
               </a:p>
@@ -9838,14 +10336,14 @@
                     <m:sSub>
                       <m:sSubPr>
                         <m:ctrlPr>
-                          <a:rPr lang="fr-BE" b="0" i="1" smtClean="0">
+                          <a:rPr lang="fr-BE" sz="2000" b="0" i="1" smtClean="0">
                             <a:latin typeface="Cambria Math" panose="02040503050406030204" pitchFamily="18" charset="0"/>
                           </a:rPr>
                         </m:ctrlPr>
                       </m:sSubPr>
                       <m:e>
                         <m:r>
-                          <a:rPr lang="fr-BE" b="0" i="1" smtClean="0">
+                          <a:rPr lang="fr-BE" sz="2000" b="0" i="1" smtClean="0">
                             <a:latin typeface="Cambria Math" panose="02040503050406030204" pitchFamily="18" charset="0"/>
                           </a:rPr>
                           <m:t>𝑦</m:t>
@@ -9853,7 +10351,7 @@
                       </m:e>
                       <m:sub>
                         <m:r>
-                          <a:rPr lang="fr-BE" b="0" i="1" smtClean="0">
+                          <a:rPr lang="fr-BE" sz="2000" b="0" i="1" smtClean="0">
                             <a:latin typeface="Cambria Math" panose="02040503050406030204" pitchFamily="18" charset="0"/>
                           </a:rPr>
                           <m:t>𝑡</m:t>
@@ -9861,7 +10359,7 @@
                       </m:sub>
                     </m:sSub>
                     <m:r>
-                      <a:rPr lang="fr-BE" b="0" i="1" smtClean="0">
+                      <a:rPr lang="fr-BE" sz="2000" b="0" i="1" smtClean="0">
                         <a:latin typeface="Cambria Math" panose="02040503050406030204" pitchFamily="18" charset="0"/>
                       </a:rPr>
                       <m:t>−</m:t>
@@ -9869,14 +10367,14 @@
                     <m:sSub>
                       <m:sSubPr>
                         <m:ctrlPr>
-                          <a:rPr lang="fr-BE" i="1">
+                          <a:rPr lang="fr-BE" sz="2000" i="1">
                             <a:latin typeface="Cambria Math" panose="02040503050406030204" pitchFamily="18" charset="0"/>
                           </a:rPr>
                         </m:ctrlPr>
                       </m:sSubPr>
                       <m:e>
                         <m:r>
-                          <a:rPr lang="fr-BE" i="1">
+                          <a:rPr lang="fr-BE" sz="2000" i="1">
                             <a:latin typeface="Cambria Math" panose="02040503050406030204" pitchFamily="18" charset="0"/>
                           </a:rPr>
                           <m:t>𝑦</m:t>
@@ -9884,13 +10382,13 @@
                       </m:e>
                       <m:sub>
                         <m:r>
-                          <a:rPr lang="fr-BE" i="1">
+                          <a:rPr lang="fr-BE" sz="2000" i="1">
                             <a:latin typeface="Cambria Math" panose="02040503050406030204" pitchFamily="18" charset="0"/>
                           </a:rPr>
                           <m:t>𝑡</m:t>
                         </m:r>
                         <m:r>
-                          <a:rPr lang="fr-BE" b="0" i="1" smtClean="0">
+                          <a:rPr lang="fr-BE" sz="2000" b="0" i="1" smtClean="0">
                             <a:latin typeface="Cambria Math" panose="02040503050406030204" pitchFamily="18" charset="0"/>
                           </a:rPr>
                           <m:t>−1</m:t>
@@ -9898,20 +10396,20 @@
                       </m:sub>
                     </m:sSub>
                     <m:r>
-                      <a:rPr lang="fr-BE" b="0" i="1" smtClean="0">
+                      <a:rPr lang="fr-BE" sz="2000" b="0" i="1" smtClean="0">
                         <a:latin typeface="Cambria Math" panose="02040503050406030204" pitchFamily="18" charset="0"/>
                       </a:rPr>
                       <m:t>=</m:t>
                     </m:r>
                     <m:r>
-                      <a:rPr lang="fr-BE" b="0" i="1" smtClean="0">
+                      <a:rPr lang="fr-BE" sz="2000" b="0" i="1" smtClean="0">
                         <a:latin typeface="Cambria Math" panose="02040503050406030204" pitchFamily="18" charset="0"/>
                         <a:ea typeface="Cambria Math" panose="02040503050406030204" pitchFamily="18" charset="0"/>
                       </a:rPr>
                       <m:t>𝛼</m:t>
                     </m:r>
                     <m:r>
-                      <a:rPr lang="fr-BE" b="0" i="1" smtClean="0">
+                      <a:rPr lang="fr-BE" sz="2000" b="0" i="1" smtClean="0">
                         <a:latin typeface="Cambria Math" panose="02040503050406030204" pitchFamily="18" charset="0"/>
                         <a:ea typeface="Cambria Math" panose="02040503050406030204" pitchFamily="18" charset="0"/>
                       </a:rPr>
@@ -9920,14 +10418,14 @@
                     <m:sSub>
                       <m:sSubPr>
                         <m:ctrlPr>
-                          <a:rPr lang="fr-BE" b="0" i="1" smtClean="0">
+                          <a:rPr lang="fr-BE" sz="2000" b="0" i="1" smtClean="0">
                             <a:latin typeface="Cambria Math" panose="02040503050406030204" pitchFamily="18" charset="0"/>
                           </a:rPr>
                         </m:ctrlPr>
                       </m:sSubPr>
                       <m:e>
                         <m:r>
-                          <a:rPr lang="fr-BE" b="0" i="1" smtClean="0">
+                          <a:rPr lang="fr-BE" sz="2000" b="0" i="1" smtClean="0">
                             <a:latin typeface="Cambria Math" panose="02040503050406030204" pitchFamily="18" charset="0"/>
                           </a:rPr>
                           <m:t>𝑇𝐷</m:t>
@@ -9935,7 +10433,7 @@
                       </m:e>
                       <m:sub>
                         <m:r>
-                          <a:rPr lang="fr-BE" b="0" i="1" smtClean="0">
+                          <a:rPr lang="fr-BE" sz="2000" b="0" i="1" smtClean="0">
                             <a:latin typeface="Cambria Math" panose="02040503050406030204" pitchFamily="18" charset="0"/>
                           </a:rPr>
                           <m:t>𝑡</m:t>
@@ -9943,14 +10441,14 @@
                       </m:sub>
                     </m:sSub>
                     <m:r>
-                      <a:rPr lang="fr-BE" b="0" i="1" smtClean="0">
+                      <a:rPr lang="fr-BE" sz="2000" b="0" i="1" smtClean="0">
                         <a:latin typeface="Cambria Math" panose="02040503050406030204" pitchFamily="18" charset="0"/>
                         <a:ea typeface="Cambria Math" panose="02040503050406030204" pitchFamily="18" charset="0"/>
                       </a:rPr>
                       <m:t>𝛽</m:t>
                     </m:r>
                     <m:r>
-                      <a:rPr lang="fr-BE" b="0" i="1" smtClean="0">
+                      <a:rPr lang="fr-BE" sz="2000" b="0" i="1" smtClean="0">
                         <a:latin typeface="Cambria Math" panose="02040503050406030204" pitchFamily="18" charset="0"/>
                         <a:ea typeface="Cambria Math" panose="02040503050406030204" pitchFamily="18" charset="0"/>
                       </a:rPr>
@@ -9959,7 +10457,7 @@
                     <m:sSub>
                       <m:sSubPr>
                         <m:ctrlPr>
-                          <a:rPr lang="fr-BE" b="0" i="1" smtClean="0">
+                          <a:rPr lang="fr-BE" sz="2000" b="0" i="1" smtClean="0">
                             <a:latin typeface="Cambria Math" panose="02040503050406030204" pitchFamily="18" charset="0"/>
                             <a:ea typeface="Cambria Math" panose="02040503050406030204" pitchFamily="18" charset="0"/>
                           </a:rPr>
@@ -9967,7 +10465,7 @@
                       </m:sSubPr>
                       <m:e>
                         <m:r>
-                          <a:rPr lang="fr-BE" b="0" i="1" smtClean="0">
+                          <a:rPr lang="fr-BE" sz="2000" b="0" i="1" smtClean="0">
                             <a:latin typeface="Cambria Math" panose="02040503050406030204" pitchFamily="18" charset="0"/>
                             <a:ea typeface="Cambria Math" panose="02040503050406030204" pitchFamily="18" charset="0"/>
                           </a:rPr>
@@ -9976,7 +10474,7 @@
                       </m:e>
                       <m:sub>
                         <m:r>
-                          <a:rPr lang="fr-BE" b="0" i="1" smtClean="0">
+                          <a:rPr lang="fr-BE" sz="2000" b="0" i="1" smtClean="0">
                             <a:latin typeface="Cambria Math" panose="02040503050406030204" pitchFamily="18" charset="0"/>
                             <a:ea typeface="Cambria Math" panose="02040503050406030204" pitchFamily="18" charset="0"/>
                           </a:rPr>
@@ -9987,7 +10485,7 @@
                   </m:oMath>
                 </a14:m>
                 <a:r>
-                  <a:rPr lang="en-GB" dirty="0"/>
+                  <a:rPr lang="en-GB" sz="2000" dirty="0"/>
                   <a:t> 		(2.2.x)</a:t>
                 </a:r>
               </a:p>
@@ -9996,14 +10494,14 @@
                 <a14:m>
                   <m:oMath xmlns:m="http://schemas.openxmlformats.org/officeDocument/2006/math">
                     <m:r>
-                      <a:rPr lang="en-GB" i="1" smtClean="0">
+                      <a:rPr lang="en-GB" sz="2000" i="1" smtClean="0">
                         <a:latin typeface="Cambria Math" panose="02040503050406030204" pitchFamily="18" charset="0"/>
                         <a:ea typeface="Cambria Math" panose="02040503050406030204" pitchFamily="18" charset="0"/>
                       </a:rPr>
                       <m:t>∆</m:t>
                     </m:r>
                     <m:r>
-                      <a:rPr lang="fr-BE" b="0" i="1" smtClean="0">
+                      <a:rPr lang="fr-BE" sz="2000" b="0" i="1" smtClean="0">
                         <a:latin typeface="Cambria Math" panose="02040503050406030204" pitchFamily="18" charset="0"/>
                         <a:ea typeface="Cambria Math" panose="02040503050406030204" pitchFamily="18" charset="0"/>
                       </a:rPr>
@@ -10012,14 +10510,14 @@
                     <m:sSub>
                       <m:sSubPr>
                         <m:ctrlPr>
-                          <a:rPr lang="fr-BE" b="0" i="1" smtClean="0">
+                          <a:rPr lang="fr-BE" sz="2000" b="0" i="1" smtClean="0">
                             <a:latin typeface="Cambria Math" panose="02040503050406030204" pitchFamily="18" charset="0"/>
                           </a:rPr>
                         </m:ctrlPr>
                       </m:sSubPr>
                       <m:e>
                         <m:r>
-                          <a:rPr lang="fr-BE" b="0" i="1" smtClean="0">
+                          <a:rPr lang="fr-BE" sz="2000" b="0" i="1" smtClean="0">
                             <a:latin typeface="Cambria Math" panose="02040503050406030204" pitchFamily="18" charset="0"/>
                           </a:rPr>
                           <m:t>𝑦</m:t>
@@ -10027,7 +10525,7 @@
                       </m:e>
                       <m:sub>
                         <m:r>
-                          <a:rPr lang="fr-BE" b="0" i="1" smtClean="0">
+                          <a:rPr lang="fr-BE" sz="2000" b="0" i="1" smtClean="0">
                             <a:latin typeface="Cambria Math" panose="02040503050406030204" pitchFamily="18" charset="0"/>
                           </a:rPr>
                           <m:t>𝑡</m:t>
@@ -10035,7 +10533,7 @@
                       </m:sub>
                     </m:sSub>
                     <m:r>
-                      <a:rPr lang="fr-BE" b="0" i="1" smtClean="0">
+                      <a:rPr lang="fr-BE" sz="2000" b="0" i="1" smtClean="0">
                         <a:latin typeface="Cambria Math" panose="02040503050406030204" pitchFamily="18" charset="0"/>
                       </a:rPr>
                       <m:t>−</m:t>
@@ -10043,14 +10541,14 @@
                     <m:sSub>
                       <m:sSubPr>
                         <m:ctrlPr>
-                          <a:rPr lang="fr-BE" i="1">
+                          <a:rPr lang="fr-BE" sz="2000" i="1">
                             <a:latin typeface="Cambria Math" panose="02040503050406030204" pitchFamily="18" charset="0"/>
                           </a:rPr>
                         </m:ctrlPr>
                       </m:sSubPr>
                       <m:e>
                         <m:r>
-                          <a:rPr lang="fr-BE" i="1">
+                          <a:rPr lang="fr-BE" sz="2000" i="1">
                             <a:latin typeface="Cambria Math" panose="02040503050406030204" pitchFamily="18" charset="0"/>
                           </a:rPr>
                           <m:t>𝑇𝐷</m:t>
@@ -10058,7 +10556,7 @@
                       </m:e>
                       <m:sub>
                         <m:r>
-                          <a:rPr lang="fr-BE" i="1">
+                          <a:rPr lang="fr-BE" sz="2000" i="1">
                             <a:latin typeface="Cambria Math" panose="02040503050406030204" pitchFamily="18" charset="0"/>
                           </a:rPr>
                           <m:t>𝑡</m:t>
@@ -10066,33 +10564,33 @@
                       </m:sub>
                     </m:sSub>
                     <m:r>
-                      <a:rPr lang="fr-BE" i="1">
+                      <a:rPr lang="fr-BE" sz="2000" i="1">
                         <a:latin typeface="Cambria Math" panose="02040503050406030204" pitchFamily="18" charset="0"/>
                         <a:ea typeface="Cambria Math" panose="02040503050406030204" pitchFamily="18" charset="0"/>
                       </a:rPr>
                       <m:t>𝛽</m:t>
                     </m:r>
                     <m:r>
-                      <a:rPr lang="fr-BE" i="1" smtClean="0">
+                      <a:rPr lang="fr-BE" sz="2000" i="1" smtClean="0">
                         <a:latin typeface="Cambria Math" panose="02040503050406030204" pitchFamily="18" charset="0"/>
                       </a:rPr>
                       <m:t>)</m:t>
                     </m:r>
                     <m:r>
-                      <a:rPr lang="fr-BE" b="0" i="1" smtClean="0">
+                      <a:rPr lang="fr-BE" sz="2000" b="0" i="1" smtClean="0">
                         <a:latin typeface="Cambria Math" panose="02040503050406030204" pitchFamily="18" charset="0"/>
                       </a:rPr>
                       <m:t>=</m:t>
                     </m:r>
                     <m:r>
-                      <a:rPr lang="fr-BE" b="0" i="1" smtClean="0">
+                      <a:rPr lang="fr-BE" sz="2000" b="0" i="1" smtClean="0">
                         <a:latin typeface="Cambria Math" panose="02040503050406030204" pitchFamily="18" charset="0"/>
                         <a:ea typeface="Cambria Math" panose="02040503050406030204" pitchFamily="18" charset="0"/>
                       </a:rPr>
                       <m:t>𝛼</m:t>
                     </m:r>
                     <m:r>
-                      <a:rPr lang="fr-BE" b="0" i="1" smtClean="0">
+                      <a:rPr lang="fr-BE" sz="2000" b="0" i="1" smtClean="0">
                         <a:latin typeface="Cambria Math" panose="02040503050406030204" pitchFamily="18" charset="0"/>
                         <a:ea typeface="Cambria Math" panose="02040503050406030204" pitchFamily="18" charset="0"/>
                       </a:rPr>
@@ -10101,7 +10599,7 @@
                     <m:sSub>
                       <m:sSubPr>
                         <m:ctrlPr>
-                          <a:rPr lang="fr-BE" b="0" i="1" smtClean="0">
+                          <a:rPr lang="fr-BE" sz="2000" b="0" i="1" smtClean="0">
                             <a:latin typeface="Cambria Math" panose="02040503050406030204" pitchFamily="18" charset="0"/>
                             <a:ea typeface="Cambria Math" panose="02040503050406030204" pitchFamily="18" charset="0"/>
                           </a:rPr>
@@ -10109,7 +10607,7 @@
                       </m:sSubPr>
                       <m:e>
                         <m:r>
-                          <a:rPr lang="fr-BE" b="0" i="1" smtClean="0">
+                          <a:rPr lang="fr-BE" sz="2000" b="0" i="1" smtClean="0">
                             <a:latin typeface="Cambria Math" panose="02040503050406030204" pitchFamily="18" charset="0"/>
                             <a:ea typeface="Cambria Math" panose="02040503050406030204" pitchFamily="18" charset="0"/>
                           </a:rPr>
@@ -10118,7 +10616,7 @@
                       </m:e>
                       <m:sub>
                         <m:r>
-                          <a:rPr lang="fr-BE" b="0" i="1" smtClean="0">
+                          <a:rPr lang="fr-BE" sz="2000" b="0" i="1" smtClean="0">
                             <a:latin typeface="Cambria Math" panose="02040503050406030204" pitchFamily="18" charset="0"/>
                             <a:ea typeface="Cambria Math" panose="02040503050406030204" pitchFamily="18" charset="0"/>
                           </a:rPr>
@@ -10129,7 +10627,7 @@
                   </m:oMath>
                 </a14:m>
                 <a:r>
-                  <a:rPr lang="en-GB" dirty="0"/>
+                  <a:rPr lang="en-GB" sz="2000" dirty="0"/>
                   <a:t>			(3.0)</a:t>
                 </a:r>
               </a:p>
@@ -10138,7 +10636,7 @@
                 <a14:m>
                   <m:oMath xmlns:m="http://schemas.openxmlformats.org/officeDocument/2006/math">
                     <m:r>
-                      <a:rPr lang="en-GB" i="1" smtClean="0">
+                      <a:rPr lang="en-GB" sz="2000" i="1" smtClean="0">
                         <a:latin typeface="Cambria Math" panose="02040503050406030204" pitchFamily="18" charset="0"/>
                         <a:ea typeface="Cambria Math" panose="02040503050406030204" pitchFamily="18" charset="0"/>
                       </a:rPr>
@@ -10147,7 +10645,7 @@
                     <m:d>
                       <m:dPr>
                         <m:ctrlPr>
-                          <a:rPr lang="en-GB" i="1" smtClean="0">
+                          <a:rPr lang="fr-BE" sz="2000" b="0" i="1" smtClean="0">
                             <a:latin typeface="Cambria Math" panose="02040503050406030204" pitchFamily="18" charset="0"/>
                           </a:rPr>
                         </m:ctrlPr>
@@ -10156,14 +10654,14 @@
                         <m:sSub>
                           <m:sSubPr>
                             <m:ctrlPr>
-                              <a:rPr lang="fr-BE" b="0" i="1" smtClean="0">
+                              <a:rPr lang="fr-BE" sz="2000" b="0" i="1" smtClean="0">
                                 <a:latin typeface="Cambria Math" panose="02040503050406030204" pitchFamily="18" charset="0"/>
                               </a:rPr>
                             </m:ctrlPr>
                           </m:sSubPr>
                           <m:e>
                             <m:r>
-                              <a:rPr lang="fr-BE" b="0" i="1" smtClean="0">
+                              <a:rPr lang="fr-BE" sz="2000" b="0" i="1" smtClean="0">
                                 <a:latin typeface="Cambria Math" panose="02040503050406030204" pitchFamily="18" charset="0"/>
                               </a:rPr>
                               <m:t>𝑦</m:t>
@@ -10171,7 +10669,7 @@
                           </m:e>
                           <m:sub>
                             <m:r>
-                              <a:rPr lang="fr-BE" b="0" i="1" smtClean="0">
+                              <a:rPr lang="fr-BE" sz="2000" b="0" i="1" smtClean="0">
                                 <a:latin typeface="Cambria Math" panose="02040503050406030204" pitchFamily="18" charset="0"/>
                               </a:rPr>
                               <m:t>𝑡</m:t>
@@ -10179,7 +10677,7 @@
                           </m:sub>
                         </m:sSub>
                         <m:r>
-                          <a:rPr lang="fr-BE" b="0" i="1" smtClean="0">
+                          <a:rPr lang="fr-BE" sz="2000" b="0" i="1" smtClean="0">
                             <a:latin typeface="Cambria Math" panose="02040503050406030204" pitchFamily="18" charset="0"/>
                           </a:rPr>
                           <m:t>−</m:t>
@@ -10187,14 +10685,14 @@
                         <m:sSub>
                           <m:sSubPr>
                             <m:ctrlPr>
-                              <a:rPr lang="fr-BE" i="1">
+                              <a:rPr lang="fr-BE" sz="2000" i="1">
                                 <a:latin typeface="Cambria Math" panose="02040503050406030204" pitchFamily="18" charset="0"/>
                               </a:rPr>
                             </m:ctrlPr>
                           </m:sSubPr>
                           <m:e>
                             <m:r>
-                              <a:rPr lang="fr-BE" i="1">
+                              <a:rPr lang="fr-BE" sz="2000" i="1">
                                 <a:latin typeface="Cambria Math" panose="02040503050406030204" pitchFamily="18" charset="0"/>
                               </a:rPr>
                               <m:t>𝑇𝐷</m:t>
@@ -10202,7 +10700,7 @@
                           </m:e>
                           <m:sub>
                             <m:r>
-                              <a:rPr lang="fr-BE" i="1">
+                              <a:rPr lang="fr-BE" sz="2000" i="1">
                                 <a:latin typeface="Cambria Math" panose="02040503050406030204" pitchFamily="18" charset="0"/>
                               </a:rPr>
                               <m:t>𝑡</m:t>
@@ -10210,7 +10708,7 @@
                           </m:sub>
                         </m:sSub>
                         <m:r>
-                          <a:rPr lang="fr-BE" i="1">
+                          <a:rPr lang="fr-BE" sz="2000" i="1">
                             <a:latin typeface="Cambria Math" panose="02040503050406030204" pitchFamily="18" charset="0"/>
                             <a:ea typeface="Cambria Math" panose="02040503050406030204" pitchFamily="18" charset="0"/>
                           </a:rPr>
@@ -10219,7 +10717,7 @@
                       </m:e>
                     </m:d>
                     <m:r>
-                      <a:rPr lang="fr-BE" b="0" i="1" smtClean="0">
+                      <a:rPr lang="fr-BE" sz="2000" b="0" i="1" smtClean="0">
                         <a:latin typeface="Cambria Math" panose="02040503050406030204" pitchFamily="18" charset="0"/>
                       </a:rPr>
                       <m:t>=</m:t>
@@ -10227,7 +10725,7 @@
                     <m:sSub>
                       <m:sSubPr>
                         <m:ctrlPr>
-                          <a:rPr lang="fr-BE" b="0" i="1" smtClean="0">
+                          <a:rPr lang="fr-BE" sz="2000" b="0" i="1" smtClean="0">
                             <a:latin typeface="Cambria Math" panose="02040503050406030204" pitchFamily="18" charset="0"/>
                             <a:ea typeface="Cambria Math" panose="02040503050406030204" pitchFamily="18" charset="0"/>
                           </a:rPr>
@@ -10235,7 +10733,7 @@
                       </m:sSubPr>
                       <m:e>
                         <m:r>
-                          <a:rPr lang="fr-BE" b="0" i="1" smtClean="0">
+                          <a:rPr lang="fr-BE" sz="2000" b="0" i="1" smtClean="0">
                             <a:latin typeface="Cambria Math" panose="02040503050406030204" pitchFamily="18" charset="0"/>
                             <a:ea typeface="Cambria Math" panose="02040503050406030204" pitchFamily="18" charset="0"/>
                           </a:rPr>
@@ -10244,7 +10742,7 @@
                       </m:e>
                       <m:sub>
                         <m:r>
-                          <a:rPr lang="fr-BE" b="0" i="1" smtClean="0">
+                          <a:rPr lang="fr-BE" sz="2000" b="0" i="1" smtClean="0">
                             <a:latin typeface="Cambria Math" panose="02040503050406030204" pitchFamily="18" charset="0"/>
                             <a:ea typeface="Cambria Math" panose="02040503050406030204" pitchFamily="18" charset="0"/>
                           </a:rPr>
@@ -10253,14 +10751,14 @@
                       </m:sub>
                     </m:sSub>
                     <m:r>
-                      <a:rPr lang="fr-BE" b="0" i="1" smtClean="0">
+                      <a:rPr lang="fr-BE" sz="2000" b="0" i="1" smtClean="0">
                         <a:latin typeface="Cambria Math" panose="02040503050406030204" pitchFamily="18" charset="0"/>
                         <a:ea typeface="Cambria Math" panose="02040503050406030204" pitchFamily="18" charset="0"/>
                       </a:rPr>
                       <m:t>+</m:t>
                     </m:r>
                     <m:r>
-                      <a:rPr lang="fr-BE" b="0" i="1" smtClean="0">
+                      <a:rPr lang="fr-BE" sz="2000" b="0" i="1" smtClean="0">
                         <a:latin typeface="Cambria Math" panose="02040503050406030204" pitchFamily="18" charset="0"/>
                         <a:ea typeface="Cambria Math" panose="02040503050406030204" pitchFamily="18" charset="0"/>
                       </a:rPr>
@@ -10269,7 +10767,7 @@
                     <m:sSub>
                       <m:sSubPr>
                         <m:ctrlPr>
-                          <a:rPr lang="fr-BE" i="1">
+                          <a:rPr lang="fr-BE" sz="2000" i="1">
                             <a:latin typeface="Cambria Math" panose="02040503050406030204" pitchFamily="18" charset="0"/>
                             <a:ea typeface="Cambria Math" panose="02040503050406030204" pitchFamily="18" charset="0"/>
                           </a:rPr>
@@ -10277,7 +10775,7 @@
                       </m:sSubPr>
                       <m:e>
                         <m:r>
-                          <a:rPr lang="fr-BE" i="1">
+                          <a:rPr lang="fr-BE" sz="2000" i="1">
                             <a:latin typeface="Cambria Math" panose="02040503050406030204" pitchFamily="18" charset="0"/>
                             <a:ea typeface="Cambria Math" panose="02040503050406030204" pitchFamily="18" charset="0"/>
                           </a:rPr>
@@ -10286,14 +10784,14 @@
                       </m:e>
                       <m:sub>
                         <m:r>
-                          <a:rPr lang="fr-BE" i="1">
+                          <a:rPr lang="fr-BE" sz="2000" i="1">
                             <a:latin typeface="Cambria Math" panose="02040503050406030204" pitchFamily="18" charset="0"/>
                             <a:ea typeface="Cambria Math" panose="02040503050406030204" pitchFamily="18" charset="0"/>
                           </a:rPr>
                           <m:t>𝑡</m:t>
                         </m:r>
                         <m:r>
-                          <a:rPr lang="fr-BE" b="0" i="1" smtClean="0">
+                          <a:rPr lang="fr-BE" sz="2000" b="0" i="1" smtClean="0">
                             <a:latin typeface="Cambria Math" panose="02040503050406030204" pitchFamily="18" charset="0"/>
                             <a:ea typeface="Cambria Math" panose="02040503050406030204" pitchFamily="18" charset="0"/>
                           </a:rPr>
@@ -10304,14 +10802,14 @@
                   </m:oMath>
                 </a14:m>
                 <a:r>
-                  <a:rPr lang="en-GB" dirty="0"/>
+                  <a:rPr lang="en-GB" sz="2000" dirty="0"/>
                   <a:t>		(3.0)</a:t>
                 </a:r>
               </a:p>
               <a:p>
                 <a:pPr lvl="2"/>
                 <a:r>
-                  <a:rPr lang="en-GB" dirty="0"/>
+                  <a:rPr lang="en-GB" sz="2000" dirty="0"/>
                   <a:t>More generally: </a:t>
                 </a:r>
                 <a14:m>
@@ -10319,14 +10817,14 @@
                     <m:sSub>
                       <m:sSubPr>
                         <m:ctrlPr>
-                          <a:rPr lang="fr-BE" b="0" i="1" smtClean="0">
+                          <a:rPr lang="fr-BE" sz="2000" b="0" i="1" smtClean="0">
                             <a:latin typeface="Cambria Math" panose="02040503050406030204" pitchFamily="18" charset="0"/>
                           </a:rPr>
                         </m:ctrlPr>
                       </m:sSubPr>
                       <m:e>
                         <m:r>
-                          <a:rPr lang="fr-BE" b="0" i="1" smtClean="0">
+                          <a:rPr lang="fr-BE" sz="2000" b="0" i="1" smtClean="0">
                             <a:latin typeface="Cambria Math" panose="02040503050406030204" pitchFamily="18" charset="0"/>
                           </a:rPr>
                           <m:t>𝑦</m:t>
@@ -10334,7 +10832,7 @@
                       </m:e>
                       <m:sub>
                         <m:r>
-                          <a:rPr lang="fr-BE" b="0" i="1" smtClean="0">
+                          <a:rPr lang="fr-BE" sz="2000" b="0" i="1" smtClean="0">
                             <a:latin typeface="Cambria Math" panose="02040503050406030204" pitchFamily="18" charset="0"/>
                           </a:rPr>
                           <m:t>𝑡</m:t>
@@ -10342,20 +10840,20 @@
                       </m:sub>
                     </m:sSub>
                     <m:r>
-                      <a:rPr lang="fr-BE" b="0" i="1" smtClean="0">
+                      <a:rPr lang="fr-BE" sz="2000" b="0" i="1" smtClean="0">
                         <a:latin typeface="Cambria Math" panose="02040503050406030204" pitchFamily="18" charset="0"/>
                       </a:rPr>
                       <m:t>=</m:t>
                     </m:r>
                     <m:r>
-                      <a:rPr lang="fr-BE" b="0" i="1" smtClean="0">
+                      <a:rPr lang="fr-BE" sz="2000" b="0" i="1" smtClean="0">
                         <a:latin typeface="Cambria Math" panose="02040503050406030204" pitchFamily="18" charset="0"/>
                         <a:ea typeface="Cambria Math" panose="02040503050406030204" pitchFamily="18" charset="0"/>
                       </a:rPr>
                       <m:t>𝛼</m:t>
                     </m:r>
                     <m:r>
-                      <a:rPr lang="fr-BE" b="0" i="1" smtClean="0">
+                      <a:rPr lang="fr-BE" sz="2000" b="0" i="1" smtClean="0">
                         <a:latin typeface="Cambria Math" panose="02040503050406030204" pitchFamily="18" charset="0"/>
                         <a:ea typeface="Cambria Math" panose="02040503050406030204" pitchFamily="18" charset="0"/>
                       </a:rPr>
@@ -10364,14 +10862,14 @@
                     <m:sSub>
                       <m:sSubPr>
                         <m:ctrlPr>
-                          <a:rPr lang="fr-BE" b="0" i="1" smtClean="0">
+                          <a:rPr lang="fr-BE" sz="2000" b="0" i="1" smtClean="0">
                             <a:latin typeface="Cambria Math" panose="02040503050406030204" pitchFamily="18" charset="0"/>
                           </a:rPr>
                         </m:ctrlPr>
                       </m:sSubPr>
                       <m:e>
                         <m:r>
-                          <a:rPr lang="fr-BE" b="0" i="1" smtClean="0">
+                          <a:rPr lang="fr-BE" sz="2000" b="0" i="1" smtClean="0">
                             <a:latin typeface="Cambria Math" panose="02040503050406030204" pitchFamily="18" charset="0"/>
                           </a:rPr>
                           <m:t>𝑇𝐷</m:t>
@@ -10379,7 +10877,7 @@
                       </m:e>
                       <m:sub>
                         <m:r>
-                          <a:rPr lang="fr-BE" b="0" i="1" smtClean="0">
+                          <a:rPr lang="fr-BE" sz="2000" b="0" i="1" smtClean="0">
                             <a:latin typeface="Cambria Math" panose="02040503050406030204" pitchFamily="18" charset="0"/>
                           </a:rPr>
                           <m:t>𝑡</m:t>
@@ -10387,14 +10885,14 @@
                       </m:sub>
                     </m:sSub>
                     <m:r>
-                      <a:rPr lang="fr-BE" b="0" i="1" smtClean="0">
+                      <a:rPr lang="fr-BE" sz="2000" b="0" i="1" smtClean="0">
                         <a:latin typeface="Cambria Math" panose="02040503050406030204" pitchFamily="18" charset="0"/>
                         <a:ea typeface="Cambria Math" panose="02040503050406030204" pitchFamily="18" charset="0"/>
                       </a:rPr>
                       <m:t>𝛽</m:t>
                     </m:r>
                     <m:r>
-                      <a:rPr lang="fr-BE" b="0" i="1" smtClean="0">
+                      <a:rPr lang="fr-BE" sz="2000" b="0" i="1" smtClean="0">
                         <a:latin typeface="Cambria Math" panose="02040503050406030204" pitchFamily="18" charset="0"/>
                         <a:ea typeface="Cambria Math" panose="02040503050406030204" pitchFamily="18" charset="0"/>
                       </a:rPr>
@@ -10403,7 +10901,7 @@
                     <m:sSub>
                       <m:sSubPr>
                         <m:ctrlPr>
-                          <a:rPr lang="fr-BE" b="0" i="1" smtClean="0">
+                          <a:rPr lang="fr-BE" sz="2000" b="0" i="1" smtClean="0">
                             <a:latin typeface="Cambria Math" panose="02040503050406030204" pitchFamily="18" charset="0"/>
                             <a:ea typeface="Cambria Math" panose="02040503050406030204" pitchFamily="18" charset="0"/>
                           </a:rPr>
@@ -10411,7 +10909,7 @@
                       </m:sSubPr>
                       <m:e>
                         <m:r>
-                          <a:rPr lang="fr-BE" b="0" i="1" smtClean="0">
+                          <a:rPr lang="fr-BE" sz="2000" b="0" i="1" smtClean="0">
                             <a:latin typeface="Cambria Math" panose="02040503050406030204" pitchFamily="18" charset="0"/>
                             <a:ea typeface="Cambria Math" panose="02040503050406030204" pitchFamily="18" charset="0"/>
                           </a:rPr>
@@ -10420,7 +10918,7 @@
                       </m:e>
                       <m:sub>
                         <m:r>
-                          <a:rPr lang="fr-BE" b="0" i="1" smtClean="0">
+                          <a:rPr lang="fr-BE" sz="2000" b="0" i="1" smtClean="0">
                             <a:latin typeface="Cambria Math" panose="02040503050406030204" pitchFamily="18" charset="0"/>
                             <a:ea typeface="Cambria Math" panose="02040503050406030204" pitchFamily="18" charset="0"/>
                           </a:rPr>
@@ -10430,18 +10928,18 @@
                     </m:sSub>
                   </m:oMath>
                 </a14:m>
-                <a:endParaRPr lang="en-GB" dirty="0"/>
+                <a:endParaRPr lang="en-GB" sz="2000" dirty="0"/>
               </a:p>
               <a:p>
                 <a:pPr lvl="1"/>
                 <a:r>
-                  <a:rPr lang="en-GB" dirty="0"/>
+                  <a:rPr lang="en-GB" sz="2400" dirty="0"/>
                   <a:t>H0: coefficients (</a:t>
                 </a:r>
                 <a14:m>
                   <m:oMath xmlns:m="http://schemas.openxmlformats.org/officeDocument/2006/math">
                     <m:r>
-                      <a:rPr lang="fr-BE" b="0" i="1" smtClean="0">
+                      <a:rPr lang="fr-BE" sz="2400" b="0" i="1" smtClean="0">
                         <a:latin typeface="Cambria Math" panose="02040503050406030204" pitchFamily="18" charset="0"/>
                         <a:ea typeface="Cambria Math" panose="02040503050406030204" pitchFamily="18" charset="0"/>
                       </a:rPr>
@@ -10450,14 +10948,14 @@
                   </m:oMath>
                 </a14:m>
                 <a:r>
-                  <a:rPr lang="en-GB" dirty="0"/>
+                  <a:rPr lang="en-GB" sz="2400" dirty="0"/>
                   <a:t>) are equal to 0, H1: coefficients jointly differ from 0</a:t>
                 </a:r>
               </a:p>
               <a:p>
                 <a:pPr lvl="1"/>
                 <a:r>
-                  <a:rPr lang="en-GB" dirty="0"/>
+                  <a:rPr lang="en-GB" sz="2400" dirty="0"/>
                   <a:t>Applied on (log) series. Should be applied on parts of the series</a:t>
                 </a:r>
               </a:p>
@@ -10481,14 +10979,18 @@
                 <a:spLocks noGrp="1" noRot="1" noChangeAspect="1" noMove="1" noResize="1" noEditPoints="1" noAdjustHandles="1" noChangeArrowheads="1" noChangeShapeType="1" noTextEdit="1"/>
               </p:cNvSpPr>
               <p:nvPr>
-                <p:ph idx="1"/>
+                <p:ph sz="half" idx="2"/>
               </p:nvPr>
             </p:nvSpPr>
             <p:spPr>
+              <a:xfrm>
+                <a:off x="970722" y="1278965"/>
+                <a:ext cx="10515597" cy="4817162"/>
+              </a:xfrm>
               <a:blipFill>
                 <a:blip r:embed="rId2"/>
                 <a:stretch>
-                  <a:fillRect l="-1043" t="-2241"/>
+                  <a:fillRect l="-754" t="-2278"/>
                 </a:stretch>
               </a:blipFill>
             </p:spPr>
@@ -10520,10 +11022,15 @@
             <a:spLocks noGrp="1"/>
           </p:cNvSpPr>
           <p:nvPr>
-            <p:ph type="ftr" sz="quarter" idx="11"/>
+            <p:ph type="ftr" sz="quarter" idx="4294967295"/>
           </p:nvPr>
         </p:nvSpPr>
-        <p:spPr/>
+        <p:spPr>
+          <a:xfrm>
+            <a:off x="0" y="0"/>
+            <a:ext cx="0" cy="0"/>
+          </a:xfrm>
+        </p:spPr>
         <p:txBody>
           <a:bodyPr/>
           <a:lstStyle/>
@@ -10612,6 +11119,35 @@
       </p:sp>
       <p:sp>
         <p:nvSpPr>
+          <p:cNvPr id="4" name="Espace réservé du numéro de diapositive 3">
+            <a:extLst>
+              <a:ext uri="{FF2B5EF4-FFF2-40B4-BE49-F238E27FC236}">
+                <a16:creationId xmlns:a16="http://schemas.microsoft.com/office/drawing/2014/main" id="{E63F9CD5-C9E2-28B6-4E5C-EE9430DCB888}"/>
+              </a:ext>
+            </a:extLst>
+          </p:cNvPr>
+          <p:cNvSpPr>
+            <a:spLocks noGrp="1"/>
+          </p:cNvSpPr>
+          <p:nvPr>
+            <p:ph type="sldNum" idx="12"/>
+          </p:nvPr>
+        </p:nvSpPr>
+        <p:spPr/>
+        <p:txBody>
+          <a:bodyPr/>
+          <a:lstStyle/>
+          <a:p>
+            <a:fld id="{71CC62B1-FA1F-4849-B719-012F8D8A46B3}" type="slidenum">
+              <a:rPr lang="en-GB" smtClean="0"/>
+              <a:t>9</a:t>
+            </a:fld>
+            <a:endParaRPr lang="en-GB"/>
+          </a:p>
+        </p:txBody>
+      </p:sp>
+      <p:sp>
+        <p:nvSpPr>
           <p:cNvPr id="3" name="Espace réservé du contenu 2">
             <a:extLst>
               <a:ext uri="{FF2B5EF4-FFF2-40B4-BE49-F238E27FC236}">
@@ -10623,24 +11159,29 @@
             <a:spLocks noGrp="1"/>
           </p:cNvSpPr>
           <p:nvPr>
-            <p:ph idx="1"/>
+            <p:ph sz="half" idx="2"/>
           </p:nvPr>
         </p:nvSpPr>
-        <p:spPr/>
+        <p:spPr>
+          <a:xfrm>
+            <a:off x="970722" y="1302871"/>
+            <a:ext cx="10515597" cy="4793256"/>
+          </a:xfrm>
+        </p:spPr>
         <p:txBody>
           <a:bodyPr/>
           <a:lstStyle/>
           <a:p>
             <a:r>
-              <a:rPr lang="en-GB" b="1" dirty="0"/>
+              <a:rPr lang="en-GB" sz="2800" b="1" dirty="0"/>
               <a:t>Canova-Hansen test </a:t>
             </a:r>
             <a:r>
-              <a:rPr lang="en-GB" dirty="0"/>
+              <a:rPr lang="en-GB" sz="2800" dirty="0"/>
               <a:t>on trading days variables </a:t>
             </a:r>
             <a:r>
-              <a:rPr lang="en-GB" b="1" dirty="0"/>
+              <a:rPr lang="en-GB" sz="2800" b="1" dirty="0"/>
               <a:t>(R only)</a:t>
             </a:r>
           </a:p>
@@ -10663,7 +11204,7 @@
               <a:defRPr/>
             </a:pPr>
             <a:r>
-              <a:rPr kumimoji="0" lang="en-GB" sz="2400" b="0" i="0" u="none" strike="noStrike" kern="1200" cap="none" spc="0" normalizeH="0" baseline="0" noProof="0" dirty="0">
+              <a:rPr kumimoji="0" lang="en-GB" sz="3200" b="0" i="0" u="none" strike="noStrike" kern="1200" cap="none" spc="0" normalizeH="0" baseline="0" noProof="0" dirty="0">
                 <a:ln>
                   <a:noFill/>
                 </a:ln>
@@ -10698,7 +11239,7 @@
               <a:tabLst/>
               <a:defRPr/>
             </a:pPr>
-            <a:endParaRPr lang="en-GB" dirty="0">
+            <a:endParaRPr lang="en-GB" sz="2400" dirty="0">
               <a:solidFill>
                 <a:srgbClr val="000000"/>
               </a:solidFill>
@@ -10713,7 +11254,7 @@
               <a:defRPr/>
             </a:pPr>
             <a:r>
-              <a:rPr kumimoji="0" lang="en-GB" b="0" i="0" u="none" strike="noStrike" kern="1200" cap="none" spc="0" normalizeH="0" baseline="0" noProof="0" dirty="0">
+              <a:rPr kumimoji="0" lang="en-GB" sz="2800" b="0" i="0" u="none" strike="noStrike" kern="1200" cap="none" spc="0" normalizeH="0" baseline="0" noProof="0" dirty="0">
                 <a:ln>
                   <a:noFill/>
                 </a:ln>
@@ -10727,10 +11268,10 @@
                 <a:ea typeface="Calibri" panose="020F0502020204030204" pitchFamily="34" charset="0"/>
                 <a:cs typeface="Calibri" panose="020F0502020204030204" pitchFamily="34" charset="0"/>
               </a:rPr>
-              <a:t>Likelihood test </a:t>
+              <a:t>Likelihood ratio test </a:t>
             </a:r>
             <a:r>
-              <a:rPr lang="en-GB" dirty="0">
+              <a:rPr lang="en-GB" sz="2800" dirty="0">
                 <a:solidFill>
                   <a:srgbClr val="000000"/>
                 </a:solidFill>
@@ -10741,7 +11282,7 @@
               <a:t>on time varying trading days coefficients </a:t>
             </a:r>
             <a:r>
-              <a:rPr lang="en-GB" b="1" dirty="0"/>
+              <a:rPr lang="en-GB" sz="2800" b="1" dirty="0"/>
               <a:t>(R only)</a:t>
             </a:r>
           </a:p>
@@ -10750,7 +11291,7 @@
               <a:defRPr/>
             </a:pPr>
             <a:r>
-              <a:rPr lang="en-GB" dirty="0">
+              <a:rPr lang="en-GB" sz="2400" dirty="0">
                 <a:solidFill>
                   <a:srgbClr val="000000"/>
                 </a:solidFill>
@@ -10801,10 +11342,15 @@
             <a:spLocks noGrp="1"/>
           </p:cNvSpPr>
           <p:nvPr>
-            <p:ph type="ftr" sz="quarter" idx="11"/>
+            <p:ph type="ftr" sz="quarter" idx="4294967295"/>
           </p:nvPr>
         </p:nvSpPr>
-        <p:spPr/>
+        <p:spPr>
+          <a:xfrm>
+            <a:off x="0" y="0"/>
+            <a:ext cx="0" cy="0"/>
+          </a:xfrm>
+        </p:spPr>
         <p:txBody>
           <a:bodyPr/>
           <a:lstStyle/>

--- a/1.6 Seasonality tests.pptx
+++ b/1.6 Seasonality tests.pptx
@@ -277,7 +277,7 @@
       <p15:notesGuideLst xmlns:p15="http://schemas.microsoft.com/office/powerpoint/2012/main"/>
     </p:ext>
     <p:ext uri="http://customooxmlschemas.google.com/">
-      <go:slidesCustomData xmlns="" xmlns:go="http://customooxmlschemas.google.com/" xmlns:ahyp="http://schemas.microsoft.com/office/drawing/2018/hyperlinkcolor" xmlns:p15="http://schemas.microsoft.com/office/powerpoint/2012/main" xmlns:p14="http://schemas.microsoft.com/office/powerpoint/2010/main" xmlns:com="http://schemas.openxmlformats.org/drawingml/2006/compatibility" xmlns:pvml="urn:schemas-microsoft-com:office:powerpoint" xmlns:v="urn:schemas-microsoft-com:vml" xmlns:o="urn:schemas-microsoft-com:office:office" xmlns:dgm="http://schemas.openxmlformats.org/drawingml/2006/diagram" xmlns:c="http://schemas.openxmlformats.org/drawingml/2006/chart" xmlns:mv="urn:schemas-microsoft-com:mac:vml" xmlns:mc="http://schemas.openxmlformats.org/markup-compatibility/2006" r:id="rId59" roundtripDataSignature="AMtx7mh3YP3xexYcFoahXa2ehi0H5V4Zaw=="/>
+      <go:slidesCustomData xmlns:mc="http://schemas.openxmlformats.org/markup-compatibility/2006" xmlns:mv="urn:schemas-microsoft-com:mac:vml" xmlns:c="http://schemas.openxmlformats.org/drawingml/2006/chart" xmlns:dgm="http://schemas.openxmlformats.org/drawingml/2006/diagram" xmlns:o="urn:schemas-microsoft-com:office:office" xmlns:v="urn:schemas-microsoft-com:vml" xmlns:pvml="urn:schemas-microsoft-com:office:powerpoint" xmlns:com="http://schemas.openxmlformats.org/drawingml/2006/compatibility" xmlns:p14="http://schemas.microsoft.com/office/powerpoint/2010/main" xmlns:p15="http://schemas.microsoft.com/office/powerpoint/2012/main" xmlns:ahyp="http://schemas.microsoft.com/office/drawing/2018/hyperlinkcolor" xmlns:go="http://customooxmlschemas.google.com/" xmlns="" r:id="rId59" roundtripDataSignature="AMtx7mh3YP3xexYcFoahXa2ehi0H5V4Zaw=="/>
     </p:ext>
   </p:extLst>
 </p:presentation>
@@ -7451,8 +7451,8 @@
           </a:p>
         </p:txBody>
       </p:sp>
-      <mc:AlternateContent xmlns:mc="http://schemas.openxmlformats.org/markup-compatibility/2006">
-        <mc:Choice xmlns:a14="http://schemas.microsoft.com/office/drawing/2010/main" Requires="a14">
+      <mc:AlternateContent xmlns:mc="http://schemas.openxmlformats.org/markup-compatibility/2006" xmlns:a14="http://schemas.microsoft.com/office/drawing/2010/main">
+        <mc:Choice Requires="a14">
           <p:sp>
             <p:nvSpPr>
               <p:cNvPr id="3" name="Content Placeholder 2">
@@ -8177,7 +8177,7 @@
             </p:txBody>
           </p:sp>
         </mc:Choice>
-        <mc:Fallback>
+        <mc:Fallback xmlns="">
           <p:sp>
             <p:nvSpPr>
               <p:cNvPr id="3" name="Content Placeholder 2">
@@ -12247,6 +12247,17 @@
 </file>
 
 <file path=customXml/item1.xml><?xml version="1.0" encoding="utf-8"?>
+<p:properties xmlns:p="http://schemas.microsoft.com/office/2006/metadata/properties" xmlns:xsi="http://www.w3.org/2001/XMLSchema-instance" xmlns:pc="http://schemas.microsoft.com/office/infopath/2007/PartnerControls">
+  <documentManagement>
+    <lcf76f155ced4ddcb4097134ff3c332f xmlns="0e422b70-e85d-4377-8ee0-b6227433d381">
+      <Terms xmlns="http://schemas.microsoft.com/office/infopath/2007/PartnerControls"/>
+    </lcf76f155ced4ddcb4097134ff3c332f>
+    <TaxCatchAll xmlns="199f642e-5af9-486c-ac06-f366742ef41a"/>
+  </documentManagement>
+</p:properties>
+</file>
+
+<file path=customXml/item2.xml><?xml version="1.0" encoding="utf-8"?>
 <ct:contentTypeSchema xmlns:ct="http://schemas.microsoft.com/office/2006/metadata/contentType" xmlns:ma="http://schemas.microsoft.com/office/2006/metadata/properties/metaAttributes" ct:_="" ma:_="" ma:contentTypeName="Document" ma:contentTypeID="0x010100E6AA5C57F8EADE4E9CD6BB064C0C3195" ma:contentTypeVersion="16" ma:contentTypeDescription="Create a new document." ma:contentTypeScope="" ma:versionID="bb51c19a58f458ddcddd050a07659236">
   <xsd:schema xmlns:xsd="http://www.w3.org/2001/XMLSchema" xmlns:xs="http://www.w3.org/2001/XMLSchema" xmlns:p="http://schemas.microsoft.com/office/2006/metadata/properties" xmlns:ns2="0e422b70-e85d-4377-8ee0-b6227433d381" xmlns:ns3="199f642e-5af9-486c-ac06-f366742ef41a" targetNamespace="http://schemas.microsoft.com/office/2006/metadata/properties" ma:root="true" ma:fieldsID="0ee7a3bac0352a48a43420936abd968a" ns2:_="" ns3:_="">
     <xsd:import namespace="0e422b70-e85d-4377-8ee0-b6227433d381"/>
@@ -12487,17 +12498,6 @@
 </ct:contentTypeSchema>
 </file>
 
-<file path=customXml/item2.xml><?xml version="1.0" encoding="utf-8"?>
-<p:properties xmlns:p="http://schemas.microsoft.com/office/2006/metadata/properties" xmlns:xsi="http://www.w3.org/2001/XMLSchema-instance" xmlns:pc="http://schemas.microsoft.com/office/infopath/2007/PartnerControls">
-  <documentManagement>
-    <lcf76f155ced4ddcb4097134ff3c332f xmlns="0e422b70-e85d-4377-8ee0-b6227433d381">
-      <Terms xmlns="http://schemas.microsoft.com/office/infopath/2007/PartnerControls"/>
-    </lcf76f155ced4ddcb4097134ff3c332f>
-    <TaxCatchAll xmlns="199f642e-5af9-486c-ac06-f366742ef41a"/>
-  </documentManagement>
-</p:properties>
-</file>
-
 <file path=customXml/item3.xml><?xml version="1.0" encoding="utf-8"?>
 <?mso-contentType ?>
 <FormTemplates xmlns="http://schemas.microsoft.com/sharepoint/v3/contenttype/forms">
@@ -12508,6 +12508,23 @@
 </file>
 
 <file path=customXml/itemProps1.xml><?xml version="1.0" encoding="utf-8"?>
+<ds:datastoreItem xmlns:ds="http://schemas.openxmlformats.org/officeDocument/2006/customXml" ds:itemID="{2D6C293B-B8B4-4284-A17E-9F9E4C32B25A}">
+  <ds:schemaRefs>
+    <ds:schemaRef ds:uri="http://schemas.microsoft.com/office/2006/documentManagement/types"/>
+    <ds:schemaRef ds:uri="http://purl.org/dc/elements/1.1/"/>
+    <ds:schemaRef ds:uri="http://purl.org/dc/terms/"/>
+    <ds:schemaRef ds:uri="http://purl.org/dc/dcmitype/"/>
+    <ds:schemaRef ds:uri="0e422b70-e85d-4377-8ee0-b6227433d381"/>
+    <ds:schemaRef ds:uri="http://schemas.microsoft.com/office/infopath/2007/PartnerControls"/>
+    <ds:schemaRef ds:uri="199f642e-5af9-486c-ac06-f366742ef41a"/>
+    <ds:schemaRef ds:uri="http://schemas.openxmlformats.org/package/2006/metadata/core-properties"/>
+    <ds:schemaRef ds:uri="http://schemas.microsoft.com/office/2006/metadata/properties"/>
+    <ds:schemaRef ds:uri="http://www.w3.org/XML/1998/namespace"/>
+  </ds:schemaRefs>
+</ds:datastoreItem>
+</file>
+
+<file path=customXml/itemProps2.xml><?xml version="1.0" encoding="utf-8"?>
 <ds:datastoreItem xmlns:ds="http://schemas.openxmlformats.org/officeDocument/2006/customXml" ds:itemID="{04B464EA-1576-49DD-9675-1E3399D4D196}">
   <ds:schemaRefs>
     <ds:schemaRef ds:uri="http://schemas.microsoft.com/office/2006/metadata/contentType"/>
@@ -12526,23 +12543,6 @@
 </ds:datastoreItem>
 </file>
 
-<file path=customXml/itemProps2.xml><?xml version="1.0" encoding="utf-8"?>
-<ds:datastoreItem xmlns:ds="http://schemas.openxmlformats.org/officeDocument/2006/customXml" ds:itemID="{2D6C293B-B8B4-4284-A17E-9F9E4C32B25A}">
-  <ds:schemaRefs>
-    <ds:schemaRef ds:uri="http://schemas.microsoft.com/office/2006/documentManagement/types"/>
-    <ds:schemaRef ds:uri="http://purl.org/dc/elements/1.1/"/>
-    <ds:schemaRef ds:uri="http://purl.org/dc/terms/"/>
-    <ds:schemaRef ds:uri="http://purl.org/dc/dcmitype/"/>
-    <ds:schemaRef ds:uri="0e422b70-e85d-4377-8ee0-b6227433d381"/>
-    <ds:schemaRef ds:uri="http://schemas.microsoft.com/office/infopath/2007/PartnerControls"/>
-    <ds:schemaRef ds:uri="199f642e-5af9-486c-ac06-f366742ef41a"/>
-    <ds:schemaRef ds:uri="http://schemas.openxmlformats.org/package/2006/metadata/core-properties"/>
-    <ds:schemaRef ds:uri="http://schemas.microsoft.com/office/2006/metadata/properties"/>
-    <ds:schemaRef ds:uri="http://www.w3.org/XML/1998/namespace"/>
-  </ds:schemaRefs>
-</ds:datastoreItem>
-</file>
-
 <file path=customXml/itemProps3.xml><?xml version="1.0" encoding="utf-8"?>
 <ds:datastoreItem xmlns:ds="http://schemas.openxmlformats.org/officeDocument/2006/customXml" ds:itemID="{67DD9E9F-9EEB-4105-B29B-819486C2855A}">
   <ds:schemaRefs>

--- a/1.6 Seasonality tests.pptx
+++ b/1.6 Seasonality tests.pptx
@@ -277,7 +277,7 @@
       <p15:notesGuideLst xmlns:p15="http://schemas.microsoft.com/office/powerpoint/2012/main"/>
     </p:ext>
     <p:ext uri="http://customooxmlschemas.google.com/">
-      <go:slidesCustomData xmlns:mc="http://schemas.openxmlformats.org/markup-compatibility/2006" xmlns:mv="urn:schemas-microsoft-com:mac:vml" xmlns:c="http://schemas.openxmlformats.org/drawingml/2006/chart" xmlns:dgm="http://schemas.openxmlformats.org/drawingml/2006/diagram" xmlns:o="urn:schemas-microsoft-com:office:office" xmlns:v="urn:schemas-microsoft-com:vml" xmlns:pvml="urn:schemas-microsoft-com:office:powerpoint" xmlns:com="http://schemas.openxmlformats.org/drawingml/2006/compatibility" xmlns:p14="http://schemas.microsoft.com/office/powerpoint/2010/main" xmlns:p15="http://schemas.microsoft.com/office/powerpoint/2012/main" xmlns:ahyp="http://schemas.microsoft.com/office/drawing/2018/hyperlinkcolor" xmlns:go="http://customooxmlschemas.google.com/" xmlns="" r:id="rId59" roundtripDataSignature="AMtx7mh3YP3xexYcFoahXa2ehi0H5V4Zaw=="/>
+      <go:slidesCustomData xmlns="" xmlns:go="http://customooxmlschemas.google.com/" xmlns:ahyp="http://schemas.microsoft.com/office/drawing/2018/hyperlinkcolor" xmlns:p15="http://schemas.microsoft.com/office/powerpoint/2012/main" xmlns:p14="http://schemas.microsoft.com/office/powerpoint/2010/main" xmlns:com="http://schemas.openxmlformats.org/drawingml/2006/compatibility" xmlns:pvml="urn:schemas-microsoft-com:office:powerpoint" xmlns:v="urn:schemas-microsoft-com:vml" xmlns:o="urn:schemas-microsoft-com:office:office" xmlns:dgm="http://schemas.openxmlformats.org/drawingml/2006/diagram" xmlns:c="http://schemas.openxmlformats.org/drawingml/2006/chart" xmlns:mv="urn:schemas-microsoft-com:mac:vml" xmlns:mc="http://schemas.openxmlformats.org/markup-compatibility/2006" r:id="rId59" roundtripDataSignature="AMtx7mh3YP3xexYcFoahXa2ehi0H5V4Zaw=="/>
     </p:ext>
   </p:extLst>
 </p:presentation>
@@ -385,7 +385,7 @@
           <a:p>
             <a:fld id="{0CBFB8CE-488C-4A7E-87F2-3AF6127C51C1}" type="datetimeFigureOut">
               <a:rPr lang="en-IE" smtClean="0"/>
-              <a:t>28/09/2026</a:t>
+              <a:t>29/09/2026</a:t>
             </a:fld>
             <a:endParaRPr lang="en-IE"/>
           </a:p>
@@ -6315,13 +6315,13 @@
           <a:lstStyle/>
           <a:p>
             <a:r>
-              <a:rPr lang="en-IE" dirty="0"/>
+              <a:rPr lang="en-GB" noProof="0" dirty="0"/>
               <a:t>ESTP Training</a:t>
             </a:r>
           </a:p>
           <a:p>
             <a:r>
-              <a:rPr lang="en-IE"/>
+              <a:rPr lang="en-GB" noProof="0" dirty="0"/>
               <a:t>05-07 October 2026</a:t>
             </a:r>
           </a:p>
@@ -6349,10 +6349,9 @@
           <a:lstStyle/>
           <a:p>
             <a:r>
-              <a:rPr lang="en-GB" dirty="0"/>
+              <a:rPr lang="en-GB" noProof="0" dirty="0"/>
               <a:t>Seasonality and trading days tests in JD+</a:t>
             </a:r>
-            <a:endParaRPr lang="en-IE" dirty="0"/>
           </a:p>
         </p:txBody>
       </p:sp>
@@ -6377,7 +6376,7 @@
           <a:bodyPr/>
           <a:lstStyle/>
           <a:p>
-            <a:endParaRPr lang="en-IE"/>
+            <a:endParaRPr lang="en-GB" noProof="0" dirty="0"/>
           </a:p>
         </p:txBody>
       </p:sp>
@@ -6433,7 +6432,7 @@
           <a:lstStyle/>
           <a:p>
             <a:r>
-              <a:rPr lang="en-GB" dirty="0"/>
+              <a:rPr lang="en-GB" noProof="0" dirty="0"/>
               <a:t>Seasonality tests in R</a:t>
             </a:r>
           </a:p>
@@ -6461,10 +6460,10 @@
           <a:lstStyle/>
           <a:p>
             <a:fld id="{71CC62B1-FA1F-4849-B719-012F8D8A46B3}" type="slidenum">
-              <a:rPr lang="en-GB" smtClean="0"/>
+              <a:rPr lang="en-GB" noProof="0" smtClean="0"/>
               <a:t>10</a:t>
             </a:fld>
-            <a:endParaRPr lang="en-GB"/>
+            <a:endParaRPr lang="en-GB" noProof="0" dirty="0"/>
           </a:p>
         </p:txBody>
       </p:sp>
@@ -6495,7 +6494,7 @@
           <a:lstStyle/>
           <a:p>
             <a:r>
-              <a:rPr lang="en-GB"/>
+              <a:rPr lang="en-GB" noProof="0" dirty="0"/>
               <a:t>Seasonality and trading days tests</a:t>
             </a:r>
           </a:p>
@@ -6623,16 +6622,8 @@
           <a:lstStyle/>
           <a:p>
             <a:r>
-              <a:rPr lang="fr-BE" dirty="0"/>
-              <a:t>Trading </a:t>
-            </a:r>
-            <a:r>
-              <a:rPr lang="fr-BE" dirty="0" err="1"/>
-              <a:t>days</a:t>
-            </a:r>
-            <a:r>
-              <a:rPr lang="fr-BE" dirty="0"/>
-              <a:t> tests in R</a:t>
+              <a:rPr lang="en-GB" noProof="0" dirty="0"/>
+              <a:t>Trading days tests in R</a:t>
             </a:r>
           </a:p>
         </p:txBody>
@@ -6659,10 +6650,10 @@
           <a:lstStyle/>
           <a:p>
             <a:fld id="{71CC62B1-FA1F-4849-B719-012F8D8A46B3}" type="slidenum">
-              <a:rPr lang="en-GB" smtClean="0"/>
+              <a:rPr lang="en-GB" noProof="0" smtClean="0"/>
               <a:t>11</a:t>
             </a:fld>
-            <a:endParaRPr lang="en-GB"/>
+            <a:endParaRPr lang="en-GB" noProof="0" dirty="0"/>
           </a:p>
         </p:txBody>
       </p:sp>
@@ -6731,7 +6722,7 @@
           <a:lstStyle/>
           <a:p>
             <a:r>
-              <a:rPr lang="en-GB"/>
+              <a:rPr lang="en-GB" noProof="0" dirty="0"/>
               <a:t>Seasonality and trading days tests</a:t>
             </a:r>
           </a:p>
@@ -6823,7 +6814,7 @@
           <a:bodyPr/>
           <a:lstStyle/>
           <a:p>
-            <a:endParaRPr lang="en-IE"/>
+            <a:endParaRPr lang="en-GB" noProof="0" dirty="0"/>
           </a:p>
         </p:txBody>
       </p:sp>
@@ -6848,7 +6839,7 @@
           <a:bodyPr/>
           <a:lstStyle/>
           <a:p>
-            <a:endParaRPr lang="en-IE"/>
+            <a:endParaRPr lang="en-GB" noProof="0" dirty="0"/>
           </a:p>
         </p:txBody>
       </p:sp>
@@ -6874,11 +6865,11 @@
           <a:lstStyle/>
           <a:p>
             <a:fld id="{00000000-1234-1234-1234-123412341234}" type="slidenum">
-              <a:rPr lang="en-GB" smtClean="0"/>
+              <a:rPr lang="en-GB" noProof="0" smtClean="0"/>
               <a:pPr/>
               <a:t>12</a:t>
             </a:fld>
-            <a:endParaRPr lang="en-GB"/>
+            <a:endParaRPr lang="en-GB" noProof="0" dirty="0"/>
           </a:p>
         </p:txBody>
       </p:sp>
@@ -6934,7 +6925,7 @@
           <a:lstStyle/>
           <a:p>
             <a:r>
-              <a:rPr lang="en-GB" dirty="0"/>
+              <a:rPr lang="en-GB" noProof="0" dirty="0"/>
               <a:t>Overview</a:t>
             </a:r>
           </a:p>
@@ -6961,7 +6952,7 @@
           <a:bodyPr/>
           <a:lstStyle/>
           <a:p>
-            <a:endParaRPr lang="en-GB"/>
+            <a:endParaRPr lang="en-GB" noProof="0" dirty="0"/>
           </a:p>
         </p:txBody>
       </p:sp>
@@ -6992,7 +6983,7 @@
           <a:lstStyle/>
           <a:p>
             <a:r>
-              <a:rPr lang="en-GB"/>
+              <a:rPr lang="en-GB" noProof="0" dirty="0"/>
               <a:t>Seasonality and trading days tests</a:t>
             </a:r>
           </a:p>
@@ -7143,11 +7134,11 @@
           <a:lstStyle/>
           <a:p>
             <a:fld id="{00000000-1234-1234-1234-123412341234}" type="slidenum">
-              <a:rPr lang="en-GB" smtClean="0"/>
+              <a:rPr lang="en-GB" noProof="0" smtClean="0"/>
               <a:pPr/>
               <a:t>2</a:t>
             </a:fld>
-            <a:endParaRPr lang="en-GB"/>
+            <a:endParaRPr lang="en-GB" noProof="0" dirty="0"/>
           </a:p>
         </p:txBody>
       </p:sp>
@@ -7203,7 +7194,7 @@
           <a:lstStyle/>
           <a:p>
             <a:r>
-              <a:rPr lang="en-GB" dirty="0"/>
+              <a:rPr lang="en-GB" noProof="0" dirty="0"/>
               <a:t>Seasonality tests</a:t>
             </a:r>
           </a:p>
@@ -7236,60 +7227,60 @@
           <a:lstStyle/>
           <a:p>
             <a:r>
-              <a:rPr lang="en-GB" sz="2800" dirty="0"/>
+              <a:rPr lang="en-GB" sz="2800" noProof="0" dirty="0"/>
               <a:t>Non-parametric tests</a:t>
             </a:r>
           </a:p>
           <a:p>
             <a:pPr lvl="1"/>
             <a:r>
-              <a:rPr lang="en-GB" sz="2400" dirty="0"/>
+              <a:rPr lang="en-GB" sz="2400" noProof="0" dirty="0"/>
               <a:t>Applied on series without trend (for instance (log) differenced series) </a:t>
             </a:r>
           </a:p>
           <a:p>
             <a:pPr lvl="1"/>
             <a:r>
-              <a:rPr lang="en-GB" sz="2400" b="1" dirty="0"/>
+              <a:rPr lang="en-GB" sz="2400" b="1" noProof="0" dirty="0"/>
               <a:t>Friedman</a:t>
             </a:r>
           </a:p>
           <a:p>
             <a:pPr lvl="2"/>
             <a:r>
-              <a:rPr lang="en-GB" sz="2000" dirty="0"/>
+              <a:rPr lang="en-GB" sz="2000" noProof="0" dirty="0"/>
               <a:t>ANOVA-type. The test uses the rankings of the observations within each year. It does not require distributional assumptions. </a:t>
             </a:r>
           </a:p>
           <a:p>
             <a:pPr lvl="2"/>
             <a:r>
-              <a:rPr lang="en-GB" sz="2000" dirty="0"/>
+              <a:rPr lang="en-GB" sz="2000" noProof="0" dirty="0"/>
               <a:t>H0: all periods can be treated equally (= no seasonality), H1: series is seasonal</a:t>
             </a:r>
           </a:p>
           <a:p>
             <a:pPr lvl="1"/>
             <a:r>
-              <a:rPr lang="en-GB" sz="2400" b="1" dirty="0" err="1"/>
+              <a:rPr lang="en-GB" sz="2400" b="1" noProof="0" dirty="0" err="1"/>
               <a:t>Kruskall</a:t>
             </a:r>
             <a:r>
-              <a:rPr lang="en-GB" sz="2400" b="1" dirty="0"/>
+              <a:rPr lang="en-GB" sz="2400" b="1" noProof="0" dirty="0"/>
               <a:t>-Wallis</a:t>
             </a:r>
           </a:p>
           <a:p>
             <a:pPr lvl="2"/>
             <a:r>
-              <a:rPr lang="en-GB" sz="2000" dirty="0"/>
+              <a:rPr lang="en-GB" sz="2000" noProof="0" dirty="0"/>
               <a:t>The test uses the rankings of all the observations. It does not require distributional assumptions.</a:t>
             </a:r>
           </a:p>
           <a:p>
             <a:pPr lvl="2"/>
             <a:r>
-              <a:rPr lang="en-GB" sz="2000" dirty="0"/>
+              <a:rPr lang="en-GB" sz="2000" noProof="0" dirty="0"/>
               <a:t>H0: All periods have the same mean(average ranking), H1: series is seasonal</a:t>
             </a:r>
           </a:p>
@@ -7297,7 +7288,7 @@
             <a:pPr marL="457200" lvl="1" indent="0">
               <a:buNone/>
             </a:pPr>
-            <a:endParaRPr lang="en-GB" dirty="0"/>
+            <a:endParaRPr lang="en-GB" noProof="0" dirty="0"/>
           </a:p>
         </p:txBody>
       </p:sp>
@@ -7328,7 +7319,7 @@
           <a:lstStyle/>
           <a:p>
             <a:r>
-              <a:rPr lang="en-GB"/>
+              <a:rPr lang="en-GB" noProof="0" dirty="0"/>
               <a:t>Seasonality and trading days tests</a:t>
             </a:r>
           </a:p>
@@ -7356,11 +7347,11 @@
           <a:lstStyle/>
           <a:p>
             <a:fld id="{00000000-1234-1234-1234-123412341234}" type="slidenum">
-              <a:rPr lang="en-GB" smtClean="0"/>
+              <a:rPr lang="en-GB" noProof="0" smtClean="0"/>
               <a:pPr/>
               <a:t>3</a:t>
             </a:fld>
-            <a:endParaRPr lang="en-GB"/>
+            <a:endParaRPr lang="en-GB" noProof="0" dirty="0"/>
           </a:p>
         </p:txBody>
       </p:sp>
@@ -7416,7 +7407,7 @@
           <a:lstStyle/>
           <a:p>
             <a:r>
-              <a:rPr lang="en-GB" dirty="0"/>
+              <a:rPr lang="en-GB" noProof="0" dirty="0"/>
               <a:t>Seasonality tests (cont.)</a:t>
             </a:r>
           </a:p>
@@ -7444,15 +7435,15 @@
           <a:lstStyle/>
           <a:p>
             <a:fld id="{71CC62B1-FA1F-4849-B719-012F8D8A46B3}" type="slidenum">
-              <a:rPr lang="en-GB" smtClean="0"/>
+              <a:rPr lang="en-GB" noProof="0" smtClean="0"/>
               <a:t>4</a:t>
             </a:fld>
-            <a:endParaRPr lang="en-GB"/>
+            <a:endParaRPr lang="en-GB" noProof="0" dirty="0"/>
           </a:p>
         </p:txBody>
       </p:sp>
-      <mc:AlternateContent xmlns:mc="http://schemas.openxmlformats.org/markup-compatibility/2006" xmlns:a14="http://schemas.microsoft.com/office/drawing/2010/main">
-        <mc:Choice Requires="a14">
+      <mc:AlternateContent xmlns:mc="http://schemas.openxmlformats.org/markup-compatibility/2006">
+        <mc:Choice xmlns:a14="http://schemas.microsoft.com/office/drawing/2010/main" Requires="a14">
           <p:sp>
             <p:nvSpPr>
               <p:cNvPr id="3" name="Content Placeholder 2">
@@ -7482,57 +7473,49 @@
               <a:lstStyle/>
               <a:p>
                 <a:r>
-                  <a:rPr lang="en-GB" b="1" dirty="0"/>
+                  <a:rPr lang="en-GB" b="1" noProof="0" dirty="0"/>
                   <a:t>QS test, </a:t>
                 </a:r>
                 <a:r>
-                  <a:rPr lang="en-GB" dirty="0"/>
+                  <a:rPr lang="en-GB" noProof="0" dirty="0"/>
                   <a:t>applied on (log) differenced series, corrected for mean effect</a:t>
                 </a:r>
               </a:p>
               <a:p>
-                <a:endParaRPr lang="en-GB" b="1" dirty="0"/>
+                <a:endParaRPr lang="en-GB" b="1" noProof="0" dirty="0"/>
               </a:p>
               <a:p>
                 <a:pPr lvl="1"/>
                 <a:r>
-                  <a:rPr lang="en-GB" dirty="0"/>
-                  <a:t>Modified </a:t>
-                </a:r>
-                <a:r>
-                  <a:rPr lang="en-GB" dirty="0" err="1"/>
-                  <a:t>Ljung</a:t>
-                </a:r>
-                <a:r>
-                  <a:rPr lang="en-GB" dirty="0"/>
-                  <a:t>-box on seasonal auto-correlations</a:t>
+                  <a:rPr lang="en-GB" noProof="0" dirty="0"/>
+                  <a:t>Modified Ljung-box on seasonal auto-correlations</a:t>
                 </a:r>
               </a:p>
               <a:p>
                 <a:pPr lvl="1"/>
                 <a:r>
-                  <a:rPr lang="en-GB" dirty="0"/>
+                  <a:rPr lang="en-GB" noProof="0" dirty="0"/>
                   <a:t>H0: No correlation (no seasonality), H1: seasonality</a:t>
                 </a:r>
               </a:p>
               <a:p>
                 <a:pPr lvl="1"/>
-                <a:endParaRPr lang="en-GB" dirty="0"/>
+                <a:endParaRPr lang="en-GB" noProof="0" dirty="0"/>
               </a:p>
               <a:p>
                 <a:r>
-                  <a:rPr lang="en-GB" b="1" dirty="0"/>
+                  <a:rPr lang="en-GB" b="1" noProof="0" dirty="0"/>
                   <a:t>F test, </a:t>
                 </a:r>
                 <a:r>
-                  <a:rPr lang="en-GB" dirty="0"/>
+                  <a:rPr lang="en-GB" noProof="0" dirty="0"/>
                   <a:t>applied on (log) series</a:t>
                 </a:r>
               </a:p>
               <a:p>
                 <a:pPr lvl="1"/>
                 <a:r>
-                  <a:rPr lang="en-GB" dirty="0"/>
+                  <a:rPr lang="en-GB" noProof="0" dirty="0"/>
                   <a:t>Regression test with seasonal dummies (</a:t>
                 </a:r>
                 <a14:m>
@@ -7540,14 +7523,14 @@
                     <m:sSub>
                       <m:sSubPr>
                         <m:ctrlPr>
-                          <a:rPr lang="fr-BE" b="0" i="1" smtClean="0">
+                          <a:rPr lang="en-GB" b="0" i="1" noProof="0" smtClean="0">
                             <a:latin typeface="Cambria Math" panose="02040503050406030204" pitchFamily="18" charset="0"/>
                           </a:rPr>
                         </m:ctrlPr>
                       </m:sSubPr>
                       <m:e>
                         <m:r>
-                          <a:rPr lang="fr-BE" b="0" i="1" smtClean="0">
+                          <a:rPr lang="en-GB" b="0" i="1" noProof="0" smtClean="0">
                             <a:latin typeface="Cambria Math" panose="02040503050406030204" pitchFamily="18" charset="0"/>
                           </a:rPr>
                           <m:t>𝐷</m:t>
@@ -7555,19 +7538,19 @@
                       </m:e>
                       <m:sub>
                         <m:r>
-                          <a:rPr lang="fr-BE" b="0" i="1" smtClean="0">
+                          <a:rPr lang="en-GB" b="0" i="1" noProof="0" smtClean="0">
                             <a:latin typeface="Cambria Math" panose="02040503050406030204" pitchFamily="18" charset="0"/>
                           </a:rPr>
                           <m:t>𝑠</m:t>
                         </m:r>
                         <m:r>
-                          <a:rPr lang="fr-BE" b="0" i="1" smtClean="0">
+                          <a:rPr lang="en-GB" b="0" i="1" noProof="0" smtClean="0">
                             <a:latin typeface="Cambria Math" panose="02040503050406030204" pitchFamily="18" charset="0"/>
                           </a:rPr>
                           <m:t>,</m:t>
                         </m:r>
                         <m:r>
-                          <a:rPr lang="fr-BE" b="0" i="1" smtClean="0">
+                          <a:rPr lang="en-GB" b="0" i="1" noProof="0" smtClean="0">
                             <a:latin typeface="Cambria Math" panose="02040503050406030204" pitchFamily="18" charset="0"/>
                           </a:rPr>
                           <m:t>𝑡</m:t>
@@ -7577,14 +7560,14 @@
                   </m:oMath>
                 </a14:m>
                 <a:r>
-                  <a:rPr lang="en-GB" dirty="0"/>
+                  <a:rPr lang="en-GB" noProof="0" dirty="0"/>
                   <a:t>) and different models</a:t>
                 </a:r>
               </a:p>
               <a:p>
                 <a:pPr lvl="2"/>
                 <a:r>
-                  <a:rPr lang="en-GB" dirty="0"/>
+                  <a:rPr lang="en-GB" noProof="0" dirty="0"/>
                   <a:t> </a:t>
                 </a:r>
                 <a14:m>
@@ -7592,14 +7575,14 @@
                     <m:sSub>
                       <m:sSubPr>
                         <m:ctrlPr>
-                          <a:rPr lang="fr-BE" b="0" i="1" smtClean="0">
+                          <a:rPr lang="en-GB" b="0" i="1" noProof="0" smtClean="0">
                             <a:latin typeface="Cambria Math" panose="02040503050406030204" pitchFamily="18" charset="0"/>
                           </a:rPr>
                         </m:ctrlPr>
                       </m:sSubPr>
                       <m:e>
                         <m:r>
-                          <a:rPr lang="fr-BE" b="0" i="1" smtClean="0">
+                          <a:rPr lang="en-GB" b="0" i="1" noProof="0" smtClean="0">
                             <a:latin typeface="Cambria Math" panose="02040503050406030204" pitchFamily="18" charset="0"/>
                           </a:rPr>
                           <m:t>𝑦</m:t>
@@ -7607,7 +7590,7 @@
                       </m:e>
                       <m:sub>
                         <m:r>
-                          <a:rPr lang="fr-BE" b="0" i="1" smtClean="0">
+                          <a:rPr lang="en-GB" b="0" i="1" noProof="0" smtClean="0">
                             <a:latin typeface="Cambria Math" panose="02040503050406030204" pitchFamily="18" charset="0"/>
                           </a:rPr>
                           <m:t>𝑡</m:t>
@@ -7615,7 +7598,7 @@
                       </m:sub>
                     </m:sSub>
                     <m:r>
-                      <a:rPr lang="fr-BE" b="0" i="1" smtClean="0">
+                      <a:rPr lang="en-GB" b="0" i="1" noProof="0" smtClean="0">
                         <a:latin typeface="Cambria Math" panose="02040503050406030204" pitchFamily="18" charset="0"/>
                       </a:rPr>
                       <m:t>=</m:t>
@@ -7623,7 +7606,7 @@
                     <m:sSub>
                       <m:sSubPr>
                         <m:ctrlPr>
-                          <a:rPr lang="fr-BE" i="1">
+                          <a:rPr lang="en-GB" i="1" noProof="0" smtClean="0">
                             <a:latin typeface="Cambria Math" panose="02040503050406030204" pitchFamily="18" charset="0"/>
                             <a:ea typeface="Cambria Math" panose="02040503050406030204" pitchFamily="18" charset="0"/>
                           </a:rPr>
@@ -7631,21 +7614,21 @@
                       </m:sSubPr>
                       <m:e>
                         <m:r>
-                          <a:rPr lang="fr-BE" i="1">
+                          <a:rPr lang="en-GB" i="1" noProof="0" smtClean="0">
                             <a:latin typeface="Cambria Math" panose="02040503050406030204" pitchFamily="18" charset="0"/>
                             <a:ea typeface="Cambria Math" panose="02040503050406030204" pitchFamily="18" charset="0"/>
                           </a:rPr>
                           <m:t>𝛼</m:t>
                         </m:r>
                         <m:r>
-                          <a:rPr lang="fr-BE" i="1">
+                          <a:rPr lang="en-GB" i="1" noProof="0" smtClean="0">
                             <a:latin typeface="Cambria Math" panose="02040503050406030204" pitchFamily="18" charset="0"/>
                             <a:ea typeface="Cambria Math" panose="02040503050406030204" pitchFamily="18" charset="0"/>
                           </a:rPr>
                           <m:t>+</m:t>
                         </m:r>
                         <m:r>
-                          <a:rPr lang="fr-BE" b="0" i="1" smtClean="0">
+                          <a:rPr lang="en-GB" b="0" i="1" noProof="0" smtClean="0">
                             <a:latin typeface="Cambria Math" panose="02040503050406030204" pitchFamily="18" charset="0"/>
                           </a:rPr>
                           <m:t>𝐷</m:t>
@@ -7653,19 +7636,19 @@
                       </m:e>
                       <m:sub>
                         <m:r>
-                          <a:rPr lang="fr-BE" b="0" i="1" smtClean="0">
+                          <a:rPr lang="en-GB" b="0" i="1" noProof="0" smtClean="0">
                             <a:latin typeface="Cambria Math" panose="02040503050406030204" pitchFamily="18" charset="0"/>
                           </a:rPr>
                           <m:t>𝑠</m:t>
                         </m:r>
                         <m:r>
-                          <a:rPr lang="fr-BE" b="0" i="1" smtClean="0">
+                          <a:rPr lang="en-GB" b="0" i="1" noProof="0" smtClean="0">
                             <a:latin typeface="Cambria Math" panose="02040503050406030204" pitchFamily="18" charset="0"/>
                           </a:rPr>
                           <m:t>,</m:t>
                         </m:r>
                         <m:r>
-                          <a:rPr lang="fr-BE" b="0" i="1" smtClean="0">
+                          <a:rPr lang="en-GB" b="0" i="1" noProof="0" smtClean="0">
                             <a:latin typeface="Cambria Math" panose="02040503050406030204" pitchFamily="18" charset="0"/>
                           </a:rPr>
                           <m:t>𝑡</m:t>
@@ -7673,14 +7656,14 @@
                       </m:sub>
                     </m:sSub>
                     <m:r>
-                      <a:rPr lang="fr-BE" b="0" i="1" smtClean="0">
+                      <a:rPr lang="en-GB" b="0" i="1" noProof="0" smtClean="0">
                         <a:latin typeface="Cambria Math" panose="02040503050406030204" pitchFamily="18" charset="0"/>
                         <a:ea typeface="Cambria Math" panose="02040503050406030204" pitchFamily="18" charset="0"/>
                       </a:rPr>
                       <m:t>𝛽</m:t>
                     </m:r>
                     <m:r>
-                      <a:rPr lang="fr-BE" b="0" i="1" smtClean="0">
+                      <a:rPr lang="en-GB" b="0" i="1" noProof="0" smtClean="0">
                         <a:latin typeface="Cambria Math" panose="02040503050406030204" pitchFamily="18" charset="0"/>
                         <a:ea typeface="Cambria Math" panose="02040503050406030204" pitchFamily="18" charset="0"/>
                       </a:rPr>
@@ -7689,7 +7672,7 @@
                     <m:sSub>
                       <m:sSubPr>
                         <m:ctrlPr>
-                          <a:rPr lang="fr-BE" i="1">
+                          <a:rPr lang="en-GB" i="1" noProof="0" smtClean="0">
                             <a:latin typeface="Cambria Math" panose="02040503050406030204" pitchFamily="18" charset="0"/>
                             <a:ea typeface="Cambria Math" panose="02040503050406030204" pitchFamily="18" charset="0"/>
                           </a:rPr>
@@ -7697,7 +7680,7 @@
                       </m:sSubPr>
                       <m:e>
                         <m:r>
-                          <a:rPr lang="fr-BE" i="1">
+                          <a:rPr lang="en-GB" i="1" noProof="0" smtClean="0">
                             <a:latin typeface="Cambria Math" panose="02040503050406030204" pitchFamily="18" charset="0"/>
                             <a:ea typeface="Cambria Math" panose="02040503050406030204" pitchFamily="18" charset="0"/>
                           </a:rPr>
@@ -7706,7 +7689,7 @@
                       </m:e>
                       <m:sub>
                         <m:r>
-                          <a:rPr lang="fr-BE" i="1">
+                          <a:rPr lang="en-GB" i="1" noProof="0" smtClean="0">
                             <a:latin typeface="Cambria Math" panose="02040503050406030204" pitchFamily="18" charset="0"/>
                             <a:ea typeface="Cambria Math" panose="02040503050406030204" pitchFamily="18" charset="0"/>
                           </a:rPr>
@@ -7717,15 +7700,15 @@
                   </m:oMath>
                 </a14:m>
                 <a:r>
-                  <a:rPr lang="en-GB" dirty="0"/>
+                  <a:rPr lang="en-GB" noProof="0" dirty="0"/>
                   <a:t> 		(WN ; </a:t>
                 </a:r>
                 <a:r>
-                  <a:rPr lang="en-GB" sz="1400" dirty="0"/>
+                  <a:rPr lang="en-GB" sz="1400" noProof="0" dirty="0"/>
                   <a:t>for residuals</a:t>
                 </a:r>
                 <a:r>
-                  <a:rPr lang="en-GB" dirty="0"/>
+                  <a:rPr lang="en-GB" noProof="0" dirty="0"/>
                   <a:t>)</a:t>
                 </a:r>
               </a:p>
@@ -7736,14 +7719,14 @@
                     <m:sSub>
                       <m:sSubPr>
                         <m:ctrlPr>
-                          <a:rPr lang="fr-BE" b="0" i="1" smtClean="0">
+                          <a:rPr lang="en-GB" b="0" i="1" noProof="0" smtClean="0">
                             <a:latin typeface="Cambria Math" panose="02040503050406030204" pitchFamily="18" charset="0"/>
                           </a:rPr>
                         </m:ctrlPr>
                       </m:sSubPr>
                       <m:e>
                         <m:r>
-                          <a:rPr lang="fr-BE" b="0" i="1" smtClean="0">
+                          <a:rPr lang="en-GB" b="0" i="1" noProof="0" smtClean="0">
                             <a:latin typeface="Cambria Math" panose="02040503050406030204" pitchFamily="18" charset="0"/>
                           </a:rPr>
                           <m:t>𝑦</m:t>
@@ -7751,7 +7734,7 @@
                       </m:e>
                       <m:sub>
                         <m:r>
-                          <a:rPr lang="fr-BE" b="0" i="1" smtClean="0">
+                          <a:rPr lang="en-GB" b="0" i="1" noProof="0" smtClean="0">
                             <a:latin typeface="Cambria Math" panose="02040503050406030204" pitchFamily="18" charset="0"/>
                           </a:rPr>
                           <m:t>𝑡</m:t>
@@ -7759,27 +7742,27 @@
                       </m:sub>
                     </m:sSub>
                     <m:r>
-                      <a:rPr lang="fr-BE" b="0" i="1" smtClean="0">
+                      <a:rPr lang="en-GB" b="0" i="1" noProof="0" smtClean="0">
                         <a:latin typeface="Cambria Math" panose="02040503050406030204" pitchFamily="18" charset="0"/>
                       </a:rPr>
                       <m:t>=</m:t>
                     </m:r>
                     <m:r>
-                      <a:rPr lang="fr-BE" b="0" i="1" smtClean="0">
+                      <a:rPr lang="en-GB" b="0" i="1" noProof="0" smtClean="0">
                         <a:latin typeface="Cambria Math" panose="02040503050406030204" pitchFamily="18" charset="0"/>
                         <a:ea typeface="Cambria Math" panose="02040503050406030204" pitchFamily="18" charset="0"/>
                       </a:rPr>
                       <m:t>𝛼</m:t>
                     </m:r>
                     <m:r>
-                      <a:rPr lang="fr-BE" b="0" i="1" smtClean="0">
+                      <a:rPr lang="en-GB" b="0" i="1" noProof="0" smtClean="0">
                         <a:latin typeface="Cambria Math" panose="02040503050406030204" pitchFamily="18" charset="0"/>
                         <a:ea typeface="Cambria Math" panose="02040503050406030204" pitchFamily="18" charset="0"/>
                       </a:rPr>
                       <m:t>+</m:t>
                     </m:r>
                     <m:r>
-                      <a:rPr lang="fr-BE" b="0" i="1" smtClean="0">
+                      <a:rPr lang="en-GB" b="0" i="1" noProof="0" smtClean="0">
                         <a:latin typeface="Cambria Math" panose="02040503050406030204" pitchFamily="18" charset="0"/>
                         <a:ea typeface="Cambria Math" panose="02040503050406030204" pitchFamily="18" charset="0"/>
                       </a:rPr>
@@ -7788,14 +7771,14 @@
                     <m:sSub>
                       <m:sSubPr>
                         <m:ctrlPr>
-                          <a:rPr lang="fr-BE" i="1">
+                          <a:rPr lang="en-GB" i="1" noProof="0" smtClean="0">
                             <a:latin typeface="Cambria Math" panose="02040503050406030204" pitchFamily="18" charset="0"/>
                           </a:rPr>
                         </m:ctrlPr>
                       </m:sSubPr>
                       <m:e>
                         <m:r>
-                          <a:rPr lang="fr-BE" i="1">
+                          <a:rPr lang="en-GB" i="1" noProof="0" smtClean="0">
                             <a:latin typeface="Cambria Math" panose="02040503050406030204" pitchFamily="18" charset="0"/>
                           </a:rPr>
                           <m:t>𝑦</m:t>
@@ -7803,13 +7786,13 @@
                       </m:e>
                       <m:sub>
                         <m:r>
-                          <a:rPr lang="fr-BE" i="1">
+                          <a:rPr lang="en-GB" i="1" noProof="0" smtClean="0">
                             <a:latin typeface="Cambria Math" panose="02040503050406030204" pitchFamily="18" charset="0"/>
                           </a:rPr>
                           <m:t>𝑡</m:t>
                         </m:r>
                         <m:r>
-                          <a:rPr lang="fr-BE" b="0" i="1" smtClean="0">
+                          <a:rPr lang="en-GB" b="0" i="1" noProof="0" smtClean="0">
                             <a:latin typeface="Cambria Math" panose="02040503050406030204" pitchFamily="18" charset="0"/>
                           </a:rPr>
                           <m:t>−1</m:t>
@@ -7817,7 +7800,7 @@
                       </m:sub>
                     </m:sSub>
                     <m:r>
-                      <a:rPr lang="fr-BE" b="0" i="1" smtClean="0">
+                      <a:rPr lang="en-GB" b="0" i="1" noProof="0" smtClean="0">
                         <a:latin typeface="Cambria Math" panose="02040503050406030204" pitchFamily="18" charset="0"/>
                       </a:rPr>
                       <m:t>+</m:t>
@@ -7825,14 +7808,14 @@
                     <m:sSub>
                       <m:sSubPr>
                         <m:ctrlPr>
-                          <a:rPr lang="fr-BE" b="0" i="1" smtClean="0">
+                          <a:rPr lang="en-GB" b="0" i="1" noProof="0" smtClean="0">
                             <a:latin typeface="Cambria Math" panose="02040503050406030204" pitchFamily="18" charset="0"/>
                           </a:rPr>
                         </m:ctrlPr>
                       </m:sSubPr>
                       <m:e>
                         <m:r>
-                          <a:rPr lang="fr-BE" b="0" i="1" smtClean="0">
+                          <a:rPr lang="en-GB" b="0" i="1" noProof="0" smtClean="0">
                             <a:latin typeface="Cambria Math" panose="02040503050406030204" pitchFamily="18" charset="0"/>
                           </a:rPr>
                           <m:t>𝐷</m:t>
@@ -7840,19 +7823,19 @@
                       </m:e>
                       <m:sub>
                         <m:r>
-                          <a:rPr lang="fr-BE" b="0" i="1" smtClean="0">
+                          <a:rPr lang="en-GB" b="0" i="1" noProof="0" smtClean="0">
                             <a:latin typeface="Cambria Math" panose="02040503050406030204" pitchFamily="18" charset="0"/>
                           </a:rPr>
                           <m:t>𝑠</m:t>
                         </m:r>
                         <m:r>
-                          <a:rPr lang="fr-BE" b="0" i="1" smtClean="0">
+                          <a:rPr lang="en-GB" b="0" i="1" noProof="0" smtClean="0">
                             <a:latin typeface="Cambria Math" panose="02040503050406030204" pitchFamily="18" charset="0"/>
                           </a:rPr>
                           <m:t>,</m:t>
                         </m:r>
                         <m:r>
-                          <a:rPr lang="fr-BE" b="0" i="1" smtClean="0">
+                          <a:rPr lang="en-GB" b="0" i="1" noProof="0" smtClean="0">
                             <a:latin typeface="Cambria Math" panose="02040503050406030204" pitchFamily="18" charset="0"/>
                           </a:rPr>
                           <m:t>𝑡</m:t>
@@ -7860,14 +7843,14 @@
                       </m:sub>
                     </m:sSub>
                     <m:r>
-                      <a:rPr lang="fr-BE" b="0" i="1" smtClean="0">
+                      <a:rPr lang="en-GB" b="0" i="1" noProof="0" smtClean="0">
                         <a:latin typeface="Cambria Math" panose="02040503050406030204" pitchFamily="18" charset="0"/>
                         <a:ea typeface="Cambria Math" panose="02040503050406030204" pitchFamily="18" charset="0"/>
                       </a:rPr>
                       <m:t>𝛽</m:t>
                     </m:r>
                     <m:r>
-                      <a:rPr lang="fr-BE" b="0" i="1" smtClean="0">
+                      <a:rPr lang="en-GB" b="0" i="1" noProof="0" smtClean="0">
                         <a:latin typeface="Cambria Math" panose="02040503050406030204" pitchFamily="18" charset="0"/>
                         <a:ea typeface="Cambria Math" panose="02040503050406030204" pitchFamily="18" charset="0"/>
                       </a:rPr>
@@ -7876,7 +7859,7 @@
                     <m:sSub>
                       <m:sSubPr>
                         <m:ctrlPr>
-                          <a:rPr lang="fr-BE" b="0" i="1" smtClean="0">
+                          <a:rPr lang="en-GB" b="0" i="1" noProof="0" smtClean="0">
                             <a:latin typeface="Cambria Math" panose="02040503050406030204" pitchFamily="18" charset="0"/>
                             <a:ea typeface="Cambria Math" panose="02040503050406030204" pitchFamily="18" charset="0"/>
                           </a:rPr>
@@ -7884,7 +7867,7 @@
                       </m:sSubPr>
                       <m:e>
                         <m:r>
-                          <a:rPr lang="fr-BE" b="0" i="1" smtClean="0">
+                          <a:rPr lang="en-GB" b="0" i="1" noProof="0" smtClean="0">
                             <a:latin typeface="Cambria Math" panose="02040503050406030204" pitchFamily="18" charset="0"/>
                             <a:ea typeface="Cambria Math" panose="02040503050406030204" pitchFamily="18" charset="0"/>
                           </a:rPr>
@@ -7893,7 +7876,7 @@
                       </m:e>
                       <m:sub>
                         <m:r>
-                          <a:rPr lang="fr-BE" b="0" i="1" smtClean="0">
+                          <a:rPr lang="en-GB" b="0" i="1" noProof="0" smtClean="0">
                             <a:latin typeface="Cambria Math" panose="02040503050406030204" pitchFamily="18" charset="0"/>
                             <a:ea typeface="Cambria Math" panose="02040503050406030204" pitchFamily="18" charset="0"/>
                           </a:rPr>
@@ -7904,15 +7887,15 @@
                   </m:oMath>
                 </a14:m>
                 <a:r>
-                  <a:rPr lang="en-GB" dirty="0"/>
+                  <a:rPr lang="en-GB" noProof="0" dirty="0"/>
                   <a:t>		(AR ; </a:t>
                 </a:r>
                 <a:r>
-                  <a:rPr lang="en-GB" sz="1400" dirty="0"/>
+                  <a:rPr lang="en-GB" sz="1400" noProof="0" dirty="0"/>
                   <a:t>GUI</a:t>
                 </a:r>
                 <a:r>
-                  <a:rPr lang="en-GB" dirty="0"/>
+                  <a:rPr lang="en-GB" noProof="0" dirty="0"/>
                   <a:t>)</a:t>
                 </a:r>
               </a:p>
@@ -7923,14 +7906,14 @@
                     <m:sSub>
                       <m:sSubPr>
                         <m:ctrlPr>
-                          <a:rPr lang="fr-BE" b="0" i="1" smtClean="0">
+                          <a:rPr lang="en-GB" b="0" i="1" noProof="0" smtClean="0">
                             <a:latin typeface="Cambria Math" panose="02040503050406030204" pitchFamily="18" charset="0"/>
                           </a:rPr>
                         </m:ctrlPr>
                       </m:sSubPr>
                       <m:e>
                         <m:r>
-                          <a:rPr lang="fr-BE" b="0" i="1" smtClean="0">
+                          <a:rPr lang="en-GB" b="0" i="1" noProof="0" smtClean="0">
                             <a:latin typeface="Cambria Math" panose="02040503050406030204" pitchFamily="18" charset="0"/>
                           </a:rPr>
                           <m:t>𝑦</m:t>
@@ -7938,7 +7921,7 @@
                       </m:e>
                       <m:sub>
                         <m:r>
-                          <a:rPr lang="fr-BE" b="0" i="1" smtClean="0">
+                          <a:rPr lang="en-GB" b="0" i="1" noProof="0" smtClean="0">
                             <a:latin typeface="Cambria Math" panose="02040503050406030204" pitchFamily="18" charset="0"/>
                           </a:rPr>
                           <m:t>𝑡</m:t>
@@ -7946,7 +7929,7 @@
                       </m:sub>
                     </m:sSub>
                     <m:r>
-                      <a:rPr lang="fr-BE" b="0" i="1" smtClean="0">
+                      <a:rPr lang="en-GB" b="0" i="1" noProof="0" smtClean="0">
                         <a:latin typeface="Cambria Math" panose="02040503050406030204" pitchFamily="18" charset="0"/>
                       </a:rPr>
                       <m:t>−</m:t>
@@ -7954,14 +7937,14 @@
                     <m:sSub>
                       <m:sSubPr>
                         <m:ctrlPr>
-                          <a:rPr lang="fr-BE" i="1">
+                          <a:rPr lang="en-GB" i="1" noProof="0" smtClean="0">
                             <a:latin typeface="Cambria Math" panose="02040503050406030204" pitchFamily="18" charset="0"/>
                           </a:rPr>
                         </m:ctrlPr>
                       </m:sSubPr>
                       <m:e>
                         <m:r>
-                          <a:rPr lang="fr-BE" i="1">
+                          <a:rPr lang="en-GB" i="1" noProof="0" smtClean="0">
                             <a:latin typeface="Cambria Math" panose="02040503050406030204" pitchFamily="18" charset="0"/>
                           </a:rPr>
                           <m:t>𝑦</m:t>
@@ -7969,13 +7952,13 @@
                       </m:e>
                       <m:sub>
                         <m:r>
-                          <a:rPr lang="fr-BE" i="1">
+                          <a:rPr lang="en-GB" i="1" noProof="0" smtClean="0">
                             <a:latin typeface="Cambria Math" panose="02040503050406030204" pitchFamily="18" charset="0"/>
                           </a:rPr>
                           <m:t>𝑡</m:t>
                         </m:r>
                         <m:r>
-                          <a:rPr lang="fr-BE" b="0" i="1" smtClean="0">
+                          <a:rPr lang="en-GB" b="0" i="1" noProof="0" smtClean="0">
                             <a:latin typeface="Cambria Math" panose="02040503050406030204" pitchFamily="18" charset="0"/>
                           </a:rPr>
                           <m:t>−1</m:t>
@@ -7983,20 +7966,20 @@
                       </m:sub>
                     </m:sSub>
                     <m:r>
-                      <a:rPr lang="fr-BE" b="0" i="1" smtClean="0">
+                      <a:rPr lang="en-GB" b="0" i="1" noProof="0" smtClean="0">
                         <a:latin typeface="Cambria Math" panose="02040503050406030204" pitchFamily="18" charset="0"/>
                       </a:rPr>
                       <m:t>=</m:t>
                     </m:r>
                     <m:r>
-                      <a:rPr lang="fr-BE" b="0" i="1" smtClean="0">
+                      <a:rPr lang="en-GB" b="0" i="1" noProof="0" smtClean="0">
                         <a:latin typeface="Cambria Math" panose="02040503050406030204" pitchFamily="18" charset="0"/>
                         <a:ea typeface="Cambria Math" panose="02040503050406030204" pitchFamily="18" charset="0"/>
                       </a:rPr>
                       <m:t>𝛼</m:t>
                     </m:r>
                     <m:r>
-                      <a:rPr lang="fr-BE" b="0" i="1" smtClean="0">
+                      <a:rPr lang="en-GB" b="0" i="1" noProof="0" smtClean="0">
                         <a:latin typeface="Cambria Math" panose="02040503050406030204" pitchFamily="18" charset="0"/>
                         <a:ea typeface="Cambria Math" panose="02040503050406030204" pitchFamily="18" charset="0"/>
                       </a:rPr>
@@ -8005,14 +7988,14 @@
                     <m:sSub>
                       <m:sSubPr>
                         <m:ctrlPr>
-                          <a:rPr lang="fr-BE" b="0" i="1" smtClean="0">
+                          <a:rPr lang="en-GB" b="0" i="1" noProof="0" smtClean="0">
                             <a:latin typeface="Cambria Math" panose="02040503050406030204" pitchFamily="18" charset="0"/>
                           </a:rPr>
                         </m:ctrlPr>
                       </m:sSubPr>
                       <m:e>
                         <m:r>
-                          <a:rPr lang="fr-BE" b="0" i="1" smtClean="0">
+                          <a:rPr lang="en-GB" b="0" i="1" noProof="0" smtClean="0">
                             <a:latin typeface="Cambria Math" panose="02040503050406030204" pitchFamily="18" charset="0"/>
                           </a:rPr>
                           <m:t>𝐷</m:t>
@@ -8020,19 +8003,19 @@
                       </m:e>
                       <m:sub>
                         <m:r>
-                          <a:rPr lang="fr-BE" b="0" i="1" smtClean="0">
+                          <a:rPr lang="en-GB" b="0" i="1" noProof="0" smtClean="0">
                             <a:latin typeface="Cambria Math" panose="02040503050406030204" pitchFamily="18" charset="0"/>
                           </a:rPr>
                           <m:t>𝑠</m:t>
                         </m:r>
                         <m:r>
-                          <a:rPr lang="fr-BE" b="0" i="1" smtClean="0">
+                          <a:rPr lang="en-GB" b="0" i="1" noProof="0" smtClean="0">
                             <a:latin typeface="Cambria Math" panose="02040503050406030204" pitchFamily="18" charset="0"/>
                           </a:rPr>
                           <m:t>,</m:t>
                         </m:r>
                         <m:r>
-                          <a:rPr lang="fr-BE" b="0" i="1" smtClean="0">
+                          <a:rPr lang="en-GB" b="0" i="1" noProof="0" smtClean="0">
                             <a:latin typeface="Cambria Math" panose="02040503050406030204" pitchFamily="18" charset="0"/>
                           </a:rPr>
                           <m:t>𝑡</m:t>
@@ -8040,14 +8023,14 @@
                       </m:sub>
                     </m:sSub>
                     <m:r>
-                      <a:rPr lang="fr-BE" b="0" i="1" smtClean="0">
+                      <a:rPr lang="en-GB" b="0" i="1" noProof="0" smtClean="0">
                         <a:latin typeface="Cambria Math" panose="02040503050406030204" pitchFamily="18" charset="0"/>
                         <a:ea typeface="Cambria Math" panose="02040503050406030204" pitchFamily="18" charset="0"/>
                       </a:rPr>
                       <m:t>𝛽</m:t>
                     </m:r>
                     <m:r>
-                      <a:rPr lang="fr-BE" b="0" i="1" smtClean="0">
+                      <a:rPr lang="en-GB" b="0" i="1" noProof="0" smtClean="0">
                         <a:latin typeface="Cambria Math" panose="02040503050406030204" pitchFamily="18" charset="0"/>
                         <a:ea typeface="Cambria Math" panose="02040503050406030204" pitchFamily="18" charset="0"/>
                       </a:rPr>
@@ -8056,7 +8039,7 @@
                     <m:sSub>
                       <m:sSubPr>
                         <m:ctrlPr>
-                          <a:rPr lang="fr-BE" b="0" i="1" smtClean="0">
+                          <a:rPr lang="en-GB" b="0" i="1" noProof="0" smtClean="0">
                             <a:latin typeface="Cambria Math" panose="02040503050406030204" pitchFamily="18" charset="0"/>
                             <a:ea typeface="Cambria Math" panose="02040503050406030204" pitchFamily="18" charset="0"/>
                           </a:rPr>
@@ -8064,7 +8047,7 @@
                       </m:sSubPr>
                       <m:e>
                         <m:r>
-                          <a:rPr lang="fr-BE" b="0" i="1" smtClean="0">
+                          <a:rPr lang="en-GB" b="0" i="1" noProof="0" smtClean="0">
                             <a:latin typeface="Cambria Math" panose="02040503050406030204" pitchFamily="18" charset="0"/>
                             <a:ea typeface="Cambria Math" panose="02040503050406030204" pitchFamily="18" charset="0"/>
                           </a:rPr>
@@ -8073,7 +8056,7 @@
                       </m:e>
                       <m:sub>
                         <m:r>
-                          <a:rPr lang="fr-BE" b="0" i="1" smtClean="0">
+                          <a:rPr lang="en-GB" b="0" i="1" noProof="0" smtClean="0">
                             <a:latin typeface="Cambria Math" panose="02040503050406030204" pitchFamily="18" charset="0"/>
                             <a:ea typeface="Cambria Math" panose="02040503050406030204" pitchFamily="18" charset="0"/>
                           </a:rPr>
@@ -8084,11 +8067,11 @@
                   </m:oMath>
                 </a14:m>
                 <a:r>
-                  <a:rPr lang="en-GB" dirty="0"/>
+                  <a:rPr lang="en-GB" noProof="0" dirty="0"/>
                   <a:t> 		(D1; </a:t>
                 </a:r>
                 <a:r>
-                  <a:rPr lang="en-GB" sz="1400" dirty="0"/>
+                  <a:rPr lang="en-GB" sz="1400" noProof="0" dirty="0"/>
                   <a:t>for Y, SA ; differencing </a:t>
                 </a:r>
                 <a14:m>
@@ -8096,14 +8079,14 @@
                     <m:sSub>
                       <m:sSubPr>
                         <m:ctrlPr>
-                          <a:rPr lang="fr-BE" sz="1400" i="1">
+                          <a:rPr lang="en-GB" sz="1400" i="1" noProof="0" smtClean="0">
                             <a:latin typeface="Cambria Math" panose="02040503050406030204" pitchFamily="18" charset="0"/>
                           </a:rPr>
                         </m:ctrlPr>
                       </m:sSubPr>
                       <m:e>
                         <m:r>
-                          <a:rPr lang="fr-BE" sz="1400" i="1">
+                          <a:rPr lang="en-GB" sz="1400" i="1" noProof="0" smtClean="0">
                             <a:latin typeface="Cambria Math" panose="02040503050406030204" pitchFamily="18" charset="0"/>
                           </a:rPr>
                           <m:t>𝐷</m:t>
@@ -8111,19 +8094,19 @@
                       </m:e>
                       <m:sub>
                         <m:r>
-                          <a:rPr lang="fr-BE" sz="1400" i="1">
+                          <a:rPr lang="en-GB" sz="1400" i="1" noProof="0" smtClean="0">
                             <a:latin typeface="Cambria Math" panose="02040503050406030204" pitchFamily="18" charset="0"/>
                           </a:rPr>
                           <m:t>𝑠</m:t>
                         </m:r>
                         <m:r>
-                          <a:rPr lang="fr-BE" sz="1400" i="1">
+                          <a:rPr lang="en-GB" sz="1400" i="1" noProof="0" smtClean="0">
                             <a:latin typeface="Cambria Math" panose="02040503050406030204" pitchFamily="18" charset="0"/>
                           </a:rPr>
                           <m:t>,</m:t>
                         </m:r>
                         <m:r>
-                          <a:rPr lang="fr-BE" sz="1400" i="1">
+                          <a:rPr lang="en-GB" sz="1400" i="1" noProof="0" smtClean="0">
                             <a:latin typeface="Cambria Math" panose="02040503050406030204" pitchFamily="18" charset="0"/>
                           </a:rPr>
                           <m:t>𝑡</m:t>
@@ -8133,24 +8116,24 @@
                   </m:oMath>
                 </a14:m>
                 <a:r>
-                  <a:rPr lang="en-GB" sz="1400" dirty="0"/>
+                  <a:rPr lang="en-GB" sz="1400" noProof="0" dirty="0"/>
                   <a:t> is useless: same projection space</a:t>
                 </a:r>
                 <a:r>
-                  <a:rPr lang="en-GB" dirty="0"/>
+                  <a:rPr lang="en-GB" noProof="0" dirty="0"/>
                   <a:t>)</a:t>
                 </a:r>
               </a:p>
               <a:p>
                 <a:pPr lvl="1"/>
                 <a:r>
-                  <a:rPr lang="en-GB" dirty="0"/>
+                  <a:rPr lang="en-GB" noProof="0" dirty="0"/>
                   <a:t>H0: coefficients (</a:t>
                 </a:r>
                 <a14:m>
                   <m:oMath xmlns:m="http://schemas.openxmlformats.org/officeDocument/2006/math">
                     <m:r>
-                      <a:rPr lang="fr-BE" b="0" i="1" smtClean="0">
+                      <a:rPr lang="en-GB" b="0" i="1" noProof="0" smtClean="0">
                         <a:latin typeface="Cambria Math" panose="02040503050406030204" pitchFamily="18" charset="0"/>
                         <a:ea typeface="Cambria Math" panose="02040503050406030204" pitchFamily="18" charset="0"/>
                       </a:rPr>
@@ -8159,25 +8142,25 @@
                   </m:oMath>
                 </a14:m>
                 <a:r>
-                  <a:rPr lang="en-GB" dirty="0"/>
+                  <a:rPr lang="en-GB" noProof="0" dirty="0"/>
                   <a:t>) are equal to 0, H1: coefficients jointly differ from 0</a:t>
                 </a:r>
               </a:p>
               <a:p>
                 <a:pPr lvl="1"/>
                 <a:r>
-                  <a:rPr lang="en-GB" dirty="0"/>
+                  <a:rPr lang="en-GB" noProof="0" dirty="0"/>
                   <a:t>Applied on (log) series. Should be applied on parts of the series</a:t>
                 </a:r>
               </a:p>
               <a:p>
                 <a:pPr lvl="1"/>
-                <a:endParaRPr lang="en-GB" dirty="0"/>
+                <a:endParaRPr lang="en-GB" noProof="0" dirty="0"/>
               </a:p>
             </p:txBody>
           </p:sp>
         </mc:Choice>
-        <mc:Fallback xmlns="">
+        <mc:Fallback>
           <p:sp>
             <p:nvSpPr>
               <p:cNvPr id="3" name="Content Placeholder 2">
@@ -8248,7 +8231,7 @@
           <a:lstStyle/>
           <a:p>
             <a:r>
-              <a:rPr lang="en-GB"/>
+              <a:rPr lang="en-GB" noProof="0" dirty="0"/>
               <a:t>Seasonality and trading days tests</a:t>
             </a:r>
           </a:p>
@@ -8306,7 +8289,7 @@
           <a:lstStyle/>
           <a:p>
             <a:r>
-              <a:rPr lang="en-GB" dirty="0"/>
+              <a:rPr lang="en-GB" noProof="0" dirty="0"/>
               <a:t>Seasonality tests (cont.)</a:t>
             </a:r>
           </a:p>
@@ -8334,10 +8317,10 @@
           <a:lstStyle/>
           <a:p>
             <a:fld id="{71CC62B1-FA1F-4849-B719-012F8D8A46B3}" type="slidenum">
-              <a:rPr lang="en-GB" smtClean="0"/>
+              <a:rPr lang="en-GB" noProof="0" smtClean="0"/>
               <a:t>5</a:t>
             </a:fld>
-            <a:endParaRPr lang="en-GB"/>
+            <a:endParaRPr lang="en-GB" noProof="0" dirty="0"/>
           </a:p>
         </p:txBody>
       </p:sp>
@@ -8368,7 +8351,7 @@
           <a:lstStyle/>
           <a:p>
             <a:r>
-              <a:rPr lang="en-GB" sz="2800" dirty="0"/>
+              <a:rPr lang="en-GB" sz="2800" noProof="0" dirty="0"/>
               <a:t>Combined seasonality test (X11-like)</a:t>
             </a:r>
           </a:p>
@@ -8401,14 +8384,14 @@
           <a:lstStyle/>
           <a:p>
             <a:r>
-              <a:rPr lang="en-GB"/>
+              <a:rPr lang="en-GB" noProof="0" dirty="0"/>
               <a:t>Seasonality and trading days tests</a:t>
             </a:r>
           </a:p>
         </p:txBody>
       </p:sp>
-      <mc:AlternateContent xmlns:mc="http://schemas.openxmlformats.org/markup-compatibility/2006" xmlns:a14="http://schemas.microsoft.com/office/drawing/2010/main">
-        <mc:Choice Requires="a14">
+      <mc:AlternateContent xmlns:mc="http://schemas.openxmlformats.org/markup-compatibility/2006">
+        <mc:Choice xmlns:a14="http://schemas.microsoft.com/office/drawing/2010/main" Requires="a14">
           <p:sp>
             <p:nvSpPr>
               <p:cNvPr id="4" name="Rectangle: Rounded Corners 3">
@@ -8456,14 +8439,14 @@
                     <m:sSub>
                       <m:sSubPr>
                         <m:ctrlPr>
-                          <a:rPr lang="fr-BE" b="0" i="1" smtClean="0">
+                          <a:rPr lang="en-GB" b="0" i="1" noProof="0" smtClean="0">
                             <a:latin typeface="Cambria Math" panose="02040503050406030204" pitchFamily="18" charset="0"/>
                           </a:rPr>
                         </m:ctrlPr>
                       </m:sSubPr>
                       <m:e>
                         <m:r>
-                          <a:rPr lang="fr-BE" b="0" i="1" smtClean="0">
+                          <a:rPr lang="en-GB" b="0" i="1" noProof="0" smtClean="0">
                             <a:latin typeface="Cambria Math" panose="02040503050406030204" pitchFamily="18" charset="0"/>
                           </a:rPr>
                           <m:t>𝐹</m:t>
@@ -8471,7 +8454,7 @@
                       </m:e>
                       <m:sub>
                         <m:r>
-                          <a:rPr lang="fr-BE" b="0" i="1" smtClean="0">
+                          <a:rPr lang="en-GB" b="0" i="1" noProof="0" smtClean="0">
                             <a:latin typeface="Cambria Math" panose="02040503050406030204" pitchFamily="18" charset="0"/>
                           </a:rPr>
                           <m:t>𝑠</m:t>
@@ -8481,21 +8464,21 @@
                   </m:oMath>
                 </a14:m>
                 <a:r>
-                  <a:rPr lang="en-GB" dirty="0"/>
+                  <a:rPr lang="en-GB" noProof="0" dirty="0"/>
                   <a:t>: Single factor ANOVA:</a:t>
                 </a:r>
               </a:p>
               <a:p>
                 <a:pPr algn="ctr"/>
                 <a:r>
-                  <a:rPr lang="en-GB" dirty="0"/>
+                  <a:rPr lang="en-GB" noProof="0" dirty="0"/>
                   <a:t>identical seasonal factors</a:t>
                 </a:r>
               </a:p>
             </p:txBody>
           </p:sp>
         </mc:Choice>
-        <mc:Fallback xmlns="">
+        <mc:Fallback>
           <p:sp>
             <p:nvSpPr>
               <p:cNvPr id="4" name="Rectangle: Rounded Corners 3">
@@ -8521,7 +8504,7 @@
               <a:blipFill>
                 <a:blip r:embed="rId2"/>
                 <a:stretch>
-                  <a:fillRect b="-1504"/>
+                  <a:fillRect/>
                 </a:stretch>
               </a:blipFill>
             </p:spPr>
@@ -8628,7 +8611,7 @@
           <a:p>
             <a:pPr algn="ctr"/>
             <a:r>
-              <a:rPr lang="en-GB" dirty="0"/>
+              <a:rPr lang="en-GB" noProof="0" dirty="0"/>
               <a:t>No identifiable seasonality</a:t>
             </a:r>
           </a:p>
@@ -8677,7 +8660,7 @@
           <a:p>
             <a:pPr algn="ctr"/>
             <a:r>
-              <a:rPr lang="en-GB" dirty="0"/>
+              <a:rPr lang="en-GB" noProof="0" dirty="0"/>
               <a:t>Probably no identifiable seasonality</a:t>
             </a:r>
           </a:p>
@@ -8726,7 +8709,7 @@
           <a:p>
             <a:pPr algn="ctr"/>
             <a:r>
-              <a:rPr lang="en-GB" dirty="0"/>
+              <a:rPr lang="en-GB" noProof="0" dirty="0"/>
               <a:t>Identifiable seasonality</a:t>
             </a:r>
           </a:p>
@@ -8761,14 +8744,14 @@
           <a:lstStyle/>
           <a:p>
             <a:r>
-              <a:rPr lang="en-GB" dirty="0"/>
+              <a:rPr lang="en-GB" noProof="0" dirty="0"/>
               <a:t>P-value&lt;0.1</a:t>
             </a:r>
           </a:p>
         </p:txBody>
       </p:sp>
-      <mc:AlternateContent xmlns:mc="http://schemas.openxmlformats.org/markup-compatibility/2006" xmlns:a14="http://schemas.microsoft.com/office/drawing/2010/main">
-        <mc:Choice Requires="a14">
+      <mc:AlternateContent xmlns:mc="http://schemas.openxmlformats.org/markup-compatibility/2006">
+        <mc:Choice xmlns:a14="http://schemas.microsoft.com/office/drawing/2010/main" Requires="a14">
           <p:sp>
             <p:nvSpPr>
               <p:cNvPr id="13" name="Rectangle: Rounded Corners 12">
@@ -8816,14 +8799,14 @@
                     <m:sSub>
                       <m:sSubPr>
                         <m:ctrlPr>
-                          <a:rPr lang="fr-BE" b="0" i="1" smtClean="0">
+                          <a:rPr lang="en-GB" b="0" i="1" noProof="0" smtClean="0">
                             <a:latin typeface="Cambria Math" panose="02040503050406030204" pitchFamily="18" charset="0"/>
                           </a:rPr>
                         </m:ctrlPr>
                       </m:sSubPr>
                       <m:e>
                         <m:r>
-                          <a:rPr lang="fr-BE" b="0" i="1" smtClean="0">
+                          <a:rPr lang="en-GB" b="0" i="1" noProof="0" smtClean="0">
                             <a:latin typeface="Cambria Math" panose="02040503050406030204" pitchFamily="18" charset="0"/>
                           </a:rPr>
                           <m:t>𝐹</m:t>
@@ -8831,7 +8814,7 @@
                       </m:e>
                       <m:sub>
                         <m:r>
-                          <a:rPr lang="fr-BE" b="0" i="1" smtClean="0">
+                          <a:rPr lang="en-GB" b="0" i="1" noProof="0" smtClean="0">
                             <a:latin typeface="Cambria Math" panose="02040503050406030204" pitchFamily="18" charset="0"/>
                           </a:rPr>
                           <m:t>𝑀</m:t>
@@ -8841,21 +8824,21 @@
                   </m:oMath>
                 </a14:m>
                 <a:r>
-                  <a:rPr lang="en-GB" dirty="0"/>
+                  <a:rPr lang="en-GB" noProof="0" dirty="0"/>
                   <a:t>: Two factors ANOVA</a:t>
                 </a:r>
               </a:p>
               <a:p>
                 <a:pPr algn="ctr"/>
                 <a:r>
-                  <a:rPr lang="en-GB" dirty="0"/>
+                  <a:rPr lang="en-GB" noProof="0" dirty="0"/>
                   <a:t>Years, seasonal factors </a:t>
                 </a:r>
               </a:p>
             </p:txBody>
           </p:sp>
         </mc:Choice>
-        <mc:Fallback xmlns="">
+        <mc:Fallback>
           <p:sp>
             <p:nvSpPr>
               <p:cNvPr id="13" name="Rectangle: Rounded Corners 12">
@@ -8881,7 +8864,7 @@
               <a:blipFill>
                 <a:blip r:embed="rId3"/>
                 <a:stretch>
-                  <a:fillRect b="-1504"/>
+                  <a:fillRect/>
                 </a:stretch>
               </a:blipFill>
             </p:spPr>
@@ -8943,8 +8926,8 @@
           </a:fontRef>
         </p:style>
       </p:cxnSp>
-      <mc:AlternateContent xmlns:mc="http://schemas.openxmlformats.org/markup-compatibility/2006" xmlns:a14="http://schemas.microsoft.com/office/drawing/2010/main">
-        <mc:Choice Requires="a14">
+      <mc:AlternateContent xmlns:mc="http://schemas.openxmlformats.org/markup-compatibility/2006">
+        <mc:Choice xmlns:a14="http://schemas.microsoft.com/office/drawing/2010/main" Requires="a14">
           <p:sp>
             <p:nvSpPr>
               <p:cNvPr id="22" name="Oval 21">
@@ -8991,13 +8974,13 @@
                   <m:oMathPara xmlns:m="http://schemas.openxmlformats.org/officeDocument/2006/math">
                     <m:oMath>
                       <m:r>
-                        <a:rPr lang="fr-BE" b="0" i="1" smtClean="0">
+                        <a:rPr lang="en-GB" b="0" i="1" noProof="0" smtClean="0">
                           <a:latin typeface="Cambria Math" panose="02040503050406030204" pitchFamily="18" charset="0"/>
                         </a:rPr>
                         <m:t>𝑓</m:t>
                       </m:r>
                       <m:r>
-                        <a:rPr lang="fr-BE" b="0" i="1" smtClean="0">
+                        <a:rPr lang="en-GB" b="0" i="1" noProof="0" smtClean="0">
                           <a:latin typeface="Cambria Math" panose="02040503050406030204" pitchFamily="18" charset="0"/>
                         </a:rPr>
                         <m:t>(</m:t>
@@ -9005,14 +8988,14 @@
                       <m:sSub>
                         <m:sSubPr>
                           <m:ctrlPr>
-                            <a:rPr lang="fr-BE" b="0" i="1" smtClean="0">
+                            <a:rPr lang="en-GB" b="0" i="1" noProof="0" smtClean="0">
                               <a:latin typeface="Cambria Math" panose="02040503050406030204" pitchFamily="18" charset="0"/>
                             </a:rPr>
                           </m:ctrlPr>
                         </m:sSubPr>
                         <m:e>
                           <m:r>
-                            <a:rPr lang="fr-BE" b="0" i="1" smtClean="0">
+                            <a:rPr lang="en-GB" b="0" i="1" noProof="0" smtClean="0">
                               <a:latin typeface="Cambria Math" panose="02040503050406030204" pitchFamily="18" charset="0"/>
                             </a:rPr>
                             <m:t>𝐹</m:t>
@@ -9020,7 +9003,7 @@
                         </m:e>
                         <m:sub>
                           <m:r>
-                            <a:rPr lang="fr-BE" b="0" i="1" smtClean="0">
+                            <a:rPr lang="en-GB" b="0" i="1" noProof="0" smtClean="0">
                               <a:latin typeface="Cambria Math" panose="02040503050406030204" pitchFamily="18" charset="0"/>
                             </a:rPr>
                             <m:t>𝑆</m:t>
@@ -9028,7 +9011,7 @@
                         </m:sub>
                       </m:sSub>
                       <m:r>
-                        <a:rPr lang="fr-BE" b="0" i="1" smtClean="0">
+                        <a:rPr lang="en-GB" b="0" i="1" noProof="0" smtClean="0">
                           <a:latin typeface="Cambria Math" panose="02040503050406030204" pitchFamily="18" charset="0"/>
                         </a:rPr>
                         <m:t>,</m:t>
@@ -9036,14 +9019,14 @@
                       <m:sSub>
                         <m:sSubPr>
                           <m:ctrlPr>
-                            <a:rPr lang="fr-BE" i="1">
+                            <a:rPr lang="en-GB" i="1" noProof="0" smtClean="0">
                               <a:latin typeface="Cambria Math" panose="02040503050406030204" pitchFamily="18" charset="0"/>
                             </a:rPr>
                           </m:ctrlPr>
                         </m:sSubPr>
                         <m:e>
                           <m:r>
-                            <a:rPr lang="fr-BE" i="1">
+                            <a:rPr lang="en-GB" i="1" noProof="0" smtClean="0">
                               <a:latin typeface="Cambria Math" panose="02040503050406030204" pitchFamily="18" charset="0"/>
                             </a:rPr>
                             <m:t>𝐹</m:t>
@@ -9051,7 +9034,7 @@
                         </m:e>
                         <m:sub>
                           <m:r>
-                            <a:rPr lang="fr-BE" i="1">
+                            <a:rPr lang="en-GB" i="1" noProof="0" smtClean="0">
                               <a:latin typeface="Cambria Math" panose="02040503050406030204" pitchFamily="18" charset="0"/>
                             </a:rPr>
                             <m:t>𝑀</m:t>
@@ -9059,7 +9042,7 @@
                         </m:sub>
                       </m:sSub>
                       <m:r>
-                        <a:rPr lang="fr-BE" b="0" i="1" smtClean="0">
+                        <a:rPr lang="en-GB" b="0" i="1" noProof="0" smtClean="0">
                           <a:latin typeface="Cambria Math" panose="02040503050406030204" pitchFamily="18" charset="0"/>
                         </a:rPr>
                         <m:t>)</m:t>
@@ -9067,12 +9050,12 @@
                     </m:oMath>
                   </m:oMathPara>
                 </a14:m>
-                <a:endParaRPr lang="en-GB" dirty="0"/>
+                <a:endParaRPr lang="en-GB" noProof="0" dirty="0"/>
               </a:p>
             </p:txBody>
           </p:sp>
         </mc:Choice>
-        <mc:Fallback xmlns="">
+        <mc:Fallback>
           <p:sp>
             <p:nvSpPr>
               <p:cNvPr id="22" name="Oval 21">
@@ -9098,7 +9081,7 @@
               <a:blipFill>
                 <a:blip r:embed="rId4"/>
                 <a:stretch>
-                  <a:fillRect l="-2732"/>
+                  <a:fillRect/>
                 </a:stretch>
               </a:blipFill>
             </p:spPr>
@@ -9203,15 +9186,15 @@
           <a:p>
             <a:pPr algn="ctr"/>
             <a:r>
-              <a:rPr lang="en-GB" dirty="0"/>
+              <a:rPr lang="en-GB" noProof="0" dirty="0"/>
               <a:t>Kruskal-Wallis </a:t>
             </a:r>
           </a:p>
           <a:p>
             <a:pPr algn="ctr"/>
             <a:r>
-              <a:rPr lang="en-GB" dirty="0"/>
-              <a:t>(non parametric) </a:t>
+              <a:rPr lang="en-GB" noProof="0" dirty="0"/>
+              <a:t>(non-parametric) </a:t>
             </a:r>
           </a:p>
         </p:txBody>
@@ -9464,7 +9447,7 @@
           <a:lstStyle/>
           <a:p>
             <a:r>
-              <a:rPr lang="en-GB" dirty="0"/>
+              <a:rPr lang="en-GB" noProof="0" dirty="0"/>
               <a:t>P-value&lt;0.1</a:t>
             </a:r>
           </a:p>
@@ -9522,7 +9505,7 @@
           <a:lstStyle/>
           <a:p>
             <a:r>
-              <a:rPr lang="en-GB" dirty="0"/>
+              <a:rPr lang="en-GB" noProof="0" dirty="0"/>
               <a:t>Seasonality tests (cont.)</a:t>
             </a:r>
           </a:p>
@@ -9550,10 +9533,10 @@
           <a:lstStyle/>
           <a:p>
             <a:fld id="{71CC62B1-FA1F-4849-B719-012F8D8A46B3}" type="slidenum">
-              <a:rPr lang="en-GB" smtClean="0"/>
+              <a:rPr lang="en-GB" noProof="0" smtClean="0"/>
               <a:t>6</a:t>
             </a:fld>
-            <a:endParaRPr lang="en-GB"/>
+            <a:endParaRPr lang="en-GB" noProof="0" dirty="0"/>
           </a:p>
         </p:txBody>
       </p:sp>
@@ -9586,21 +9569,21 @@
           <a:lstStyle/>
           <a:p>
             <a:r>
-              <a:rPr lang="en-GB" sz="2400" dirty="0"/>
+              <a:rPr lang="en-GB" sz="2400" noProof="0" dirty="0"/>
               <a:t>Spectral diagnostics</a:t>
             </a:r>
           </a:p>
           <a:p>
             <a:pPr lvl="1"/>
             <a:r>
-              <a:rPr lang="en-GB" sz="2000" b="1" dirty="0"/>
+              <a:rPr lang="en-GB" sz="2000" b="1" noProof="0" dirty="0"/>
               <a:t>Spectral peaks (X13-like)</a:t>
             </a:r>
           </a:p>
           <a:p>
             <a:pPr lvl="2"/>
             <a:r>
-              <a:rPr lang="en-US" sz="2000" dirty="0">
+              <a:rPr lang="en-GB" sz="2000" noProof="0" dirty="0">
                 <a:effectLst/>
                 <a:latin typeface="Calibri" panose="020F0502020204030204" pitchFamily="34" charset="0"/>
                 <a:ea typeface="Times New Roman" panose="02020603050405020304" pitchFamily="18" charset="0"/>
@@ -9608,12 +9591,12 @@
               </a:rPr>
               <a:t>Based on the spectrum of a long auto-regressive model that fits the series (see X13 documentation)</a:t>
             </a:r>
-            <a:endParaRPr lang="en-GB" sz="1800" dirty="0"/>
+            <a:endParaRPr lang="en-GB" sz="1800" noProof="0" dirty="0"/>
           </a:p>
           <a:p>
             <a:pPr lvl="1"/>
             <a:r>
-              <a:rPr lang="en-GB" sz="2000" b="1" dirty="0"/>
+              <a:rPr lang="en-GB" sz="2000" b="1" noProof="0" dirty="0"/>
               <a:t>Periodogram</a:t>
             </a:r>
           </a:p>
@@ -9627,7 +9610,7 @@
               </a:spcAft>
             </a:pPr>
             <a:r>
-              <a:rPr lang="en-US" sz="2000" dirty="0">
+              <a:rPr lang="en-GB" sz="2000" noProof="0" dirty="0">
                 <a:effectLst/>
                 <a:latin typeface="Calibri" panose="020F0502020204030204" pitchFamily="34" charset="0"/>
                 <a:ea typeface="Times New Roman" panose="02020603050405020304" pitchFamily="18" charset="0"/>
@@ -9646,7 +9629,7 @@
               </a:spcAft>
             </a:pPr>
             <a:r>
-              <a:rPr lang="en-US" sz="1600" u="sng" dirty="0">
+              <a:rPr lang="en-GB" sz="1600" u="sng" noProof="0" dirty="0">
                 <a:latin typeface="Calibri" panose="020F0502020204030204" pitchFamily="34" charset="0"/>
                 <a:ea typeface="Times New Roman" panose="02020603050405020304" pitchFamily="18" charset="0"/>
                 <a:cs typeface="Times New Roman" panose="02020603050405020304" pitchFamily="18" charset="0"/>
@@ -9654,7 +9637,7 @@
               <a:t>maximum</a:t>
             </a:r>
             <a:r>
-              <a:rPr lang="en-US" sz="1600" dirty="0">
+              <a:rPr lang="en-GB" sz="1600" noProof="0" dirty="0">
                 <a:latin typeface="Calibri" panose="020F0502020204030204" pitchFamily="34" charset="0"/>
                 <a:ea typeface="Times New Roman" panose="02020603050405020304" pitchFamily="18" charset="0"/>
                 <a:cs typeface="Times New Roman" panose="02020603050405020304" pitchFamily="18" charset="0"/>
@@ -9672,7 +9655,7 @@
               </a:spcAft>
             </a:pPr>
             <a:r>
-              <a:rPr lang="en-US" sz="1600" u="sng" dirty="0">
+              <a:rPr lang="en-GB" sz="1600" u="sng" noProof="0" dirty="0">
                 <a:latin typeface="Calibri" panose="020F0502020204030204" pitchFamily="34" charset="0"/>
                 <a:ea typeface="Times New Roman" panose="02020603050405020304" pitchFamily="18" charset="0"/>
                 <a:cs typeface="Times New Roman" panose="02020603050405020304" pitchFamily="18" charset="0"/>
@@ -9680,14 +9663,14 @@
               <a:t>sum</a:t>
             </a:r>
             <a:r>
-              <a:rPr lang="en-US" sz="1600" dirty="0">
+              <a:rPr lang="en-GB" sz="1600" noProof="0" dirty="0">
                 <a:latin typeface="Calibri" panose="020F0502020204030204" pitchFamily="34" charset="0"/>
                 <a:ea typeface="Times New Roman" panose="02020603050405020304" pitchFamily="18" charset="0"/>
                 <a:cs typeface="Times New Roman" panose="02020603050405020304" pitchFamily="18" charset="0"/>
               </a:rPr>
               <a:t> of the values of the periodogram on or around the seasonal frequencies</a:t>
             </a:r>
-            <a:endParaRPr lang="en-US" sz="1600" dirty="0">
+            <a:endParaRPr lang="en-GB" sz="1600" noProof="0" dirty="0">
               <a:effectLst/>
               <a:latin typeface="Calibri" panose="020F0502020204030204" pitchFamily="34" charset="0"/>
               <a:ea typeface="Times New Roman" panose="02020603050405020304" pitchFamily="18" charset="0"/>
@@ -9704,7 +9687,7 @@
               </a:spcAft>
             </a:pPr>
             <a:r>
-              <a:rPr lang="en-US" sz="2000" dirty="0">
+              <a:rPr lang="en-GB" sz="2000" noProof="0" dirty="0">
                 <a:effectLst/>
                 <a:latin typeface="Calibri" panose="020F0502020204030204" pitchFamily="34" charset="0"/>
                 <a:ea typeface="Times New Roman" panose="02020603050405020304" pitchFamily="18" charset="0"/>
@@ -9712,25 +9695,19 @@
               </a:rPr>
               <a:t>Strictly speaking, only valid against the hypothesis that the (transformed) series is a white noise. As the spectral peaks, they don’t perform well for short series.</a:t>
             </a:r>
-            <a:endParaRPr lang="fr-BE" sz="2000" dirty="0">
-              <a:effectLst/>
-              <a:latin typeface="Calibri" panose="020F0502020204030204" pitchFamily="34" charset="0"/>
-              <a:ea typeface="Times New Roman" panose="02020603050405020304" pitchFamily="18" charset="0"/>
-              <a:cs typeface="Times New Roman" panose="02020603050405020304" pitchFamily="18" charset="0"/>
-            </a:endParaRPr>
           </a:p>
           <a:p>
             <a:pPr lvl="1"/>
-            <a:endParaRPr lang="en-GB" dirty="0"/>
-          </a:p>
-          <a:p>
-            <a:endParaRPr lang="en-GB" dirty="0"/>
+            <a:endParaRPr lang="en-GB" noProof="0" dirty="0"/>
+          </a:p>
+          <a:p>
+            <a:endParaRPr lang="en-GB" noProof="0" dirty="0"/>
           </a:p>
           <a:p>
             <a:pPr marL="457200" lvl="1" indent="0">
               <a:buNone/>
             </a:pPr>
-            <a:endParaRPr lang="en-GB" dirty="0"/>
+            <a:endParaRPr lang="en-GB" noProof="0" dirty="0"/>
           </a:p>
         </p:txBody>
       </p:sp>
@@ -9761,7 +9738,7 @@
           <a:lstStyle/>
           <a:p>
             <a:r>
-              <a:rPr lang="en-GB"/>
+              <a:rPr lang="en-GB" noProof="0" dirty="0"/>
               <a:t>Seasonality and trading days tests</a:t>
             </a:r>
           </a:p>
@@ -9819,7 +9796,7 @@
           <a:lstStyle/>
           <a:p>
             <a:r>
-              <a:rPr lang="en-GB" dirty="0"/>
+              <a:rPr lang="en-GB" noProof="0" dirty="0"/>
               <a:t>Seasonality tests (cont.)</a:t>
             </a:r>
           </a:p>
@@ -9847,10 +9824,10 @@
           <a:lstStyle/>
           <a:p>
             <a:fld id="{71CC62B1-FA1F-4849-B719-012F8D8A46B3}" type="slidenum">
-              <a:rPr lang="en-GB" smtClean="0"/>
+              <a:rPr lang="en-GB" noProof="0" smtClean="0"/>
               <a:t>7</a:t>
             </a:fld>
-            <a:endParaRPr lang="en-GB"/>
+            <a:endParaRPr lang="en-GB" noProof="0" dirty="0"/>
           </a:p>
         </p:txBody>
       </p:sp>
@@ -9883,14 +9860,14 @@
           <a:lstStyle/>
           <a:p>
             <a:r>
-              <a:rPr lang="en-GB" sz="2800" b="1" dirty="0"/>
+              <a:rPr lang="en-GB" sz="2800" b="1" noProof="0" dirty="0"/>
               <a:t>Canova-Hansen test (R only)</a:t>
             </a:r>
           </a:p>
           <a:p>
             <a:pPr lvl="1"/>
             <a:r>
-              <a:rPr lang="en-GB" sz="2400" b="0" i="0" dirty="0">
+              <a:rPr lang="en-GB" sz="2400" b="0" i="0" noProof="0" dirty="0">
                 <a:solidFill>
                   <a:srgbClr val="000000"/>
                 </a:solidFill>
@@ -9900,7 +9877,7 @@
               <a:t>test the stability of </a:t>
             </a:r>
             <a:r>
-              <a:rPr lang="en-GB" sz="2400" dirty="0">
+              <a:rPr lang="en-GB" sz="2400" noProof="0" dirty="0">
                 <a:solidFill>
                   <a:srgbClr val="000000"/>
                 </a:solidFill>
@@ -9912,7 +9889,7 @@
           <a:p>
             <a:pPr lvl="1"/>
             <a:r>
-              <a:rPr lang="en-GB" sz="2400" b="0" i="0" dirty="0">
+              <a:rPr lang="en-GB" sz="2400" b="0" i="0" noProof="0" dirty="0">
                 <a:solidFill>
                   <a:srgbClr val="000000"/>
                 </a:solidFill>
@@ -9925,7 +9902,7 @@
           <a:p>
             <a:pPr lvl="1"/>
             <a:r>
-              <a:rPr lang="en-GB" sz="2400" dirty="0">
+              <a:rPr lang="en-GB" sz="2400" noProof="0" dirty="0">
                 <a:solidFill>
                   <a:srgbClr val="000000"/>
                 </a:solidFill>
@@ -9937,7 +9914,7 @@
           <a:p>
             <a:pPr lvl="1"/>
             <a:r>
-              <a:rPr lang="en-GB" sz="2400" dirty="0">
+              <a:rPr lang="en-GB" sz="2400" noProof="0" dirty="0">
                 <a:solidFill>
                   <a:srgbClr val="000000"/>
                 </a:solidFill>
@@ -9948,20 +9925,20 @@
           </a:p>
           <a:p>
             <a:pPr lvl="1"/>
-            <a:endParaRPr lang="en-GB" b="1" dirty="0"/>
+            <a:endParaRPr lang="en-GB" b="1" noProof="0" dirty="0"/>
           </a:p>
           <a:p>
             <a:pPr lvl="1"/>
-            <a:endParaRPr lang="en-GB" dirty="0"/>
-          </a:p>
-          <a:p>
-            <a:endParaRPr lang="en-GB" dirty="0"/>
+            <a:endParaRPr lang="en-GB" noProof="0" dirty="0"/>
+          </a:p>
+          <a:p>
+            <a:endParaRPr lang="en-GB" noProof="0" dirty="0"/>
           </a:p>
           <a:p>
             <a:pPr marL="457200" lvl="1" indent="0">
               <a:buNone/>
             </a:pPr>
-            <a:endParaRPr lang="en-GB" dirty="0"/>
+            <a:endParaRPr lang="en-GB" noProof="0" dirty="0"/>
           </a:p>
         </p:txBody>
       </p:sp>
@@ -9992,7 +9969,7 @@
           <a:lstStyle/>
           <a:p>
             <a:r>
-              <a:rPr lang="en-GB"/>
+              <a:rPr lang="en-GB" noProof="0" dirty="0"/>
               <a:t>Seasonality and trading days tests</a:t>
             </a:r>
           </a:p>
@@ -10050,7 +10027,7 @@
           <a:lstStyle/>
           <a:p>
             <a:r>
-              <a:rPr lang="en-GB" dirty="0"/>
+              <a:rPr lang="en-GB" noProof="0" dirty="0"/>
               <a:t>Trading days tests</a:t>
             </a:r>
           </a:p>
@@ -10078,15 +10055,15 @@
           <a:lstStyle/>
           <a:p>
             <a:fld id="{71CC62B1-FA1F-4849-B719-012F8D8A46B3}" type="slidenum">
-              <a:rPr lang="en-GB" smtClean="0"/>
+              <a:rPr lang="en-GB" noProof="0" smtClean="0"/>
               <a:t>8</a:t>
             </a:fld>
-            <a:endParaRPr lang="en-GB"/>
+            <a:endParaRPr lang="en-GB" noProof="0" dirty="0"/>
           </a:p>
         </p:txBody>
       </p:sp>
-      <mc:AlternateContent xmlns:mc="http://schemas.openxmlformats.org/markup-compatibility/2006" xmlns:a14="http://schemas.microsoft.com/office/drawing/2010/main">
-        <mc:Choice Requires="a14">
+      <mc:AlternateContent xmlns:mc="http://schemas.openxmlformats.org/markup-compatibility/2006">
+        <mc:Choice xmlns:a14="http://schemas.microsoft.com/office/drawing/2010/main" Requires="a14">
           <p:sp>
             <p:nvSpPr>
               <p:cNvPr id="3" name="Content Placeholder 2">
@@ -10114,18 +10091,18 @@
               <a:lstStyle/>
               <a:p>
                 <a:r>
-                  <a:rPr lang="en-GB" sz="2800" b="1" dirty="0"/>
+                  <a:rPr lang="en-GB" sz="2800" b="1" noProof="0" dirty="0"/>
                   <a:t>F test </a:t>
                 </a:r>
                 <a:r>
-                  <a:rPr lang="en-GB" sz="2800" dirty="0"/>
+                  <a:rPr lang="en-GB" sz="2800" noProof="0" dirty="0"/>
                   <a:t>on default trading days variables (contrasts)</a:t>
                 </a:r>
               </a:p>
               <a:p>
                 <a:pPr lvl="1"/>
                 <a:r>
-                  <a:rPr lang="en-GB" sz="2400" dirty="0"/>
+                  <a:rPr lang="en-GB" sz="2400" noProof="0" dirty="0"/>
                   <a:t>Regression test with trading days contrasts (</a:t>
                 </a:r>
                 <a14:m>
@@ -10133,14 +10110,14 @@
                     <m:sSub>
                       <m:sSubPr>
                         <m:ctrlPr>
-                          <a:rPr lang="fr-BE" sz="2400" b="0" i="1" smtClean="0">
+                          <a:rPr lang="en-GB" sz="2400" b="0" i="1" noProof="0" smtClean="0">
                             <a:latin typeface="Cambria Math" panose="02040503050406030204" pitchFamily="18" charset="0"/>
                           </a:rPr>
                         </m:ctrlPr>
                       </m:sSubPr>
                       <m:e>
                         <m:r>
-                          <a:rPr lang="fr-BE" sz="2400" b="0" i="1" smtClean="0">
+                          <a:rPr lang="en-GB" sz="2400" b="0" i="1" noProof="0" smtClean="0">
                             <a:latin typeface="Cambria Math" panose="02040503050406030204" pitchFamily="18" charset="0"/>
                           </a:rPr>
                           <m:t>𝑇𝐷</m:t>
@@ -10148,7 +10125,7 @@
                       </m:e>
                       <m:sub>
                         <m:r>
-                          <a:rPr lang="fr-BE" sz="2400" b="0" i="1" smtClean="0">
+                          <a:rPr lang="en-GB" sz="2400" b="0" i="1" noProof="0" smtClean="0">
                             <a:latin typeface="Cambria Math" panose="02040503050406030204" pitchFamily="18" charset="0"/>
                           </a:rPr>
                           <m:t>𝑡</m:t>
@@ -10158,7 +10135,7 @@
                   </m:oMath>
                 </a14:m>
                 <a:r>
-                  <a:rPr lang="en-GB" sz="2400" dirty="0"/>
+                  <a:rPr lang="en-GB" sz="2400" noProof="0" dirty="0"/>
                   <a:t>) and different models</a:t>
                 </a:r>
               </a:p>
@@ -10169,14 +10146,14 @@
                     <m:sSub>
                       <m:sSubPr>
                         <m:ctrlPr>
-                          <a:rPr lang="fr-BE" sz="2000" b="0" i="1" smtClean="0">
+                          <a:rPr lang="en-GB" sz="2000" b="0" i="1" noProof="0" smtClean="0">
                             <a:latin typeface="Cambria Math" panose="02040503050406030204" pitchFamily="18" charset="0"/>
                           </a:rPr>
                         </m:ctrlPr>
                       </m:sSubPr>
                       <m:e>
                         <m:r>
-                          <a:rPr lang="fr-BE" sz="2000" b="0" i="1" smtClean="0">
+                          <a:rPr lang="en-GB" sz="2000" b="0" i="1" noProof="0" smtClean="0">
                             <a:latin typeface="Cambria Math" panose="02040503050406030204" pitchFamily="18" charset="0"/>
                           </a:rPr>
                           <m:t>𝑦</m:t>
@@ -10184,7 +10161,7 @@
                       </m:e>
                       <m:sub>
                         <m:r>
-                          <a:rPr lang="fr-BE" sz="2000" b="0" i="1" smtClean="0">
+                          <a:rPr lang="en-GB" sz="2000" b="0" i="1" noProof="0" smtClean="0">
                             <a:latin typeface="Cambria Math" panose="02040503050406030204" pitchFamily="18" charset="0"/>
                           </a:rPr>
                           <m:t>𝑡</m:t>
@@ -10192,27 +10169,27 @@
                       </m:sub>
                     </m:sSub>
                     <m:r>
-                      <a:rPr lang="fr-BE" sz="2000" b="0" i="1" smtClean="0">
+                      <a:rPr lang="en-GB" sz="2000" b="0" i="1" noProof="0" smtClean="0">
                         <a:latin typeface="Cambria Math" panose="02040503050406030204" pitchFamily="18" charset="0"/>
                       </a:rPr>
                       <m:t>=</m:t>
                     </m:r>
                     <m:r>
-                      <a:rPr lang="fr-BE" sz="2000" b="0" i="1" smtClean="0">
+                      <a:rPr lang="en-GB" sz="2000" b="0" i="1" noProof="0" smtClean="0">
                         <a:latin typeface="Cambria Math" panose="02040503050406030204" pitchFamily="18" charset="0"/>
                         <a:ea typeface="Cambria Math" panose="02040503050406030204" pitchFamily="18" charset="0"/>
                       </a:rPr>
                       <m:t>𝛼</m:t>
                     </m:r>
                     <m:r>
-                      <a:rPr lang="fr-BE" sz="2000" b="0" i="1" smtClean="0">
+                      <a:rPr lang="en-GB" sz="2000" b="0" i="1" noProof="0" smtClean="0">
                         <a:latin typeface="Cambria Math" panose="02040503050406030204" pitchFamily="18" charset="0"/>
                         <a:ea typeface="Cambria Math" panose="02040503050406030204" pitchFamily="18" charset="0"/>
                       </a:rPr>
                       <m:t>+</m:t>
                     </m:r>
                     <m:r>
-                      <a:rPr lang="fr-BE" sz="2000" b="0" i="1" smtClean="0">
+                      <a:rPr lang="en-GB" sz="2000" b="0" i="1" noProof="0" smtClean="0">
                         <a:latin typeface="Cambria Math" panose="02040503050406030204" pitchFamily="18" charset="0"/>
                         <a:ea typeface="Cambria Math" panose="02040503050406030204" pitchFamily="18" charset="0"/>
                       </a:rPr>
@@ -10221,14 +10198,14 @@
                     <m:sSub>
                       <m:sSubPr>
                         <m:ctrlPr>
-                          <a:rPr lang="fr-BE" sz="2000" i="1">
+                          <a:rPr lang="en-GB" sz="2000" i="1" noProof="0" smtClean="0">
                             <a:latin typeface="Cambria Math" panose="02040503050406030204" pitchFamily="18" charset="0"/>
                           </a:rPr>
                         </m:ctrlPr>
                       </m:sSubPr>
                       <m:e>
                         <m:r>
-                          <a:rPr lang="fr-BE" sz="2000" i="1">
+                          <a:rPr lang="en-GB" sz="2000" i="1" noProof="0" smtClean="0">
                             <a:latin typeface="Cambria Math" panose="02040503050406030204" pitchFamily="18" charset="0"/>
                           </a:rPr>
                           <m:t>𝑦</m:t>
@@ -10236,13 +10213,13 @@
                       </m:e>
                       <m:sub>
                         <m:r>
-                          <a:rPr lang="fr-BE" sz="2000" i="1">
+                          <a:rPr lang="en-GB" sz="2000" i="1" noProof="0" smtClean="0">
                             <a:latin typeface="Cambria Math" panose="02040503050406030204" pitchFamily="18" charset="0"/>
                           </a:rPr>
                           <m:t>𝑡</m:t>
                         </m:r>
                         <m:r>
-                          <a:rPr lang="fr-BE" sz="2000" b="0" i="1" smtClean="0">
+                          <a:rPr lang="en-GB" sz="2000" b="0" i="1" noProof="0" smtClean="0">
                             <a:latin typeface="Cambria Math" panose="02040503050406030204" pitchFamily="18" charset="0"/>
                           </a:rPr>
                           <m:t>−1</m:t>
@@ -10250,7 +10227,7 @@
                       </m:sub>
                     </m:sSub>
                     <m:r>
-                      <a:rPr lang="fr-BE" sz="2000" b="0" i="1" smtClean="0">
+                      <a:rPr lang="en-GB" sz="2000" b="0" i="1" noProof="0" smtClean="0">
                         <a:latin typeface="Cambria Math" panose="02040503050406030204" pitchFamily="18" charset="0"/>
                       </a:rPr>
                       <m:t>+</m:t>
@@ -10258,14 +10235,14 @@
                     <m:sSub>
                       <m:sSubPr>
                         <m:ctrlPr>
-                          <a:rPr lang="fr-BE" sz="2000" b="0" i="1" smtClean="0">
+                          <a:rPr lang="en-GB" sz="2000" b="0" i="1" noProof="0" smtClean="0">
                             <a:latin typeface="Cambria Math" panose="02040503050406030204" pitchFamily="18" charset="0"/>
                           </a:rPr>
                         </m:ctrlPr>
                       </m:sSubPr>
                       <m:e>
                         <m:r>
-                          <a:rPr lang="fr-BE" sz="2000" b="0" i="1" smtClean="0">
+                          <a:rPr lang="en-GB" sz="2000" b="0" i="1" noProof="0" smtClean="0">
                             <a:latin typeface="Cambria Math" panose="02040503050406030204" pitchFamily="18" charset="0"/>
                           </a:rPr>
                           <m:t>𝑇𝐷</m:t>
@@ -10273,7 +10250,7 @@
                       </m:e>
                       <m:sub>
                         <m:r>
-                          <a:rPr lang="fr-BE" sz="2000" b="0" i="1" smtClean="0">
+                          <a:rPr lang="en-GB" sz="2000" b="0" i="1" noProof="0" smtClean="0">
                             <a:latin typeface="Cambria Math" panose="02040503050406030204" pitchFamily="18" charset="0"/>
                           </a:rPr>
                           <m:t>𝑡</m:t>
@@ -10281,14 +10258,14 @@
                       </m:sub>
                     </m:sSub>
                     <m:r>
-                      <a:rPr lang="fr-BE" sz="2000" b="0" i="1" smtClean="0">
+                      <a:rPr lang="en-GB" sz="2000" b="0" i="1" noProof="0" smtClean="0">
                         <a:latin typeface="Cambria Math" panose="02040503050406030204" pitchFamily="18" charset="0"/>
                         <a:ea typeface="Cambria Math" panose="02040503050406030204" pitchFamily="18" charset="0"/>
                       </a:rPr>
                       <m:t>𝛽</m:t>
                     </m:r>
                     <m:r>
-                      <a:rPr lang="fr-BE" sz="2000" b="0" i="1" smtClean="0">
+                      <a:rPr lang="en-GB" sz="2000" b="0" i="1" noProof="0" smtClean="0">
                         <a:latin typeface="Cambria Math" panose="02040503050406030204" pitchFamily="18" charset="0"/>
                         <a:ea typeface="Cambria Math" panose="02040503050406030204" pitchFamily="18" charset="0"/>
                       </a:rPr>
@@ -10297,7 +10274,7 @@
                     <m:sSub>
                       <m:sSubPr>
                         <m:ctrlPr>
-                          <a:rPr lang="fr-BE" sz="2000" b="0" i="1" smtClean="0">
+                          <a:rPr lang="en-GB" sz="2000" b="0" i="1" noProof="0" smtClean="0">
                             <a:latin typeface="Cambria Math" panose="02040503050406030204" pitchFamily="18" charset="0"/>
                             <a:ea typeface="Cambria Math" panose="02040503050406030204" pitchFamily="18" charset="0"/>
                           </a:rPr>
@@ -10305,7 +10282,7 @@
                       </m:sSubPr>
                       <m:e>
                         <m:r>
-                          <a:rPr lang="fr-BE" sz="2000" b="0" i="1" smtClean="0">
+                          <a:rPr lang="en-GB" sz="2000" b="0" i="1" noProof="0" smtClean="0">
                             <a:latin typeface="Cambria Math" panose="02040503050406030204" pitchFamily="18" charset="0"/>
                             <a:ea typeface="Cambria Math" panose="02040503050406030204" pitchFamily="18" charset="0"/>
                           </a:rPr>
@@ -10314,7 +10291,7 @@
                       </m:e>
                       <m:sub>
                         <m:r>
-                          <a:rPr lang="fr-BE" sz="2000" b="0" i="1" smtClean="0">
+                          <a:rPr lang="en-GB" sz="2000" b="0" i="1" noProof="0" smtClean="0">
                             <a:latin typeface="Cambria Math" panose="02040503050406030204" pitchFamily="18" charset="0"/>
                             <a:ea typeface="Cambria Math" panose="02040503050406030204" pitchFamily="18" charset="0"/>
                           </a:rPr>
@@ -10325,7 +10302,7 @@
                   </m:oMath>
                 </a14:m>
                 <a:r>
-                  <a:rPr lang="en-GB" sz="2000" dirty="0"/>
+                  <a:rPr lang="en-GB" sz="2000" noProof="0" dirty="0"/>
                   <a:t>		(2.2.x)</a:t>
                 </a:r>
               </a:p>
@@ -10336,14 +10313,14 @@
                     <m:sSub>
                       <m:sSubPr>
                         <m:ctrlPr>
-                          <a:rPr lang="fr-BE" sz="2000" b="0" i="1" smtClean="0">
+                          <a:rPr lang="en-GB" sz="2000" b="0" i="1" noProof="0" smtClean="0">
                             <a:latin typeface="Cambria Math" panose="02040503050406030204" pitchFamily="18" charset="0"/>
                           </a:rPr>
                         </m:ctrlPr>
                       </m:sSubPr>
                       <m:e>
                         <m:r>
-                          <a:rPr lang="fr-BE" sz="2000" b="0" i="1" smtClean="0">
+                          <a:rPr lang="en-GB" sz="2000" b="0" i="1" noProof="0" smtClean="0">
                             <a:latin typeface="Cambria Math" panose="02040503050406030204" pitchFamily="18" charset="0"/>
                           </a:rPr>
                           <m:t>𝑦</m:t>
@@ -10351,7 +10328,7 @@
                       </m:e>
                       <m:sub>
                         <m:r>
-                          <a:rPr lang="fr-BE" sz="2000" b="0" i="1" smtClean="0">
+                          <a:rPr lang="en-GB" sz="2000" b="0" i="1" noProof="0" smtClean="0">
                             <a:latin typeface="Cambria Math" panose="02040503050406030204" pitchFamily="18" charset="0"/>
                           </a:rPr>
                           <m:t>𝑡</m:t>
@@ -10359,7 +10336,7 @@
                       </m:sub>
                     </m:sSub>
                     <m:r>
-                      <a:rPr lang="fr-BE" sz="2000" b="0" i="1" smtClean="0">
+                      <a:rPr lang="en-GB" sz="2000" b="0" i="1" noProof="0" smtClean="0">
                         <a:latin typeface="Cambria Math" panose="02040503050406030204" pitchFamily="18" charset="0"/>
                       </a:rPr>
                       <m:t>−</m:t>
@@ -10367,14 +10344,14 @@
                     <m:sSub>
                       <m:sSubPr>
                         <m:ctrlPr>
-                          <a:rPr lang="fr-BE" sz="2000" i="1">
+                          <a:rPr lang="en-GB" sz="2000" i="1" noProof="0" smtClean="0">
                             <a:latin typeface="Cambria Math" panose="02040503050406030204" pitchFamily="18" charset="0"/>
                           </a:rPr>
                         </m:ctrlPr>
                       </m:sSubPr>
                       <m:e>
                         <m:r>
-                          <a:rPr lang="fr-BE" sz="2000" i="1">
+                          <a:rPr lang="en-GB" sz="2000" i="1" noProof="0" smtClean="0">
                             <a:latin typeface="Cambria Math" panose="02040503050406030204" pitchFamily="18" charset="0"/>
                           </a:rPr>
                           <m:t>𝑦</m:t>
@@ -10382,13 +10359,13 @@
                       </m:e>
                       <m:sub>
                         <m:r>
-                          <a:rPr lang="fr-BE" sz="2000" i="1">
+                          <a:rPr lang="en-GB" sz="2000" i="1" noProof="0" smtClean="0">
                             <a:latin typeface="Cambria Math" panose="02040503050406030204" pitchFamily="18" charset="0"/>
                           </a:rPr>
                           <m:t>𝑡</m:t>
                         </m:r>
                         <m:r>
-                          <a:rPr lang="fr-BE" sz="2000" b="0" i="1" smtClean="0">
+                          <a:rPr lang="en-GB" sz="2000" b="0" i="1" noProof="0" smtClean="0">
                             <a:latin typeface="Cambria Math" panose="02040503050406030204" pitchFamily="18" charset="0"/>
                           </a:rPr>
                           <m:t>−1</m:t>
@@ -10396,20 +10373,20 @@
                       </m:sub>
                     </m:sSub>
                     <m:r>
-                      <a:rPr lang="fr-BE" sz="2000" b="0" i="1" smtClean="0">
+                      <a:rPr lang="en-GB" sz="2000" b="0" i="1" noProof="0" smtClean="0">
                         <a:latin typeface="Cambria Math" panose="02040503050406030204" pitchFamily="18" charset="0"/>
                       </a:rPr>
                       <m:t>=</m:t>
                     </m:r>
                     <m:r>
-                      <a:rPr lang="fr-BE" sz="2000" b="0" i="1" smtClean="0">
+                      <a:rPr lang="en-GB" sz="2000" b="0" i="1" noProof="0" smtClean="0">
                         <a:latin typeface="Cambria Math" panose="02040503050406030204" pitchFamily="18" charset="0"/>
                         <a:ea typeface="Cambria Math" panose="02040503050406030204" pitchFamily="18" charset="0"/>
                       </a:rPr>
                       <m:t>𝛼</m:t>
                     </m:r>
                     <m:r>
-                      <a:rPr lang="fr-BE" sz="2000" b="0" i="1" smtClean="0">
+                      <a:rPr lang="en-GB" sz="2000" b="0" i="1" noProof="0" smtClean="0">
                         <a:latin typeface="Cambria Math" panose="02040503050406030204" pitchFamily="18" charset="0"/>
                         <a:ea typeface="Cambria Math" panose="02040503050406030204" pitchFamily="18" charset="0"/>
                       </a:rPr>
@@ -10418,14 +10395,14 @@
                     <m:sSub>
                       <m:sSubPr>
                         <m:ctrlPr>
-                          <a:rPr lang="fr-BE" sz="2000" b="0" i="1" smtClean="0">
+                          <a:rPr lang="en-GB" sz="2000" b="0" i="1" noProof="0" smtClean="0">
                             <a:latin typeface="Cambria Math" panose="02040503050406030204" pitchFamily="18" charset="0"/>
                           </a:rPr>
                         </m:ctrlPr>
                       </m:sSubPr>
                       <m:e>
                         <m:r>
-                          <a:rPr lang="fr-BE" sz="2000" b="0" i="1" smtClean="0">
+                          <a:rPr lang="en-GB" sz="2000" b="0" i="1" noProof="0" smtClean="0">
                             <a:latin typeface="Cambria Math" panose="02040503050406030204" pitchFamily="18" charset="0"/>
                           </a:rPr>
                           <m:t>𝑇𝐷</m:t>
@@ -10433,7 +10410,7 @@
                       </m:e>
                       <m:sub>
                         <m:r>
-                          <a:rPr lang="fr-BE" sz="2000" b="0" i="1" smtClean="0">
+                          <a:rPr lang="en-GB" sz="2000" b="0" i="1" noProof="0" smtClean="0">
                             <a:latin typeface="Cambria Math" panose="02040503050406030204" pitchFamily="18" charset="0"/>
                           </a:rPr>
                           <m:t>𝑡</m:t>
@@ -10441,14 +10418,14 @@
                       </m:sub>
                     </m:sSub>
                     <m:r>
-                      <a:rPr lang="fr-BE" sz="2000" b="0" i="1" smtClean="0">
+                      <a:rPr lang="en-GB" sz="2000" b="0" i="1" noProof="0" smtClean="0">
                         <a:latin typeface="Cambria Math" panose="02040503050406030204" pitchFamily="18" charset="0"/>
                         <a:ea typeface="Cambria Math" panose="02040503050406030204" pitchFamily="18" charset="0"/>
                       </a:rPr>
                       <m:t>𝛽</m:t>
                     </m:r>
                     <m:r>
-                      <a:rPr lang="fr-BE" sz="2000" b="0" i="1" smtClean="0">
+                      <a:rPr lang="en-GB" sz="2000" b="0" i="1" noProof="0" smtClean="0">
                         <a:latin typeface="Cambria Math" panose="02040503050406030204" pitchFamily="18" charset="0"/>
                         <a:ea typeface="Cambria Math" panose="02040503050406030204" pitchFamily="18" charset="0"/>
                       </a:rPr>
@@ -10457,7 +10434,7 @@
                     <m:sSub>
                       <m:sSubPr>
                         <m:ctrlPr>
-                          <a:rPr lang="fr-BE" sz="2000" b="0" i="1" smtClean="0">
+                          <a:rPr lang="en-GB" sz="2000" b="0" i="1" noProof="0" smtClean="0">
                             <a:latin typeface="Cambria Math" panose="02040503050406030204" pitchFamily="18" charset="0"/>
                             <a:ea typeface="Cambria Math" panose="02040503050406030204" pitchFamily="18" charset="0"/>
                           </a:rPr>
@@ -10465,7 +10442,7 @@
                       </m:sSubPr>
                       <m:e>
                         <m:r>
-                          <a:rPr lang="fr-BE" sz="2000" b="0" i="1" smtClean="0">
+                          <a:rPr lang="en-GB" sz="2000" b="0" i="1" noProof="0" smtClean="0">
                             <a:latin typeface="Cambria Math" panose="02040503050406030204" pitchFamily="18" charset="0"/>
                             <a:ea typeface="Cambria Math" panose="02040503050406030204" pitchFamily="18" charset="0"/>
                           </a:rPr>
@@ -10474,7 +10451,7 @@
                       </m:e>
                       <m:sub>
                         <m:r>
-                          <a:rPr lang="fr-BE" sz="2000" b="0" i="1" smtClean="0">
+                          <a:rPr lang="en-GB" sz="2000" b="0" i="1" noProof="0" smtClean="0">
                             <a:latin typeface="Cambria Math" panose="02040503050406030204" pitchFamily="18" charset="0"/>
                             <a:ea typeface="Cambria Math" panose="02040503050406030204" pitchFamily="18" charset="0"/>
                           </a:rPr>
@@ -10485,7 +10462,7 @@
                   </m:oMath>
                 </a14:m>
                 <a:r>
-                  <a:rPr lang="en-GB" sz="2000" dirty="0"/>
+                  <a:rPr lang="en-GB" sz="2000" noProof="0" dirty="0"/>
                   <a:t> 		(2.2.x)</a:t>
                 </a:r>
               </a:p>
@@ -10494,14 +10471,14 @@
                 <a14:m>
                   <m:oMath xmlns:m="http://schemas.openxmlformats.org/officeDocument/2006/math">
                     <m:r>
-                      <a:rPr lang="en-GB" sz="2000" i="1" smtClean="0">
+                      <a:rPr lang="en-GB" sz="2000" i="1" noProof="0" smtClean="0">
                         <a:latin typeface="Cambria Math" panose="02040503050406030204" pitchFamily="18" charset="0"/>
                         <a:ea typeface="Cambria Math" panose="02040503050406030204" pitchFamily="18" charset="0"/>
                       </a:rPr>
                       <m:t>∆</m:t>
                     </m:r>
                     <m:r>
-                      <a:rPr lang="fr-BE" sz="2000" b="0" i="1" smtClean="0">
+                      <a:rPr lang="en-GB" sz="2000" b="0" i="1" noProof="0" smtClean="0">
                         <a:latin typeface="Cambria Math" panose="02040503050406030204" pitchFamily="18" charset="0"/>
                         <a:ea typeface="Cambria Math" panose="02040503050406030204" pitchFamily="18" charset="0"/>
                       </a:rPr>
@@ -10510,14 +10487,14 @@
                     <m:sSub>
                       <m:sSubPr>
                         <m:ctrlPr>
-                          <a:rPr lang="fr-BE" sz="2000" b="0" i="1" smtClean="0">
+                          <a:rPr lang="en-GB" sz="2000" b="0" i="1" noProof="0" smtClean="0">
                             <a:latin typeface="Cambria Math" panose="02040503050406030204" pitchFamily="18" charset="0"/>
                           </a:rPr>
                         </m:ctrlPr>
                       </m:sSubPr>
                       <m:e>
                         <m:r>
-                          <a:rPr lang="fr-BE" sz="2000" b="0" i="1" smtClean="0">
+                          <a:rPr lang="en-GB" sz="2000" b="0" i="1" noProof="0" smtClean="0">
                             <a:latin typeface="Cambria Math" panose="02040503050406030204" pitchFamily="18" charset="0"/>
                           </a:rPr>
                           <m:t>𝑦</m:t>
@@ -10525,7 +10502,7 @@
                       </m:e>
                       <m:sub>
                         <m:r>
-                          <a:rPr lang="fr-BE" sz="2000" b="0" i="1" smtClean="0">
+                          <a:rPr lang="en-GB" sz="2000" b="0" i="1" noProof="0" smtClean="0">
                             <a:latin typeface="Cambria Math" panose="02040503050406030204" pitchFamily="18" charset="0"/>
                           </a:rPr>
                           <m:t>𝑡</m:t>
@@ -10533,7 +10510,7 @@
                       </m:sub>
                     </m:sSub>
                     <m:r>
-                      <a:rPr lang="fr-BE" sz="2000" b="0" i="1" smtClean="0">
+                      <a:rPr lang="en-GB" sz="2000" b="0" i="1" noProof="0" smtClean="0">
                         <a:latin typeface="Cambria Math" panose="02040503050406030204" pitchFamily="18" charset="0"/>
                       </a:rPr>
                       <m:t>−</m:t>
@@ -10541,14 +10518,14 @@
                     <m:sSub>
                       <m:sSubPr>
                         <m:ctrlPr>
-                          <a:rPr lang="fr-BE" sz="2000" i="1">
+                          <a:rPr lang="en-GB" sz="2000" i="1" noProof="0" smtClean="0">
                             <a:latin typeface="Cambria Math" panose="02040503050406030204" pitchFamily="18" charset="0"/>
                           </a:rPr>
                         </m:ctrlPr>
                       </m:sSubPr>
                       <m:e>
                         <m:r>
-                          <a:rPr lang="fr-BE" sz="2000" i="1">
+                          <a:rPr lang="en-GB" sz="2000" i="1" noProof="0" smtClean="0">
                             <a:latin typeface="Cambria Math" panose="02040503050406030204" pitchFamily="18" charset="0"/>
                           </a:rPr>
                           <m:t>𝑇𝐷</m:t>
@@ -10556,7 +10533,7 @@
                       </m:e>
                       <m:sub>
                         <m:r>
-                          <a:rPr lang="fr-BE" sz="2000" i="1">
+                          <a:rPr lang="en-GB" sz="2000" i="1" noProof="0" smtClean="0">
                             <a:latin typeface="Cambria Math" panose="02040503050406030204" pitchFamily="18" charset="0"/>
                           </a:rPr>
                           <m:t>𝑡</m:t>
@@ -10564,33 +10541,33 @@
                       </m:sub>
                     </m:sSub>
                     <m:r>
-                      <a:rPr lang="fr-BE" sz="2000" i="1">
+                      <a:rPr lang="en-GB" sz="2000" i="1" noProof="0" smtClean="0">
                         <a:latin typeface="Cambria Math" panose="02040503050406030204" pitchFamily="18" charset="0"/>
                         <a:ea typeface="Cambria Math" panose="02040503050406030204" pitchFamily="18" charset="0"/>
                       </a:rPr>
                       <m:t>𝛽</m:t>
                     </m:r>
                     <m:r>
-                      <a:rPr lang="fr-BE" sz="2000" i="1" smtClean="0">
+                      <a:rPr lang="en-GB" sz="2000" i="1" noProof="0" smtClean="0">
                         <a:latin typeface="Cambria Math" panose="02040503050406030204" pitchFamily="18" charset="0"/>
                       </a:rPr>
                       <m:t>)</m:t>
                     </m:r>
                     <m:r>
-                      <a:rPr lang="fr-BE" sz="2000" b="0" i="1" smtClean="0">
+                      <a:rPr lang="en-GB" sz="2000" b="0" i="1" noProof="0" smtClean="0">
                         <a:latin typeface="Cambria Math" panose="02040503050406030204" pitchFamily="18" charset="0"/>
                       </a:rPr>
                       <m:t>=</m:t>
                     </m:r>
                     <m:r>
-                      <a:rPr lang="fr-BE" sz="2000" b="0" i="1" smtClean="0">
+                      <a:rPr lang="en-GB" sz="2000" b="0" i="1" noProof="0" smtClean="0">
                         <a:latin typeface="Cambria Math" panose="02040503050406030204" pitchFamily="18" charset="0"/>
                         <a:ea typeface="Cambria Math" panose="02040503050406030204" pitchFamily="18" charset="0"/>
                       </a:rPr>
                       <m:t>𝛼</m:t>
                     </m:r>
                     <m:r>
-                      <a:rPr lang="fr-BE" sz="2000" b="0" i="1" smtClean="0">
+                      <a:rPr lang="en-GB" sz="2000" b="0" i="1" noProof="0" smtClean="0">
                         <a:latin typeface="Cambria Math" panose="02040503050406030204" pitchFamily="18" charset="0"/>
                         <a:ea typeface="Cambria Math" panose="02040503050406030204" pitchFamily="18" charset="0"/>
                       </a:rPr>
@@ -10599,7 +10576,7 @@
                     <m:sSub>
                       <m:sSubPr>
                         <m:ctrlPr>
-                          <a:rPr lang="fr-BE" sz="2000" b="0" i="1" smtClean="0">
+                          <a:rPr lang="en-GB" sz="2000" b="0" i="1" noProof="0" smtClean="0">
                             <a:latin typeface="Cambria Math" panose="02040503050406030204" pitchFamily="18" charset="0"/>
                             <a:ea typeface="Cambria Math" panose="02040503050406030204" pitchFamily="18" charset="0"/>
                           </a:rPr>
@@ -10607,7 +10584,7 @@
                       </m:sSubPr>
                       <m:e>
                         <m:r>
-                          <a:rPr lang="fr-BE" sz="2000" b="0" i="1" smtClean="0">
+                          <a:rPr lang="en-GB" sz="2000" b="0" i="1" noProof="0" smtClean="0">
                             <a:latin typeface="Cambria Math" panose="02040503050406030204" pitchFamily="18" charset="0"/>
                             <a:ea typeface="Cambria Math" panose="02040503050406030204" pitchFamily="18" charset="0"/>
                           </a:rPr>
@@ -10616,7 +10593,7 @@
                       </m:e>
                       <m:sub>
                         <m:r>
-                          <a:rPr lang="fr-BE" sz="2000" b="0" i="1" smtClean="0">
+                          <a:rPr lang="en-GB" sz="2000" b="0" i="1" noProof="0" smtClean="0">
                             <a:latin typeface="Cambria Math" panose="02040503050406030204" pitchFamily="18" charset="0"/>
                             <a:ea typeface="Cambria Math" panose="02040503050406030204" pitchFamily="18" charset="0"/>
                           </a:rPr>
@@ -10627,7 +10604,7 @@
                   </m:oMath>
                 </a14:m>
                 <a:r>
-                  <a:rPr lang="en-GB" sz="2000" dirty="0"/>
+                  <a:rPr lang="en-GB" sz="2000" noProof="0" dirty="0"/>
                   <a:t>			(3.0)</a:t>
                 </a:r>
               </a:p>
@@ -10636,7 +10613,7 @@
                 <a14:m>
                   <m:oMath xmlns:m="http://schemas.openxmlformats.org/officeDocument/2006/math">
                     <m:r>
-                      <a:rPr lang="en-GB" sz="2000" i="1" smtClean="0">
+                      <a:rPr lang="en-GB" sz="2000" i="1" noProof="0" smtClean="0">
                         <a:latin typeface="Cambria Math" panose="02040503050406030204" pitchFamily="18" charset="0"/>
                         <a:ea typeface="Cambria Math" panose="02040503050406030204" pitchFamily="18" charset="0"/>
                       </a:rPr>
@@ -10645,7 +10622,7 @@
                     <m:d>
                       <m:dPr>
                         <m:ctrlPr>
-                          <a:rPr lang="fr-BE" sz="2000" b="0" i="1" smtClean="0">
+                          <a:rPr lang="en-GB" sz="2000" b="0" i="1" noProof="0" smtClean="0">
                             <a:latin typeface="Cambria Math" panose="02040503050406030204" pitchFamily="18" charset="0"/>
                           </a:rPr>
                         </m:ctrlPr>
@@ -10654,14 +10631,14 @@
                         <m:sSub>
                           <m:sSubPr>
                             <m:ctrlPr>
-                              <a:rPr lang="fr-BE" sz="2000" b="0" i="1" smtClean="0">
+                              <a:rPr lang="en-GB" sz="2000" b="0" i="1" noProof="0" smtClean="0">
                                 <a:latin typeface="Cambria Math" panose="02040503050406030204" pitchFamily="18" charset="0"/>
                               </a:rPr>
                             </m:ctrlPr>
                           </m:sSubPr>
                           <m:e>
                             <m:r>
-                              <a:rPr lang="fr-BE" sz="2000" b="0" i="1" smtClean="0">
+                              <a:rPr lang="en-GB" sz="2000" b="0" i="1" noProof="0" smtClean="0">
                                 <a:latin typeface="Cambria Math" panose="02040503050406030204" pitchFamily="18" charset="0"/>
                               </a:rPr>
                               <m:t>𝑦</m:t>
@@ -10669,7 +10646,7 @@
                           </m:e>
                           <m:sub>
                             <m:r>
-                              <a:rPr lang="fr-BE" sz="2000" b="0" i="1" smtClean="0">
+                              <a:rPr lang="en-GB" sz="2000" b="0" i="1" noProof="0" smtClean="0">
                                 <a:latin typeface="Cambria Math" panose="02040503050406030204" pitchFamily="18" charset="0"/>
                               </a:rPr>
                               <m:t>𝑡</m:t>
@@ -10677,7 +10654,7 @@
                           </m:sub>
                         </m:sSub>
                         <m:r>
-                          <a:rPr lang="fr-BE" sz="2000" b="0" i="1" smtClean="0">
+                          <a:rPr lang="en-GB" sz="2000" b="0" i="1" noProof="0" smtClean="0">
                             <a:latin typeface="Cambria Math" panose="02040503050406030204" pitchFamily="18" charset="0"/>
                           </a:rPr>
                           <m:t>−</m:t>
@@ -10685,14 +10662,14 @@
                         <m:sSub>
                           <m:sSubPr>
                             <m:ctrlPr>
-                              <a:rPr lang="fr-BE" sz="2000" i="1">
+                              <a:rPr lang="en-GB" sz="2000" i="1" noProof="0" smtClean="0">
                                 <a:latin typeface="Cambria Math" panose="02040503050406030204" pitchFamily="18" charset="0"/>
                               </a:rPr>
                             </m:ctrlPr>
                           </m:sSubPr>
                           <m:e>
                             <m:r>
-                              <a:rPr lang="fr-BE" sz="2000" i="1">
+                              <a:rPr lang="en-GB" sz="2000" i="1" noProof="0" smtClean="0">
                                 <a:latin typeface="Cambria Math" panose="02040503050406030204" pitchFamily="18" charset="0"/>
                               </a:rPr>
                               <m:t>𝑇𝐷</m:t>
@@ -10700,7 +10677,7 @@
                           </m:e>
                           <m:sub>
                             <m:r>
-                              <a:rPr lang="fr-BE" sz="2000" i="1">
+                              <a:rPr lang="en-GB" sz="2000" i="1" noProof="0" smtClean="0">
                                 <a:latin typeface="Cambria Math" panose="02040503050406030204" pitchFamily="18" charset="0"/>
                               </a:rPr>
                               <m:t>𝑡</m:t>
@@ -10708,7 +10685,7 @@
                           </m:sub>
                         </m:sSub>
                         <m:r>
-                          <a:rPr lang="fr-BE" sz="2000" i="1">
+                          <a:rPr lang="en-GB" sz="2000" i="1" noProof="0" smtClean="0">
                             <a:latin typeface="Cambria Math" panose="02040503050406030204" pitchFamily="18" charset="0"/>
                             <a:ea typeface="Cambria Math" panose="02040503050406030204" pitchFamily="18" charset="0"/>
                           </a:rPr>
@@ -10717,7 +10694,7 @@
                       </m:e>
                     </m:d>
                     <m:r>
-                      <a:rPr lang="fr-BE" sz="2000" b="0" i="1" smtClean="0">
+                      <a:rPr lang="en-GB" sz="2000" b="0" i="1" noProof="0" smtClean="0">
                         <a:latin typeface="Cambria Math" panose="02040503050406030204" pitchFamily="18" charset="0"/>
                       </a:rPr>
                       <m:t>=</m:t>
@@ -10725,7 +10702,7 @@
                     <m:sSub>
                       <m:sSubPr>
                         <m:ctrlPr>
-                          <a:rPr lang="fr-BE" sz="2000" b="0" i="1" smtClean="0">
+                          <a:rPr lang="en-GB" sz="2000" b="0" i="1" noProof="0" smtClean="0">
                             <a:latin typeface="Cambria Math" panose="02040503050406030204" pitchFamily="18" charset="0"/>
                             <a:ea typeface="Cambria Math" panose="02040503050406030204" pitchFamily="18" charset="0"/>
                           </a:rPr>
@@ -10733,7 +10710,7 @@
                       </m:sSubPr>
                       <m:e>
                         <m:r>
-                          <a:rPr lang="fr-BE" sz="2000" b="0" i="1" smtClean="0">
+                          <a:rPr lang="en-GB" sz="2000" b="0" i="1" noProof="0" smtClean="0">
                             <a:latin typeface="Cambria Math" panose="02040503050406030204" pitchFamily="18" charset="0"/>
                             <a:ea typeface="Cambria Math" panose="02040503050406030204" pitchFamily="18" charset="0"/>
                           </a:rPr>
@@ -10742,7 +10719,7 @@
                       </m:e>
                       <m:sub>
                         <m:r>
-                          <a:rPr lang="fr-BE" sz="2000" b="0" i="1" smtClean="0">
+                          <a:rPr lang="en-GB" sz="2000" b="0" i="1" noProof="0" smtClean="0">
                             <a:latin typeface="Cambria Math" panose="02040503050406030204" pitchFamily="18" charset="0"/>
                             <a:ea typeface="Cambria Math" panose="02040503050406030204" pitchFamily="18" charset="0"/>
                           </a:rPr>
@@ -10751,14 +10728,14 @@
                       </m:sub>
                     </m:sSub>
                     <m:r>
-                      <a:rPr lang="fr-BE" sz="2000" b="0" i="1" smtClean="0">
+                      <a:rPr lang="en-GB" sz="2000" b="0" i="1" noProof="0" smtClean="0">
                         <a:latin typeface="Cambria Math" panose="02040503050406030204" pitchFamily="18" charset="0"/>
                         <a:ea typeface="Cambria Math" panose="02040503050406030204" pitchFamily="18" charset="0"/>
                       </a:rPr>
                       <m:t>+</m:t>
                     </m:r>
                     <m:r>
-                      <a:rPr lang="fr-BE" sz="2000" b="0" i="1" smtClean="0">
+                      <a:rPr lang="en-GB" sz="2000" b="0" i="1" noProof="0" smtClean="0">
                         <a:latin typeface="Cambria Math" panose="02040503050406030204" pitchFamily="18" charset="0"/>
                         <a:ea typeface="Cambria Math" panose="02040503050406030204" pitchFamily="18" charset="0"/>
                       </a:rPr>
@@ -10767,7 +10744,7 @@
                     <m:sSub>
                       <m:sSubPr>
                         <m:ctrlPr>
-                          <a:rPr lang="fr-BE" sz="2000" i="1">
+                          <a:rPr lang="en-GB" sz="2000" i="1" noProof="0" smtClean="0">
                             <a:latin typeface="Cambria Math" panose="02040503050406030204" pitchFamily="18" charset="0"/>
                             <a:ea typeface="Cambria Math" panose="02040503050406030204" pitchFamily="18" charset="0"/>
                           </a:rPr>
@@ -10775,7 +10752,7 @@
                       </m:sSubPr>
                       <m:e>
                         <m:r>
-                          <a:rPr lang="fr-BE" sz="2000" i="1">
+                          <a:rPr lang="en-GB" sz="2000" i="1" noProof="0" smtClean="0">
                             <a:latin typeface="Cambria Math" panose="02040503050406030204" pitchFamily="18" charset="0"/>
                             <a:ea typeface="Cambria Math" panose="02040503050406030204" pitchFamily="18" charset="0"/>
                           </a:rPr>
@@ -10784,14 +10761,14 @@
                       </m:e>
                       <m:sub>
                         <m:r>
-                          <a:rPr lang="fr-BE" sz="2000" i="1">
+                          <a:rPr lang="en-GB" sz="2000" i="1" noProof="0" smtClean="0">
                             <a:latin typeface="Cambria Math" panose="02040503050406030204" pitchFamily="18" charset="0"/>
                             <a:ea typeface="Cambria Math" panose="02040503050406030204" pitchFamily="18" charset="0"/>
                           </a:rPr>
                           <m:t>𝑡</m:t>
                         </m:r>
                         <m:r>
-                          <a:rPr lang="fr-BE" sz="2000" b="0" i="1" smtClean="0">
+                          <a:rPr lang="en-GB" sz="2000" b="0" i="1" noProof="0" smtClean="0">
                             <a:latin typeface="Cambria Math" panose="02040503050406030204" pitchFamily="18" charset="0"/>
                             <a:ea typeface="Cambria Math" panose="02040503050406030204" pitchFamily="18" charset="0"/>
                           </a:rPr>
@@ -10802,14 +10779,14 @@
                   </m:oMath>
                 </a14:m>
                 <a:r>
-                  <a:rPr lang="en-GB" sz="2000" dirty="0"/>
+                  <a:rPr lang="en-GB" sz="2000" noProof="0" dirty="0"/>
                   <a:t>		(3.0)</a:t>
                 </a:r>
               </a:p>
               <a:p>
                 <a:pPr lvl="2"/>
                 <a:r>
-                  <a:rPr lang="en-GB" sz="2000" dirty="0"/>
+                  <a:rPr lang="en-GB" sz="2000" noProof="0" dirty="0"/>
                   <a:t>More generally: </a:t>
                 </a:r>
                 <a14:m>
@@ -10817,14 +10794,14 @@
                     <m:sSub>
                       <m:sSubPr>
                         <m:ctrlPr>
-                          <a:rPr lang="fr-BE" sz="2000" b="0" i="1" smtClean="0">
+                          <a:rPr lang="en-GB" sz="2000" b="0" i="1" noProof="0" smtClean="0">
                             <a:latin typeface="Cambria Math" panose="02040503050406030204" pitchFamily="18" charset="0"/>
                           </a:rPr>
                         </m:ctrlPr>
                       </m:sSubPr>
                       <m:e>
                         <m:r>
-                          <a:rPr lang="fr-BE" sz="2000" b="0" i="1" smtClean="0">
+                          <a:rPr lang="en-GB" sz="2000" b="0" i="1" noProof="0" smtClean="0">
                             <a:latin typeface="Cambria Math" panose="02040503050406030204" pitchFamily="18" charset="0"/>
                           </a:rPr>
                           <m:t>𝑦</m:t>
@@ -10832,7 +10809,7 @@
                       </m:e>
                       <m:sub>
                         <m:r>
-                          <a:rPr lang="fr-BE" sz="2000" b="0" i="1" smtClean="0">
+                          <a:rPr lang="en-GB" sz="2000" b="0" i="1" noProof="0" smtClean="0">
                             <a:latin typeface="Cambria Math" panose="02040503050406030204" pitchFamily="18" charset="0"/>
                           </a:rPr>
                           <m:t>𝑡</m:t>
@@ -10840,20 +10817,20 @@
                       </m:sub>
                     </m:sSub>
                     <m:r>
-                      <a:rPr lang="fr-BE" sz="2000" b="0" i="1" smtClean="0">
+                      <a:rPr lang="en-GB" sz="2000" b="0" i="1" noProof="0" smtClean="0">
                         <a:latin typeface="Cambria Math" panose="02040503050406030204" pitchFamily="18" charset="0"/>
                       </a:rPr>
                       <m:t>=</m:t>
                     </m:r>
                     <m:r>
-                      <a:rPr lang="fr-BE" sz="2000" b="0" i="1" smtClean="0">
+                      <a:rPr lang="en-GB" sz="2000" b="0" i="1" noProof="0" smtClean="0">
                         <a:latin typeface="Cambria Math" panose="02040503050406030204" pitchFamily="18" charset="0"/>
                         <a:ea typeface="Cambria Math" panose="02040503050406030204" pitchFamily="18" charset="0"/>
                       </a:rPr>
                       <m:t>𝛼</m:t>
                     </m:r>
                     <m:r>
-                      <a:rPr lang="fr-BE" sz="2000" b="0" i="1" smtClean="0">
+                      <a:rPr lang="en-GB" sz="2000" b="0" i="1" noProof="0" smtClean="0">
                         <a:latin typeface="Cambria Math" panose="02040503050406030204" pitchFamily="18" charset="0"/>
                         <a:ea typeface="Cambria Math" panose="02040503050406030204" pitchFamily="18" charset="0"/>
                       </a:rPr>
@@ -10862,14 +10839,14 @@
                     <m:sSub>
                       <m:sSubPr>
                         <m:ctrlPr>
-                          <a:rPr lang="fr-BE" sz="2000" b="0" i="1" smtClean="0">
+                          <a:rPr lang="en-GB" sz="2000" b="0" i="1" noProof="0" smtClean="0">
                             <a:latin typeface="Cambria Math" panose="02040503050406030204" pitchFamily="18" charset="0"/>
                           </a:rPr>
                         </m:ctrlPr>
                       </m:sSubPr>
                       <m:e>
                         <m:r>
-                          <a:rPr lang="fr-BE" sz="2000" b="0" i="1" smtClean="0">
+                          <a:rPr lang="en-GB" sz="2000" b="0" i="1" noProof="0" smtClean="0">
                             <a:latin typeface="Cambria Math" panose="02040503050406030204" pitchFamily="18" charset="0"/>
                           </a:rPr>
                           <m:t>𝑇𝐷</m:t>
@@ -10877,7 +10854,7 @@
                       </m:e>
                       <m:sub>
                         <m:r>
-                          <a:rPr lang="fr-BE" sz="2000" b="0" i="1" smtClean="0">
+                          <a:rPr lang="en-GB" sz="2000" b="0" i="1" noProof="0" smtClean="0">
                             <a:latin typeface="Cambria Math" panose="02040503050406030204" pitchFamily="18" charset="0"/>
                           </a:rPr>
                           <m:t>𝑡</m:t>
@@ -10885,14 +10862,14 @@
                       </m:sub>
                     </m:sSub>
                     <m:r>
-                      <a:rPr lang="fr-BE" sz="2000" b="0" i="1" smtClean="0">
+                      <a:rPr lang="en-GB" sz="2000" b="0" i="1" noProof="0" smtClean="0">
                         <a:latin typeface="Cambria Math" panose="02040503050406030204" pitchFamily="18" charset="0"/>
                         <a:ea typeface="Cambria Math" panose="02040503050406030204" pitchFamily="18" charset="0"/>
                       </a:rPr>
                       <m:t>𝛽</m:t>
                     </m:r>
                     <m:r>
-                      <a:rPr lang="fr-BE" sz="2000" b="0" i="1" smtClean="0">
+                      <a:rPr lang="en-GB" sz="2000" b="0" i="1" noProof="0" smtClean="0">
                         <a:latin typeface="Cambria Math" panose="02040503050406030204" pitchFamily="18" charset="0"/>
                         <a:ea typeface="Cambria Math" panose="02040503050406030204" pitchFamily="18" charset="0"/>
                       </a:rPr>
@@ -10901,7 +10878,7 @@
                     <m:sSub>
                       <m:sSubPr>
                         <m:ctrlPr>
-                          <a:rPr lang="fr-BE" sz="2000" b="0" i="1" smtClean="0">
+                          <a:rPr lang="en-GB" sz="2000" b="0" i="1" noProof="0" smtClean="0">
                             <a:latin typeface="Cambria Math" panose="02040503050406030204" pitchFamily="18" charset="0"/>
                             <a:ea typeface="Cambria Math" panose="02040503050406030204" pitchFamily="18" charset="0"/>
                           </a:rPr>
@@ -10909,7 +10886,7 @@
                       </m:sSubPr>
                       <m:e>
                         <m:r>
-                          <a:rPr lang="fr-BE" sz="2000" b="0" i="1" smtClean="0">
+                          <a:rPr lang="en-GB" sz="2000" b="0" i="1" noProof="0" smtClean="0">
                             <a:latin typeface="Cambria Math" panose="02040503050406030204" pitchFamily="18" charset="0"/>
                             <a:ea typeface="Cambria Math" panose="02040503050406030204" pitchFamily="18" charset="0"/>
                           </a:rPr>
@@ -10918,7 +10895,7 @@
                       </m:e>
                       <m:sub>
                         <m:r>
-                          <a:rPr lang="fr-BE" sz="2000" b="0" i="1" smtClean="0">
+                          <a:rPr lang="en-GB" sz="2000" b="0" i="1" noProof="0" smtClean="0">
                             <a:latin typeface="Cambria Math" panose="02040503050406030204" pitchFamily="18" charset="0"/>
                             <a:ea typeface="Cambria Math" panose="02040503050406030204" pitchFamily="18" charset="0"/>
                           </a:rPr>
@@ -10928,18 +10905,18 @@
                     </m:sSub>
                   </m:oMath>
                 </a14:m>
-                <a:endParaRPr lang="en-GB" sz="2000" dirty="0"/>
+                <a:endParaRPr lang="en-GB" sz="2000" noProof="0" dirty="0"/>
               </a:p>
               <a:p>
                 <a:pPr lvl="1"/>
                 <a:r>
-                  <a:rPr lang="en-GB" sz="2400" dirty="0"/>
+                  <a:rPr lang="en-GB" sz="2400" noProof="0" dirty="0"/>
                   <a:t>H0: coefficients (</a:t>
                 </a:r>
                 <a14:m>
                   <m:oMath xmlns:m="http://schemas.openxmlformats.org/officeDocument/2006/math">
                     <m:r>
-                      <a:rPr lang="fr-BE" sz="2400" b="0" i="1" smtClean="0">
+                      <a:rPr lang="en-GB" sz="2400" b="0" i="1" noProof="0" smtClean="0">
                         <a:latin typeface="Cambria Math" panose="02040503050406030204" pitchFamily="18" charset="0"/>
                         <a:ea typeface="Cambria Math" panose="02040503050406030204" pitchFamily="18" charset="0"/>
                       </a:rPr>
@@ -10948,24 +10925,24 @@
                   </m:oMath>
                 </a14:m>
                 <a:r>
-                  <a:rPr lang="en-GB" sz="2400" dirty="0"/>
+                  <a:rPr lang="en-GB" sz="2400" noProof="0" dirty="0"/>
                   <a:t>) are equal to 0, H1: coefficients jointly differ from 0</a:t>
                 </a:r>
               </a:p>
               <a:p>
                 <a:pPr lvl="1"/>
                 <a:r>
-                  <a:rPr lang="en-GB" sz="2400" dirty="0"/>
+                  <a:rPr lang="en-GB" sz="2400" noProof="0" dirty="0"/>
                   <a:t>Applied on (log) series. Should be applied on parts of the series</a:t>
                 </a:r>
               </a:p>
               <a:p>
-                <a:endParaRPr lang="en-GB" dirty="0"/>
+                <a:endParaRPr lang="en-GB" noProof="0" dirty="0"/>
               </a:p>
             </p:txBody>
           </p:sp>
         </mc:Choice>
-        <mc:Fallback xmlns="">
+        <mc:Fallback>
           <p:sp>
             <p:nvSpPr>
               <p:cNvPr id="3" name="Content Placeholder 2">
@@ -11036,7 +11013,7 @@
           <a:lstStyle/>
           <a:p>
             <a:r>
-              <a:rPr lang="en-GB"/>
+              <a:rPr lang="en-GB" noProof="0" dirty="0"/>
               <a:t>Seasonality and trading days tests</a:t>
             </a:r>
           </a:p>
@@ -11094,26 +11071,9 @@
           <a:lstStyle/>
           <a:p>
             <a:r>
-              <a:rPr lang="fr-BE" dirty="0"/>
-              <a:t>Trading </a:t>
+              <a:rPr lang="en-GB" noProof="0" dirty="0"/>
+              <a:t>Trading days tests(cont.)</a:t>
             </a:r>
-            <a:r>
-              <a:rPr lang="fr-BE" dirty="0" err="1"/>
-              <a:t>days</a:t>
-            </a:r>
-            <a:r>
-              <a:rPr lang="fr-BE" dirty="0"/>
-              <a:t> tests(</a:t>
-            </a:r>
-            <a:r>
-              <a:rPr lang="fr-BE" dirty="0" err="1"/>
-              <a:t>cont</a:t>
-            </a:r>
-            <a:r>
-              <a:rPr lang="fr-BE" dirty="0"/>
-              <a:t>.)</a:t>
-            </a:r>
-            <a:endParaRPr lang="en-GB" dirty="0"/>
           </a:p>
         </p:txBody>
       </p:sp>
@@ -11139,10 +11099,10 @@
           <a:lstStyle/>
           <a:p>
             <a:fld id="{71CC62B1-FA1F-4849-B719-012F8D8A46B3}" type="slidenum">
-              <a:rPr lang="en-GB" smtClean="0"/>
+              <a:rPr lang="en-GB" noProof="0" smtClean="0"/>
               <a:t>9</a:t>
             </a:fld>
-            <a:endParaRPr lang="en-GB"/>
+            <a:endParaRPr lang="en-GB" noProof="0" dirty="0"/>
           </a:p>
         </p:txBody>
       </p:sp>
@@ -11173,15 +11133,15 @@
           <a:lstStyle/>
           <a:p>
             <a:r>
-              <a:rPr lang="en-GB" sz="2800" b="1" dirty="0"/>
+              <a:rPr lang="en-GB" sz="2800" b="1" noProof="0" dirty="0"/>
               <a:t>Canova-Hansen test </a:t>
             </a:r>
             <a:r>
-              <a:rPr lang="en-GB" sz="2800" dirty="0"/>
+              <a:rPr lang="en-GB" sz="2800" noProof="0" dirty="0"/>
               <a:t>on trading days variables </a:t>
             </a:r>
             <a:r>
-              <a:rPr lang="en-GB" sz="2800" b="1" dirty="0"/>
+              <a:rPr lang="en-GB" sz="2800" b="1" noProof="0" dirty="0"/>
               <a:t>(R only)</a:t>
             </a:r>
           </a:p>
@@ -11239,7 +11199,7 @@
               <a:tabLst/>
               <a:defRPr/>
             </a:pPr>
-            <a:endParaRPr lang="en-GB" sz="2400" dirty="0">
+            <a:endParaRPr lang="en-GB" sz="2400" noProof="0" dirty="0">
               <a:solidFill>
                 <a:srgbClr val="000000"/>
               </a:solidFill>
@@ -11271,7 +11231,7 @@
               <a:t>Likelihood ratio test </a:t>
             </a:r>
             <a:r>
-              <a:rPr lang="en-GB" sz="2800" dirty="0">
+              <a:rPr lang="en-GB" sz="2800" noProof="0" dirty="0">
                 <a:solidFill>
                   <a:srgbClr val="000000"/>
                 </a:solidFill>
@@ -11282,7 +11242,7 @@
               <a:t>on time varying trading days coefficients </a:t>
             </a:r>
             <a:r>
-              <a:rPr lang="en-GB" sz="2800" b="1" dirty="0"/>
+              <a:rPr lang="en-GB" sz="2800" b="1" noProof="0" dirty="0"/>
               <a:t>(R only)</a:t>
             </a:r>
           </a:p>
@@ -11291,7 +11251,7 @@
               <a:defRPr/>
             </a:pPr>
             <a:r>
-              <a:rPr lang="en-GB" sz="2400" dirty="0">
+              <a:rPr lang="en-GB" sz="2400" noProof="0" dirty="0">
                 <a:solidFill>
                   <a:srgbClr val="000000"/>
                 </a:solidFill>
@@ -11325,7 +11285,7 @@
             </a:endParaRPr>
           </a:p>
           <a:p>
-            <a:endParaRPr lang="en-GB" b="1" dirty="0"/>
+            <a:endParaRPr lang="en-GB" b="1" noProof="0" dirty="0"/>
           </a:p>
         </p:txBody>
       </p:sp>
@@ -11356,7 +11316,7 @@
           <a:lstStyle/>
           <a:p>
             <a:r>
-              <a:rPr lang="en-GB"/>
+              <a:rPr lang="en-GB" noProof="0" dirty="0"/>
               <a:t>Seasonality and trading days tests</a:t>
             </a:r>
           </a:p>
@@ -12247,17 +12207,6 @@
 </file>
 
 <file path=customXml/item1.xml><?xml version="1.0" encoding="utf-8"?>
-<p:properties xmlns:p="http://schemas.microsoft.com/office/2006/metadata/properties" xmlns:xsi="http://www.w3.org/2001/XMLSchema-instance" xmlns:pc="http://schemas.microsoft.com/office/infopath/2007/PartnerControls">
-  <documentManagement>
-    <lcf76f155ced4ddcb4097134ff3c332f xmlns="0e422b70-e85d-4377-8ee0-b6227433d381">
-      <Terms xmlns="http://schemas.microsoft.com/office/infopath/2007/PartnerControls"/>
-    </lcf76f155ced4ddcb4097134ff3c332f>
-    <TaxCatchAll xmlns="199f642e-5af9-486c-ac06-f366742ef41a"/>
-  </documentManagement>
-</p:properties>
-</file>
-
-<file path=customXml/item2.xml><?xml version="1.0" encoding="utf-8"?>
 <ct:contentTypeSchema xmlns:ct="http://schemas.microsoft.com/office/2006/metadata/contentType" xmlns:ma="http://schemas.microsoft.com/office/2006/metadata/properties/metaAttributes" ct:_="" ma:_="" ma:contentTypeName="Document" ma:contentTypeID="0x010100E6AA5C57F8EADE4E9CD6BB064C0C3195" ma:contentTypeVersion="16" ma:contentTypeDescription="Create a new document." ma:contentTypeScope="" ma:versionID="bb51c19a58f458ddcddd050a07659236">
   <xsd:schema xmlns:xsd="http://www.w3.org/2001/XMLSchema" xmlns:xs="http://www.w3.org/2001/XMLSchema" xmlns:p="http://schemas.microsoft.com/office/2006/metadata/properties" xmlns:ns2="0e422b70-e85d-4377-8ee0-b6227433d381" xmlns:ns3="199f642e-5af9-486c-ac06-f366742ef41a" targetNamespace="http://schemas.microsoft.com/office/2006/metadata/properties" ma:root="true" ma:fieldsID="0ee7a3bac0352a48a43420936abd968a" ns2:_="" ns3:_="">
     <xsd:import namespace="0e422b70-e85d-4377-8ee0-b6227433d381"/>
@@ -12498,6 +12447,17 @@
 </ct:contentTypeSchema>
 </file>
 
+<file path=customXml/item2.xml><?xml version="1.0" encoding="utf-8"?>
+<p:properties xmlns:p="http://schemas.microsoft.com/office/2006/metadata/properties" xmlns:xsi="http://www.w3.org/2001/XMLSchema-instance" xmlns:pc="http://schemas.microsoft.com/office/infopath/2007/PartnerControls">
+  <documentManagement>
+    <lcf76f155ced4ddcb4097134ff3c332f xmlns="0e422b70-e85d-4377-8ee0-b6227433d381">
+      <Terms xmlns="http://schemas.microsoft.com/office/infopath/2007/PartnerControls"/>
+    </lcf76f155ced4ddcb4097134ff3c332f>
+    <TaxCatchAll xmlns="199f642e-5af9-486c-ac06-f366742ef41a"/>
+  </documentManagement>
+</p:properties>
+</file>
+
 <file path=customXml/item3.xml><?xml version="1.0" encoding="utf-8"?>
 <?mso-contentType ?>
 <FormTemplates xmlns="http://schemas.microsoft.com/sharepoint/v3/contenttype/forms">
@@ -12508,23 +12468,6 @@
 </file>
 
 <file path=customXml/itemProps1.xml><?xml version="1.0" encoding="utf-8"?>
-<ds:datastoreItem xmlns:ds="http://schemas.openxmlformats.org/officeDocument/2006/customXml" ds:itemID="{2D6C293B-B8B4-4284-A17E-9F9E4C32B25A}">
-  <ds:schemaRefs>
-    <ds:schemaRef ds:uri="http://schemas.microsoft.com/office/2006/documentManagement/types"/>
-    <ds:schemaRef ds:uri="http://purl.org/dc/elements/1.1/"/>
-    <ds:schemaRef ds:uri="http://purl.org/dc/terms/"/>
-    <ds:schemaRef ds:uri="http://purl.org/dc/dcmitype/"/>
-    <ds:schemaRef ds:uri="0e422b70-e85d-4377-8ee0-b6227433d381"/>
-    <ds:schemaRef ds:uri="http://schemas.microsoft.com/office/infopath/2007/PartnerControls"/>
-    <ds:schemaRef ds:uri="199f642e-5af9-486c-ac06-f366742ef41a"/>
-    <ds:schemaRef ds:uri="http://schemas.openxmlformats.org/package/2006/metadata/core-properties"/>
-    <ds:schemaRef ds:uri="http://schemas.microsoft.com/office/2006/metadata/properties"/>
-    <ds:schemaRef ds:uri="http://www.w3.org/XML/1998/namespace"/>
-  </ds:schemaRefs>
-</ds:datastoreItem>
-</file>
-
-<file path=customXml/itemProps2.xml><?xml version="1.0" encoding="utf-8"?>
 <ds:datastoreItem xmlns:ds="http://schemas.openxmlformats.org/officeDocument/2006/customXml" ds:itemID="{04B464EA-1576-49DD-9675-1E3399D4D196}">
   <ds:schemaRefs>
     <ds:schemaRef ds:uri="http://schemas.microsoft.com/office/2006/metadata/contentType"/>
@@ -12543,6 +12486,23 @@
 </ds:datastoreItem>
 </file>
 
+<file path=customXml/itemProps2.xml><?xml version="1.0" encoding="utf-8"?>
+<ds:datastoreItem xmlns:ds="http://schemas.openxmlformats.org/officeDocument/2006/customXml" ds:itemID="{2D6C293B-B8B4-4284-A17E-9F9E4C32B25A}">
+  <ds:schemaRefs>
+    <ds:schemaRef ds:uri="http://schemas.microsoft.com/office/2006/documentManagement/types"/>
+    <ds:schemaRef ds:uri="http://purl.org/dc/elements/1.1/"/>
+    <ds:schemaRef ds:uri="http://purl.org/dc/terms/"/>
+    <ds:schemaRef ds:uri="http://purl.org/dc/dcmitype/"/>
+    <ds:schemaRef ds:uri="0e422b70-e85d-4377-8ee0-b6227433d381"/>
+    <ds:schemaRef ds:uri="http://schemas.microsoft.com/office/infopath/2007/PartnerControls"/>
+    <ds:schemaRef ds:uri="199f642e-5af9-486c-ac06-f366742ef41a"/>
+    <ds:schemaRef ds:uri="http://schemas.openxmlformats.org/package/2006/metadata/core-properties"/>
+    <ds:schemaRef ds:uri="http://schemas.microsoft.com/office/2006/metadata/properties"/>
+    <ds:schemaRef ds:uri="http://www.w3.org/XML/1998/namespace"/>
+  </ds:schemaRefs>
+</ds:datastoreItem>
+</file>
+
 <file path=customXml/itemProps3.xml><?xml version="1.0" encoding="utf-8"?>
 <ds:datastoreItem xmlns:ds="http://schemas.openxmlformats.org/officeDocument/2006/customXml" ds:itemID="{67DD9E9F-9EEB-4105-B29B-819486C2855A}">
   <ds:schemaRefs>
